--- a/docs/EcoCast_AI_Yuva_Yodha_Presentation.pptx
+++ b/docs/EcoCast_AI_Yuva_Yodha_Presentation.pptx
@@ -3095,7 +3095,7 @@
     <p:bg>
       <p:bgPr>
         <a:solidFill>
-          <a:srgbClr val="0A0E14"/>
+          <a:srgbClr val="FFFFFF"/>
         </a:solidFill>
         <a:effectLst/>
       </p:bgPr>
@@ -3109,14 +3109,57 @@
       <p:grpSpPr/>
       <p:sp>
         <p:nvSpPr>
-          <p:cNvPr id="2" name="TextBox 1"/>
+          <p:cNvPr id="2" name="Rectangle 1"/>
+          <p:cNvSpPr/>
+          <p:nvPr/>
+        </p:nvSpPr>
+        <p:spPr>
+          <a:xfrm>
+            <a:off x="0" y="0"/>
+            <a:ext cx="12191695" cy="182880"/>
+          </a:xfrm>
+          <a:prstGeom prst="rect">
+            <a:avLst/>
+          </a:prstGeom>
+          <a:solidFill>
+            <a:srgbClr val="009530"/>
+          </a:solidFill>
+          <a:ln>
+            <a:noFill/>
+          </a:ln>
+        </p:spPr>
+        <p:style>
+          <a:lnRef idx="1">
+            <a:schemeClr val="accent1"/>
+          </a:lnRef>
+          <a:fillRef idx="3">
+            <a:schemeClr val="accent1"/>
+          </a:fillRef>
+          <a:effectRef idx="2">
+            <a:schemeClr val="accent1"/>
+          </a:effectRef>
+          <a:fontRef idx="minor">
+            <a:schemeClr val="lt1"/>
+          </a:fontRef>
+        </p:style>
+        <p:txBody>
+          <a:bodyPr rtlCol="0" anchor="ctr"/>
+          <a:lstStyle/>
+          <a:p>
+            <a:pPr algn="ctr"/>
+          </a:p>
+        </p:txBody>
+      </p:sp>
+      <p:sp>
+        <p:nvSpPr>
+          <p:cNvPr id="3" name="TextBox 2"/>
           <p:cNvSpPr txBox="1"/>
           <p:nvPr/>
         </p:nvSpPr>
         <p:spPr>
           <a:xfrm>
-            <a:off x="1097280" y="1645920"/>
-            <a:ext cx="10058400" cy="3657600"/>
+            <a:off x="914400" y="1280160"/>
+            <a:ext cx="10332720" cy="4114800"/>
           </a:xfrm>
           <a:prstGeom prst="rect">
             <a:avLst/>
@@ -3130,9 +3173,9 @@
           <a:lstStyle/>
           <a:p>
             <a:pPr>
-              <a:defRPr sz="1400" b="1">
-                <a:solidFill>
-                  <a:srgbClr val="3DCD58"/>
+              <a:defRPr sz="1300" b="1">
+                <a:solidFill>
+                  <a:srgbClr val="009530"/>
                 </a:solidFill>
               </a:defRPr>
             </a:pPr>
@@ -3145,9 +3188,9 @@
               <a:spcBef>
                 <a:spcPts val="1000"/>
               </a:spcBef>
-              <a:defRPr sz="4800" b="1">
-                <a:solidFill>
-                  <a:srgbClr val="F1F5F9"/>
+              <a:defRPr sz="4600" b="1">
+                <a:solidFill>
+                  <a:srgbClr val="0F172A"/>
                 </a:solidFill>
               </a:defRPr>
             </a:pPr>
@@ -3160,9 +3203,9 @@
               <a:spcBef>
                 <a:spcPts val="800"/>
               </a:spcBef>
-              <a:defRPr sz="1800">
-                <a:solidFill>
-                  <a:srgbClr val="38BDF8"/>
+              <a:defRPr sz="1800" b="1">
+                <a:solidFill>
+                  <a:srgbClr val="2563EB"/>
                 </a:solidFill>
               </a:defRPr>
             </a:pPr>
@@ -3173,11 +3216,11 @@
           <a:p>
             <a:pPr>
               <a:spcBef>
-                <a:spcPts val="2500"/>
+                <a:spcPts val="1800"/>
               </a:spcBef>
               <a:defRPr sz="1300">
                 <a:solidFill>
-                  <a:srgbClr val="94A3B8"/>
+                  <a:srgbClr val="475569"/>
                 </a:solidFill>
               </a:defRPr>
             </a:pPr>
@@ -3186,11 +3229,117 @@
             </a:r>
             <a:br/>
             <a:r>
-              <a:t>Benchmark Context: Kolhapur MSME Foundry Cluster, Maharashtra</a:t>
-            </a:r>
-            <a:br/>
-            <a:r>
-              <a:t>Team: Deepak R (Team Lead) &amp; Saranya Dutta (IIPE)</a:t>
+              <a:t>Operational Benchmark: Kolhapur MSME Foundry Cluster, Maharashtra, India</a:t>
+            </a:r>
+          </a:p>
+        </p:txBody>
+      </p:sp>
+      <p:sp>
+        <p:nvSpPr>
+          <p:cNvPr id="4" name="Rounded Rectangle 3"/>
+          <p:cNvSpPr/>
+          <p:nvPr/>
+        </p:nvSpPr>
+        <p:spPr>
+          <a:xfrm>
+            <a:off x="914400" y="4389120"/>
+            <a:ext cx="10332720" cy="1645920"/>
+          </a:xfrm>
+          <a:prstGeom prst="roundRect">
+            <a:avLst/>
+          </a:prstGeom>
+          <a:solidFill>
+            <a:srgbClr val="F8FAFC"/>
+          </a:solidFill>
+          <a:ln w="19050">
+            <a:solidFill>
+              <a:srgbClr val="009530"/>
+            </a:solidFill>
+          </a:ln>
+        </p:spPr>
+        <p:style>
+          <a:lnRef idx="1">
+            <a:schemeClr val="accent1"/>
+          </a:lnRef>
+          <a:fillRef idx="3">
+            <a:schemeClr val="accent1"/>
+          </a:fillRef>
+          <a:effectRef idx="2">
+            <a:schemeClr val="accent1"/>
+          </a:effectRef>
+          <a:fontRef idx="minor">
+            <a:schemeClr val="lt1"/>
+          </a:fontRef>
+        </p:style>
+        <p:txBody>
+          <a:bodyPr rtlCol="0" anchor="ctr"/>
+          <a:lstStyle/>
+          <a:p>
+            <a:pPr algn="ctr"/>
+          </a:p>
+        </p:txBody>
+      </p:sp>
+      <p:sp>
+        <p:nvSpPr>
+          <p:cNvPr id="5" name="TextBox 4"/>
+          <p:cNvSpPr txBox="1"/>
+          <p:nvPr/>
+        </p:nvSpPr>
+        <p:spPr>
+          <a:xfrm>
+            <a:off x="1097280" y="4480560"/>
+            <a:ext cx="9966960" cy="1463040"/>
+          </a:xfrm>
+          <a:prstGeom prst="rect">
+            <a:avLst/>
+          </a:prstGeom>
+          <a:noFill/>
+        </p:spPr>
+        <p:txBody>
+          <a:bodyPr wrap="square">
+            <a:spAutoFit/>
+          </a:bodyPr>
+          <a:lstStyle/>
+          <a:p>
+            <a:pPr>
+              <a:defRPr sz="1100" b="1">
+                <a:solidFill>
+                  <a:srgbClr val="009530"/>
+                </a:solidFill>
+              </a:defRPr>
+            </a:pPr>
+            <a:r>
+              <a:t>PROJECT TEAM (INDIAN INSTITUTE OF PETROLEUM AND ENERGY)</a:t>
+            </a:r>
+          </a:p>
+          <a:p>
+            <a:pPr>
+              <a:spcBef>
+                <a:spcPts val="400"/>
+              </a:spcBef>
+              <a:defRPr sz="1200" b="1">
+                <a:solidFill>
+                  <a:srgbClr val="0F172A"/>
+                </a:solidFill>
+              </a:defRPr>
+            </a:pPr>
+            <a:r>
+              <a:t>• Deepak R (Team Lead) — Systems Architect &amp; Edge Developer | Full-Stack IoT, 3D Digital Twin, Modbus-TCP Ingestion</a:t>
+            </a:r>
+          </a:p>
+          <a:p>
+            <a:pPr>
+              <a:spcBef>
+                <a:spcPts val="300"/>
+              </a:spcBef>
+              <a:defRPr sz="1200" b="1">
+                <a:solidFill>
+                  <a:srgbClr val="0F172A"/>
+                </a:solidFill>
+              </a:defRPr>
+            </a:pPr>
+            <a:r>
+              <a:t>• Saranya Dutta (Team Member) — Chemical Process Engineer | Roll: 23CH10028 | saranyadutta@iipe.ac.in | Thermodynamics, Energy Balances &amp; EU CBAM/BEE Modeling</a:t>
             </a:r>
           </a:p>
         </p:txBody>
@@ -3209,7 +3358,7 @@
     <p:bg>
       <p:bgPr>
         <a:solidFill>
-          <a:srgbClr val="0A0E14"/>
+          <a:srgbClr val="FFFFFF"/>
         </a:solidFill>
         <a:effectLst/>
       </p:bgPr>
@@ -3223,95 +3372,23 @@
       <p:grpSpPr/>
       <p:sp>
         <p:nvSpPr>
-          <p:cNvPr id="2" name="TextBox 1"/>
-          <p:cNvSpPr txBox="1"/>
-          <p:nvPr/>
-        </p:nvSpPr>
-        <p:spPr>
-          <a:xfrm>
-            <a:off x="731520" y="365760"/>
-            <a:ext cx="10698480" cy="365760"/>
-          </a:xfrm>
-          <a:prstGeom prst="rect">
-            <a:avLst/>
-          </a:prstGeom>
-          <a:noFill/>
-        </p:spPr>
-        <p:txBody>
-          <a:bodyPr wrap="square">
-            <a:spAutoFit/>
-          </a:bodyPr>
-          <a:lstStyle/>
-          <a:p>
-            <a:pPr>
-              <a:defRPr sz="1100" b="1">
-                <a:solidFill>
-                  <a:srgbClr val="3DCD58"/>
-                </a:solidFill>
-              </a:defRPr>
-            </a:pPr>
-            <a:r>
-              <a:t>SCHNEIDER ELECTRIC YUVA YODHA 2026 • CHALLENGE 4: SMART MANUFACTURING</a:t>
-            </a:r>
-          </a:p>
-        </p:txBody>
-      </p:sp>
-      <p:sp>
-        <p:nvSpPr>
-          <p:cNvPr id="3" name="TextBox 2"/>
-          <p:cNvSpPr txBox="1"/>
-          <p:nvPr/>
-        </p:nvSpPr>
-        <p:spPr>
-          <a:xfrm>
-            <a:off x="731520" y="640080"/>
-            <a:ext cx="10698480" cy="731520"/>
-          </a:xfrm>
-          <a:prstGeom prst="rect">
-            <a:avLst/>
-          </a:prstGeom>
-          <a:noFill/>
-        </p:spPr>
-        <p:txBody>
-          <a:bodyPr wrap="square">
-            <a:spAutoFit/>
-          </a:bodyPr>
-          <a:lstStyle/>
-          <a:p>
-            <a:pPr>
-              <a:defRPr sz="2400" b="1">
-                <a:solidFill>
-                  <a:srgbClr val="F1F5F9"/>
-                </a:solidFill>
-              </a:defRPr>
-            </a:pPr>
-            <a:r>
-              <a:t>Demonstrable ROI: 6-Month Payback for a Typical MSME Foundry</a:t>
-            </a:r>
-          </a:p>
-        </p:txBody>
-      </p:sp>
-      <p:sp>
-        <p:nvSpPr>
-          <p:cNvPr id="4" name="Rounded Rectangle 3"/>
+          <p:cNvPr id="2" name="Rectangle 1"/>
           <p:cNvSpPr/>
           <p:nvPr/>
         </p:nvSpPr>
         <p:spPr>
           <a:xfrm>
-            <a:off x="731520" y="1645920"/>
-            <a:ext cx="5120640" cy="4572000"/>
-          </a:xfrm>
-          <a:prstGeom prst="roundRect">
+            <a:off x="0" y="0"/>
+            <a:ext cx="12191695" cy="109728"/>
+          </a:xfrm>
+          <a:prstGeom prst="rect">
             <a:avLst/>
           </a:prstGeom>
           <a:solidFill>
-            <a:srgbClr val="111722"/>
+            <a:srgbClr val="009530"/>
           </a:solidFill>
-          <a:ln w="19050">
-            <a:solidFill>
-              <a:srgbClr val="3DCD58"/>
-            </a:solidFill>
+          <a:ln>
+            <a:noFill/>
           </a:ln>
         </p:spPr>
         <p:style>
@@ -3338,14 +3415,14 @@
       </p:sp>
       <p:sp>
         <p:nvSpPr>
-          <p:cNvPr id="5" name="TextBox 4"/>
+          <p:cNvPr id="3" name="TextBox 2"/>
           <p:cNvSpPr txBox="1"/>
           <p:nvPr/>
         </p:nvSpPr>
         <p:spPr>
           <a:xfrm>
-            <a:off x="914400" y="1828800"/>
-            <a:ext cx="4754880" cy="4206240"/>
+            <a:off x="731520" y="320040"/>
+            <a:ext cx="10698480" cy="320040"/>
           </a:xfrm>
           <a:prstGeom prst="rect">
             <a:avLst/>
@@ -3359,113 +3436,73 @@
           <a:lstStyle/>
           <a:p>
             <a:pPr>
-              <a:defRPr sz="1600" b="1">
-                <a:solidFill>
-                  <a:srgbClr val="F1F5F9"/>
-                </a:solidFill>
-              </a:defRPr>
-            </a:pPr>
-            <a:r>
-              <a:t>Annual Savings Breakdown (2,500 MT/year Foundry)</a:t>
-            </a:r>
-          </a:p>
-          <a:p>
-            <a:pPr>
-              <a:spcBef>
-                <a:spcPts val="600"/>
-              </a:spcBef>
-              <a:defRPr sz="1200">
-                <a:solidFill>
-                  <a:srgbClr val="94A3B8"/>
-                </a:solidFill>
-              </a:defRPr>
-            </a:pPr>
-            <a:r>
-              <a:t>• Holding Time Elimination (30 min/heat): Saves 216,000 kWh = ₹18.4 Lakhs/year.</a:t>
-            </a:r>
-          </a:p>
-          <a:p>
-            <a:pPr>
-              <a:spcBef>
-                <a:spcPts val="600"/>
-              </a:spcBef>
-              <a:defRPr sz="1200">
-                <a:solidFill>
-                  <a:srgbClr val="94A3B8"/>
-                </a:solidFill>
-              </a:defRPr>
-            </a:pPr>
-            <a:r>
-              <a:t>• Time-of-Use Night Tariff Shift (25% load): Saves ₹9.3 Lakhs/year in rebates.</a:t>
-            </a:r>
-          </a:p>
-          <a:p>
-            <a:pPr>
-              <a:spcBef>
-                <a:spcPts val="600"/>
-              </a:spcBef>
-              <a:defRPr sz="1200">
-                <a:solidFill>
-                  <a:srgbClr val="94A3B8"/>
-                </a:solidFill>
-              </a:defRPr>
-            </a:pPr>
-            <a:r>
-              <a:t>• Lid Automation &amp; Cover Adherence: Saves 52,300 kWh = ₹4.4 Lakhs/year in radiation.</a:t>
-            </a:r>
-          </a:p>
-          <a:p>
-            <a:pPr>
-              <a:spcBef>
-                <a:spcPts val="600"/>
-              </a:spcBef>
-              <a:defRPr sz="1200">
-                <a:solidFill>
-                  <a:srgbClr val="94A3B8"/>
-                </a:solidFill>
-              </a:defRPr>
-            </a:pPr>
-            <a:r>
-              <a:t>• Total Annual Energy Bill Savings: ₹32 Lakhs to ₹45 Lakhs (12% to 18% reduction).</a:t>
-            </a:r>
-          </a:p>
-          <a:p>
-            <a:pPr>
-              <a:spcBef>
-                <a:spcPts val="600"/>
-              </a:spcBef>
-              <a:defRPr sz="1200">
-                <a:solidFill>
-                  <a:srgbClr val="94A3B8"/>
-                </a:solidFill>
-              </a:defRPr>
-            </a:pPr>
-            <a:r>
-              <a:t>• Software + Gateway Investment: ~₹1.5 Lakhs (Payback &lt; 6 months).</a:t>
-            </a:r>
-          </a:p>
-        </p:txBody>
-      </p:sp>
-      <p:sp>
-        <p:nvSpPr>
-          <p:cNvPr id="6" name="Rounded Rectangle 5"/>
+              <a:defRPr sz="1100" b="1">
+                <a:solidFill>
+                  <a:srgbClr val="009530"/>
+                </a:solidFill>
+              </a:defRPr>
+            </a:pPr>
+            <a:r>
+              <a:t>SCHNEIDER ELECTRIC YUVA YODHA 2026 • CHALLENGE 4: SMART MANUFACTURING</a:t>
+            </a:r>
+          </a:p>
+        </p:txBody>
+      </p:sp>
+      <p:sp>
+        <p:nvSpPr>
+          <p:cNvPr id="4" name="TextBox 3"/>
+          <p:cNvSpPr txBox="1"/>
+          <p:nvPr/>
+        </p:nvSpPr>
+        <p:spPr>
+          <a:xfrm>
+            <a:off x="731520" y="594360"/>
+            <a:ext cx="10698480" cy="685800"/>
+          </a:xfrm>
+          <a:prstGeom prst="rect">
+            <a:avLst/>
+          </a:prstGeom>
+          <a:noFill/>
+        </p:spPr>
+        <p:txBody>
+          <a:bodyPr wrap="square">
+            <a:spAutoFit/>
+          </a:bodyPr>
+          <a:lstStyle/>
+          <a:p>
+            <a:pPr>
+              <a:defRPr sz="2200" b="1">
+                <a:solidFill>
+                  <a:srgbClr val="0F172A"/>
+                </a:solidFill>
+              </a:defRPr>
+            </a:pPr>
+            <a:r>
+              <a:t>Implementation Roadmap: From Kolhapur Pilot to Cluster Scale</a:t>
+            </a:r>
+          </a:p>
+        </p:txBody>
+      </p:sp>
+      <p:sp>
+        <p:nvSpPr>
+          <p:cNvPr id="5" name="Rounded Rectangle 4"/>
           <p:cNvSpPr/>
           <p:nvPr/>
         </p:nvSpPr>
         <p:spPr>
           <a:xfrm>
-            <a:off x="6217920" y="1645920"/>
-            <a:ext cx="5120640" cy="4572000"/>
+            <a:off x="731520" y="1463040"/>
+            <a:ext cx="2468880" cy="4846320"/>
           </a:xfrm>
           <a:prstGeom prst="roundRect">
             <a:avLst/>
           </a:prstGeom>
           <a:solidFill>
-            <a:srgbClr val="111722"/>
+            <a:srgbClr val="F8FAFC"/>
           </a:solidFill>
           <a:ln w="19050">
             <a:solidFill>
-              <a:srgbClr val="38BDF8"/>
+              <a:srgbClr val="E2E8F0"/>
             </a:solidFill>
           </a:ln>
         </p:spPr>
@@ -3493,14 +3530,14 @@
       </p:sp>
       <p:sp>
         <p:nvSpPr>
-          <p:cNvPr id="7" name="TextBox 6"/>
+          <p:cNvPr id="6" name="TextBox 5"/>
           <p:cNvSpPr txBox="1"/>
           <p:nvPr/>
         </p:nvSpPr>
         <p:spPr>
           <a:xfrm>
-            <a:off x="6400800" y="1828800"/>
-            <a:ext cx="4754880" cy="4206240"/>
+            <a:off x="960120" y="1645920"/>
+            <a:ext cx="2011680" cy="4480560"/>
           </a:xfrm>
           <a:prstGeom prst="rect">
             <a:avLst/>
@@ -3514,74 +3551,494 @@
           <a:lstStyle/>
           <a:p>
             <a:pPr>
-              <a:defRPr sz="1600" b="1">
-                <a:solidFill>
-                  <a:srgbClr val="F1F5F9"/>
-                </a:solidFill>
-              </a:defRPr>
-            </a:pPr>
-            <a:r>
-              <a:t>Macro Environmental &amp; Cluster Impact</a:t>
-            </a:r>
-          </a:p>
-          <a:p>
-            <a:pPr>
-              <a:spcBef>
-                <a:spcPts val="600"/>
-              </a:spcBef>
-              <a:defRPr sz="1200">
-                <a:solidFill>
-                  <a:srgbClr val="94A3B8"/>
-                </a:solidFill>
-              </a:defRPr>
-            </a:pPr>
-            <a:r>
-              <a:t>• Avoided Carbon Emissions: 350 to 500 tonnes of CO2 per foundry per year.</a:t>
-            </a:r>
-          </a:p>
-          <a:p>
-            <a:pPr>
-              <a:spcBef>
-                <a:spcPts val="600"/>
-              </a:spcBef>
-              <a:defRPr sz="1200">
-                <a:solidFill>
-                  <a:srgbClr val="94A3B8"/>
-                </a:solidFill>
-              </a:defRPr>
-            </a:pPr>
-            <a:r>
-              <a:t>• Cluster-wide Impact across Kolhapur's 300 units: ₹14 Crore annual savings.</a:t>
-            </a:r>
-          </a:p>
-          <a:p>
-            <a:pPr>
-              <a:spcBef>
-                <a:spcPts val="600"/>
-              </a:spcBef>
-              <a:defRPr sz="1200">
-                <a:solidFill>
-                  <a:srgbClr val="94A3B8"/>
-                </a:solidFill>
-              </a:defRPr>
-            </a:pPr>
-            <a:r>
-              <a:t>• National Scaling across 5,000 MSME foundries: &gt;150,000 tonnes of avoided CO2 annually.</a:t>
-            </a:r>
-          </a:p>
-          <a:p>
-            <a:pPr>
-              <a:spcBef>
-                <a:spcPts val="600"/>
-              </a:spcBef>
-              <a:defRPr sz="1200">
-                <a:solidFill>
-                  <a:srgbClr val="94A3B8"/>
-                </a:solidFill>
-              </a:defRPr>
-            </a:pPr>
-            <a:r>
-              <a:t>• Protects international market access against incoming CBAM import duties.</a:t>
+              <a:defRPr sz="1500" b="1">
+                <a:solidFill>
+                  <a:srgbClr val="0F172A"/>
+                </a:solidFill>
+              </a:defRPr>
+            </a:pPr>
+            <a:r>
+              <a:t>Q1: Pilot Baseline</a:t>
+            </a:r>
+          </a:p>
+          <a:p>
+            <a:pPr>
+              <a:spcBef>
+                <a:spcPts val="200"/>
+              </a:spcBef>
+              <a:defRPr sz="1000" b="1">
+                <a:solidFill>
+                  <a:srgbClr val="009530"/>
+                </a:solidFill>
+              </a:defRPr>
+            </a:pPr>
+            <a:r>
+              <a:t>PHASE 1 (MONTHS 1–3)</a:t>
+            </a:r>
+          </a:p>
+          <a:p>
+            <a:pPr>
+              <a:spcBef>
+                <a:spcPts val="500"/>
+              </a:spcBef>
+              <a:defRPr sz="1100">
+                <a:solidFill>
+                  <a:srgbClr val="475569"/>
+                </a:solidFill>
+              </a:defRPr>
+            </a:pPr>
+            <a:r>
+              <a:t>•  Hardware Calibration: Deploy edge gateways in 3 Kolhapur foundries with Schneider PM5350 meters.</a:t>
+            </a:r>
+          </a:p>
+          <a:p>
+            <a:pPr>
+              <a:spcBef>
+                <a:spcPts val="500"/>
+              </a:spcBef>
+              <a:defRPr sz="1100">
+                <a:solidFill>
+                  <a:srgbClr val="475569"/>
+                </a:solidFill>
+              </a:defRPr>
+            </a:pPr>
+            <a:r>
+              <a:t>•  Baseline Telemetry: Log 100 heat cycles across SG iron and grey iron grades.</a:t>
+            </a:r>
+          </a:p>
+          <a:p>
+            <a:pPr>
+              <a:spcBef>
+                <a:spcPts val="500"/>
+              </a:spcBef>
+              <a:defRPr sz="1100">
+                <a:solidFill>
+                  <a:srgbClr val="475569"/>
+                </a:solidFill>
+              </a:defRPr>
+            </a:pPr>
+            <a:r>
+              <a:t>•  Zero-Interruption Test: Validate non-invasive Modbus read-only polling.</a:t>
+            </a:r>
+          </a:p>
+        </p:txBody>
+      </p:sp>
+      <p:sp>
+        <p:nvSpPr>
+          <p:cNvPr id="7" name="Rounded Rectangle 6"/>
+          <p:cNvSpPr/>
+          <p:nvPr/>
+        </p:nvSpPr>
+        <p:spPr>
+          <a:xfrm>
+            <a:off x="3474720" y="1463040"/>
+            <a:ext cx="2468880" cy="4846320"/>
+          </a:xfrm>
+          <a:prstGeom prst="roundRect">
+            <a:avLst/>
+          </a:prstGeom>
+          <a:solidFill>
+            <a:srgbClr val="F8FAFC"/>
+          </a:solidFill>
+          <a:ln w="19050">
+            <a:solidFill>
+              <a:srgbClr val="D97706"/>
+            </a:solidFill>
+          </a:ln>
+        </p:spPr>
+        <p:style>
+          <a:lnRef idx="1">
+            <a:schemeClr val="accent1"/>
+          </a:lnRef>
+          <a:fillRef idx="3">
+            <a:schemeClr val="accent1"/>
+          </a:fillRef>
+          <a:effectRef idx="2">
+            <a:schemeClr val="accent1"/>
+          </a:effectRef>
+          <a:fontRef idx="minor">
+            <a:schemeClr val="lt1"/>
+          </a:fontRef>
+        </p:style>
+        <p:txBody>
+          <a:bodyPr rtlCol="0" anchor="ctr"/>
+          <a:lstStyle/>
+          <a:p>
+            <a:pPr algn="ctr"/>
+          </a:p>
+        </p:txBody>
+      </p:sp>
+      <p:sp>
+        <p:nvSpPr>
+          <p:cNvPr id="8" name="TextBox 7"/>
+          <p:cNvSpPr txBox="1"/>
+          <p:nvPr/>
+        </p:nvSpPr>
+        <p:spPr>
+          <a:xfrm>
+            <a:off x="3703320" y="1645920"/>
+            <a:ext cx="2011680" cy="4480560"/>
+          </a:xfrm>
+          <a:prstGeom prst="rect">
+            <a:avLst/>
+          </a:prstGeom>
+          <a:noFill/>
+        </p:spPr>
+        <p:txBody>
+          <a:bodyPr wrap="square">
+            <a:spAutoFit/>
+          </a:bodyPr>
+          <a:lstStyle/>
+          <a:p>
+            <a:pPr>
+              <a:defRPr sz="1500" b="1">
+                <a:solidFill>
+                  <a:srgbClr val="0F172A"/>
+                </a:solidFill>
+              </a:defRPr>
+            </a:pPr>
+            <a:r>
+              <a:t>Q2: Pulpit Rollout</a:t>
+            </a:r>
+          </a:p>
+          <a:p>
+            <a:pPr>
+              <a:spcBef>
+                <a:spcPts val="200"/>
+              </a:spcBef>
+              <a:defRPr sz="1000" b="1">
+                <a:solidFill>
+                  <a:srgbClr val="009530"/>
+                </a:solidFill>
+              </a:defRPr>
+            </a:pPr>
+            <a:r>
+              <a:t>PHASE 2 (MONTHS 4–6)</a:t>
+            </a:r>
+          </a:p>
+          <a:p>
+            <a:pPr>
+              <a:spcBef>
+                <a:spcPts val="500"/>
+              </a:spcBef>
+              <a:defRPr sz="1100">
+                <a:solidFill>
+                  <a:srgbClr val="475569"/>
+                </a:solidFill>
+              </a:defRPr>
+            </a:pPr>
+            <a:r>
+              <a:t>•  HMI Tablets: Install rugged operator touchscreens on melting control pulpits.</a:t>
+            </a:r>
+          </a:p>
+          <a:p>
+            <a:pPr>
+              <a:spcBef>
+                <a:spcPts val="500"/>
+              </a:spcBef>
+              <a:defRPr sz="1100">
+                <a:solidFill>
+                  <a:srgbClr val="475569"/>
+                </a:solidFill>
+              </a:defRPr>
+            </a:pPr>
+            <a:r>
+              <a:t>•  Operator Training: Train crews to respond to Holding-Guard audio/visual alerts.</a:t>
+            </a:r>
+          </a:p>
+          <a:p>
+            <a:pPr>
+              <a:spcBef>
+                <a:spcPts val="500"/>
+              </a:spcBef>
+              <a:defRPr sz="1100">
+                <a:solidFill>
+                  <a:srgbClr val="475569"/>
+                </a:solidFill>
+              </a:defRPr>
+            </a:pPr>
+            <a:r>
+              <a:t>•  EU CBAM Trial: Generate first automated batch certificates for export shipments.</a:t>
+            </a:r>
+          </a:p>
+        </p:txBody>
+      </p:sp>
+      <p:sp>
+        <p:nvSpPr>
+          <p:cNvPr id="9" name="Rounded Rectangle 8"/>
+          <p:cNvSpPr/>
+          <p:nvPr/>
+        </p:nvSpPr>
+        <p:spPr>
+          <a:xfrm>
+            <a:off x="6217920" y="1463040"/>
+            <a:ext cx="2468880" cy="4846320"/>
+          </a:xfrm>
+          <a:prstGeom prst="roundRect">
+            <a:avLst/>
+          </a:prstGeom>
+          <a:solidFill>
+            <a:srgbClr val="F8FAFC"/>
+          </a:solidFill>
+          <a:ln w="19050">
+            <a:solidFill>
+              <a:srgbClr val="2563EB"/>
+            </a:solidFill>
+          </a:ln>
+        </p:spPr>
+        <p:style>
+          <a:lnRef idx="1">
+            <a:schemeClr val="accent1"/>
+          </a:lnRef>
+          <a:fillRef idx="3">
+            <a:schemeClr val="accent1"/>
+          </a:fillRef>
+          <a:effectRef idx="2">
+            <a:schemeClr val="accent1"/>
+          </a:effectRef>
+          <a:fontRef idx="minor">
+            <a:schemeClr val="lt1"/>
+          </a:fontRef>
+        </p:style>
+        <p:txBody>
+          <a:bodyPr rtlCol="0" anchor="ctr"/>
+          <a:lstStyle/>
+          <a:p>
+            <a:pPr algn="ctr"/>
+          </a:p>
+        </p:txBody>
+      </p:sp>
+      <p:sp>
+        <p:nvSpPr>
+          <p:cNvPr id="10" name="TextBox 9"/>
+          <p:cNvSpPr txBox="1"/>
+          <p:nvPr/>
+        </p:nvSpPr>
+        <p:spPr>
+          <a:xfrm>
+            <a:off x="6446520" y="1645920"/>
+            <a:ext cx="2011680" cy="4480560"/>
+          </a:xfrm>
+          <a:prstGeom prst="rect">
+            <a:avLst/>
+          </a:prstGeom>
+          <a:noFill/>
+        </p:spPr>
+        <p:txBody>
+          <a:bodyPr wrap="square">
+            <a:spAutoFit/>
+          </a:bodyPr>
+          <a:lstStyle/>
+          <a:p>
+            <a:pPr>
+              <a:defRPr sz="1500" b="1">
+                <a:solidFill>
+                  <a:srgbClr val="0F172A"/>
+                </a:solidFill>
+              </a:defRPr>
+            </a:pPr>
+            <a:r>
+              <a:t>Q3: Cluster Scaling</a:t>
+            </a:r>
+          </a:p>
+          <a:p>
+            <a:pPr>
+              <a:spcBef>
+                <a:spcPts val="200"/>
+              </a:spcBef>
+              <a:defRPr sz="1000" b="1">
+                <a:solidFill>
+                  <a:srgbClr val="009530"/>
+                </a:solidFill>
+              </a:defRPr>
+            </a:pPr>
+            <a:r>
+              <a:t>PHASE 3 (MONTHS 7–9)</a:t>
+            </a:r>
+          </a:p>
+          <a:p>
+            <a:pPr>
+              <a:spcBef>
+                <a:spcPts val="500"/>
+              </a:spcBef>
+              <a:defRPr sz="1100">
+                <a:solidFill>
+                  <a:srgbClr val="475569"/>
+                </a:solidFill>
+              </a:defRPr>
+            </a:pPr>
+            <a:r>
+              <a:t>•  KEA Partnership: Partner with Kolhapur Engineering Association &amp; BEE.</a:t>
+            </a:r>
+          </a:p>
+          <a:p>
+            <a:pPr>
+              <a:spcBef>
+                <a:spcPts val="500"/>
+              </a:spcBef>
+              <a:defRPr sz="1100">
+                <a:solidFill>
+                  <a:srgbClr val="475569"/>
+                </a:solidFill>
+              </a:defRPr>
+            </a:pPr>
+            <a:r>
+              <a:t>•  Onboard 50 Units: Roll out software across 50 regional foundries in Kolhapur &amp; Belgaum.</a:t>
+            </a:r>
+          </a:p>
+          <a:p>
+            <a:pPr>
+              <a:spcBef>
+                <a:spcPts val="500"/>
+              </a:spcBef>
+              <a:defRPr sz="1100">
+                <a:solidFill>
+                  <a:srgbClr val="475569"/>
+                </a:solidFill>
+              </a:defRPr>
+            </a:pPr>
+            <a:r>
+              <a:t>•  Multi-Furnace Cloud: Provide owners aggregate multi-furnace dashboard.</a:t>
+            </a:r>
+          </a:p>
+        </p:txBody>
+      </p:sp>
+      <p:sp>
+        <p:nvSpPr>
+          <p:cNvPr id="11" name="Rounded Rectangle 10"/>
+          <p:cNvSpPr/>
+          <p:nvPr/>
+        </p:nvSpPr>
+        <p:spPr>
+          <a:xfrm>
+            <a:off x="8961120" y="1463040"/>
+            <a:ext cx="2468880" cy="4846320"/>
+          </a:xfrm>
+          <a:prstGeom prst="roundRect">
+            <a:avLst/>
+          </a:prstGeom>
+          <a:solidFill>
+            <a:srgbClr val="F8FAFC"/>
+          </a:solidFill>
+          <a:ln w="19050">
+            <a:solidFill>
+              <a:srgbClr val="009530"/>
+            </a:solidFill>
+          </a:ln>
+        </p:spPr>
+        <p:style>
+          <a:lnRef idx="1">
+            <a:schemeClr val="accent1"/>
+          </a:lnRef>
+          <a:fillRef idx="3">
+            <a:schemeClr val="accent1"/>
+          </a:fillRef>
+          <a:effectRef idx="2">
+            <a:schemeClr val="accent1"/>
+          </a:effectRef>
+          <a:fontRef idx="minor">
+            <a:schemeClr val="lt1"/>
+          </a:fontRef>
+        </p:style>
+        <p:txBody>
+          <a:bodyPr rtlCol="0" anchor="ctr"/>
+          <a:lstStyle/>
+          <a:p>
+            <a:pPr algn="ctr"/>
+          </a:p>
+        </p:txBody>
+      </p:sp>
+      <p:sp>
+        <p:nvSpPr>
+          <p:cNvPr id="12" name="TextBox 11"/>
+          <p:cNvSpPr txBox="1"/>
+          <p:nvPr/>
+        </p:nvSpPr>
+        <p:spPr>
+          <a:xfrm>
+            <a:off x="9189720" y="1645920"/>
+            <a:ext cx="2011680" cy="4480560"/>
+          </a:xfrm>
+          <a:prstGeom prst="rect">
+            <a:avLst/>
+          </a:prstGeom>
+          <a:noFill/>
+        </p:spPr>
+        <p:txBody>
+          <a:bodyPr wrap="square">
+            <a:spAutoFit/>
+          </a:bodyPr>
+          <a:lstStyle/>
+          <a:p>
+            <a:pPr>
+              <a:defRPr sz="1500" b="1">
+                <a:solidFill>
+                  <a:srgbClr val="0F172A"/>
+                </a:solidFill>
+              </a:defRPr>
+            </a:pPr>
+            <a:r>
+              <a:t>Q4: Schneider Ecosystem</a:t>
+            </a:r>
+          </a:p>
+          <a:p>
+            <a:pPr>
+              <a:spcBef>
+                <a:spcPts val="200"/>
+              </a:spcBef>
+              <a:defRPr sz="1000" b="1">
+                <a:solidFill>
+                  <a:srgbClr val="009530"/>
+                </a:solidFill>
+              </a:defRPr>
+            </a:pPr>
+            <a:r>
+              <a:t>PHASE 4 (MONTHS 10–12)</a:t>
+            </a:r>
+          </a:p>
+          <a:p>
+            <a:pPr>
+              <a:spcBef>
+                <a:spcPts val="500"/>
+              </a:spcBef>
+              <a:defRPr sz="1100">
+                <a:solidFill>
+                  <a:srgbClr val="475569"/>
+                </a:solidFill>
+              </a:defRPr>
+            </a:pPr>
+            <a:r>
+              <a:t>•  Schneider Exchange: Certify and publish application on Schneider Electric Exchange.</a:t>
+            </a:r>
+          </a:p>
+          <a:p>
+            <a:pPr>
+              <a:spcBef>
+                <a:spcPts val="500"/>
+              </a:spcBef>
+              <a:defRPr sz="1100">
+                <a:solidFill>
+                  <a:srgbClr val="475569"/>
+                </a:solidFill>
+              </a:defRPr>
+            </a:pPr>
+            <a:r>
+              <a:t>•  Hardware Bundles: Co-package EcoCast with Schneider Harmony edge gateways.</a:t>
+            </a:r>
+          </a:p>
+          <a:p>
+            <a:pPr>
+              <a:spcBef>
+                <a:spcPts val="500"/>
+              </a:spcBef>
+              <a:defRPr sz="1100">
+                <a:solidFill>
+                  <a:srgbClr val="475569"/>
+                </a:solidFill>
+              </a:defRPr>
+            </a:pPr>
+            <a:r>
+              <a:t>•  Pan-India Reach: Expand to Coimbatore, Rajkot, and Ludhiana casting hubs.</a:t>
             </a:r>
           </a:p>
         </p:txBody>
@@ -3600,7 +4057,7 @@
     <p:bg>
       <p:bgPr>
         <a:solidFill>
-          <a:srgbClr val="0A0E14"/>
+          <a:srgbClr val="FFFFFF"/>
         </a:solidFill>
         <a:effectLst/>
       </p:bgPr>
@@ -3614,95 +4071,23 @@
       <p:grpSpPr/>
       <p:sp>
         <p:nvSpPr>
-          <p:cNvPr id="2" name="TextBox 1"/>
-          <p:cNvSpPr txBox="1"/>
-          <p:nvPr/>
-        </p:nvSpPr>
-        <p:spPr>
-          <a:xfrm>
-            <a:off x="731520" y="365760"/>
-            <a:ext cx="10698480" cy="365760"/>
-          </a:xfrm>
-          <a:prstGeom prst="rect">
-            <a:avLst/>
-          </a:prstGeom>
-          <a:noFill/>
-        </p:spPr>
-        <p:txBody>
-          <a:bodyPr wrap="square">
-            <a:spAutoFit/>
-          </a:bodyPr>
-          <a:lstStyle/>
-          <a:p>
-            <a:pPr>
-              <a:defRPr sz="1100" b="1">
-                <a:solidFill>
-                  <a:srgbClr val="3DCD58"/>
-                </a:solidFill>
-              </a:defRPr>
-            </a:pPr>
-            <a:r>
-              <a:t>SCHNEIDER ELECTRIC YUVA YODHA 2026 • CHALLENGE 4: SMART MANUFACTURING</a:t>
-            </a:r>
-          </a:p>
-        </p:txBody>
-      </p:sp>
-      <p:sp>
-        <p:nvSpPr>
-          <p:cNvPr id="3" name="TextBox 2"/>
-          <p:cNvSpPr txBox="1"/>
-          <p:nvPr/>
-        </p:nvSpPr>
-        <p:spPr>
-          <a:xfrm>
-            <a:off x="731520" y="640080"/>
-            <a:ext cx="10698480" cy="731520"/>
-          </a:xfrm>
-          <a:prstGeom prst="rect">
-            <a:avLst/>
-          </a:prstGeom>
-          <a:noFill/>
-        </p:spPr>
-        <p:txBody>
-          <a:bodyPr wrap="square">
-            <a:spAutoFit/>
-          </a:bodyPr>
-          <a:lstStyle/>
-          <a:p>
-            <a:pPr>
-              <a:defRPr sz="2400" b="1">
-                <a:solidFill>
-                  <a:srgbClr val="F1F5F9"/>
-                </a:solidFill>
-              </a:defRPr>
-            </a:pPr>
-            <a:r>
-              <a:t>Implementation Roadmap: From Pilot to Cluster Scale</a:t>
-            </a:r>
-          </a:p>
-        </p:txBody>
-      </p:sp>
-      <p:sp>
-        <p:nvSpPr>
-          <p:cNvPr id="4" name="Rounded Rectangle 3"/>
+          <p:cNvPr id="2" name="Rectangle 1"/>
           <p:cNvSpPr/>
           <p:nvPr/>
         </p:nvSpPr>
         <p:spPr>
           <a:xfrm>
-            <a:off x="731520" y="1645920"/>
-            <a:ext cx="2468880" cy="4572000"/>
-          </a:xfrm>
-          <a:prstGeom prst="roundRect">
+            <a:off x="0" y="0"/>
+            <a:ext cx="12191695" cy="109728"/>
+          </a:xfrm>
+          <a:prstGeom prst="rect">
             <a:avLst/>
           </a:prstGeom>
           <a:solidFill>
-            <a:srgbClr val="111722"/>
+            <a:srgbClr val="009530"/>
           </a:solidFill>
-          <a:ln w="19050">
-            <a:solidFill>
-              <a:srgbClr val="3DCD58"/>
-            </a:solidFill>
+          <a:ln>
+            <a:noFill/>
           </a:ln>
         </p:spPr>
         <p:style>
@@ -3729,14 +4114,14 @@
       </p:sp>
       <p:sp>
         <p:nvSpPr>
-          <p:cNvPr id="5" name="TextBox 4"/>
+          <p:cNvPr id="3" name="TextBox 2"/>
           <p:cNvSpPr txBox="1"/>
           <p:nvPr/>
         </p:nvSpPr>
         <p:spPr>
           <a:xfrm>
-            <a:off x="914400" y="1828800"/>
-            <a:ext cx="2103120" cy="4206240"/>
+            <a:off x="731520" y="320040"/>
+            <a:ext cx="10698480" cy="320040"/>
           </a:xfrm>
           <a:prstGeom prst="rect">
             <a:avLst/>
@@ -3750,83 +4135,73 @@
           <a:lstStyle/>
           <a:p>
             <a:pPr>
-              <a:defRPr sz="1600" b="1">
-                <a:solidFill>
-                  <a:srgbClr val="F1F5F9"/>
-                </a:solidFill>
-              </a:defRPr>
-            </a:pPr>
-            <a:r>
-              <a:t>Q1: Pilot Deployment</a:t>
-            </a:r>
-          </a:p>
-          <a:p>
-            <a:pPr>
-              <a:spcBef>
-                <a:spcPts val="600"/>
-              </a:spcBef>
-              <a:defRPr sz="1200">
-                <a:solidFill>
-                  <a:srgbClr val="94A3B8"/>
-                </a:solidFill>
-              </a:defRPr>
-            </a:pPr>
-            <a:r>
-              <a:t>• Deploy edge gateways in 3 Kolhapur foundries.</a:t>
-            </a:r>
-          </a:p>
-          <a:p>
-            <a:pPr>
-              <a:spcBef>
-                <a:spcPts val="600"/>
-              </a:spcBef>
-              <a:defRPr sz="1200">
-                <a:solidFill>
-                  <a:srgbClr val="94A3B8"/>
-                </a:solidFill>
-              </a:defRPr>
-            </a:pPr>
-            <a:r>
-              <a:t>• Calibrate Modbus polling with Schneider PM5350 meters.</a:t>
-            </a:r>
-          </a:p>
-          <a:p>
-            <a:pPr>
-              <a:spcBef>
-                <a:spcPts val="600"/>
-              </a:spcBef>
-              <a:defRPr sz="1200">
-                <a:solidFill>
-                  <a:srgbClr val="94A3B8"/>
-                </a:solidFill>
-              </a:defRPr>
-            </a:pPr>
-            <a:r>
-              <a:t>• Validate baseline SEC telemetry.</a:t>
-            </a:r>
-          </a:p>
-        </p:txBody>
-      </p:sp>
-      <p:sp>
-        <p:nvSpPr>
-          <p:cNvPr id="6" name="Rounded Rectangle 5"/>
+              <a:defRPr sz="1100" b="1">
+                <a:solidFill>
+                  <a:srgbClr val="009530"/>
+                </a:solidFill>
+              </a:defRPr>
+            </a:pPr>
+            <a:r>
+              <a:t>SCHNEIDER ELECTRIC YUVA YODHA 2026 • CHALLENGE 4: SMART MANUFACTURING</a:t>
+            </a:r>
+          </a:p>
+        </p:txBody>
+      </p:sp>
+      <p:sp>
+        <p:nvSpPr>
+          <p:cNvPr id="4" name="TextBox 3"/>
+          <p:cNvSpPr txBox="1"/>
+          <p:nvPr/>
+        </p:nvSpPr>
+        <p:spPr>
+          <a:xfrm>
+            <a:off x="731520" y="594360"/>
+            <a:ext cx="10698480" cy="685800"/>
+          </a:xfrm>
+          <a:prstGeom prst="rect">
+            <a:avLst/>
+          </a:prstGeom>
+          <a:noFill/>
+        </p:spPr>
+        <p:txBody>
+          <a:bodyPr wrap="square">
+            <a:spAutoFit/>
+          </a:bodyPr>
+          <a:lstStyle/>
+          <a:p>
+            <a:pPr>
+              <a:defRPr sz="2200" b="1">
+                <a:solidFill>
+                  <a:srgbClr val="0F172A"/>
+                </a:solidFill>
+              </a:defRPr>
+            </a:pPr>
+            <a:r>
+              <a:t>Demonstrated Feasibility: Working Full-Stack System Live Today</a:t>
+            </a:r>
+          </a:p>
+        </p:txBody>
+      </p:sp>
+      <p:sp>
+        <p:nvSpPr>
+          <p:cNvPr id="5" name="Rounded Rectangle 4"/>
           <p:cNvSpPr/>
           <p:nvPr/>
         </p:nvSpPr>
         <p:spPr>
           <a:xfrm>
-            <a:off x="3474720" y="1645920"/>
-            <a:ext cx="2468880" cy="4572000"/>
+            <a:off x="731520" y="1463040"/>
+            <a:ext cx="3383280" cy="4846320"/>
           </a:xfrm>
           <a:prstGeom prst="roundRect">
             <a:avLst/>
           </a:prstGeom>
           <a:solidFill>
-            <a:srgbClr val="111722"/>
+            <a:srgbClr val="F8FAFC"/>
           </a:solidFill>
           <a:ln w="19050">
             <a:solidFill>
-              <a:srgbClr val="3DCD58"/>
+              <a:srgbClr val="E2E8F0"/>
             </a:solidFill>
           </a:ln>
         </p:spPr>
@@ -3854,14 +4229,14 @@
       </p:sp>
       <p:sp>
         <p:nvSpPr>
-          <p:cNvPr id="7" name="TextBox 6"/>
+          <p:cNvPr id="6" name="TextBox 5"/>
           <p:cNvSpPr txBox="1"/>
           <p:nvPr/>
         </p:nvSpPr>
         <p:spPr>
           <a:xfrm>
-            <a:off x="3657600" y="1828800"/>
-            <a:ext cx="2103120" cy="4206240"/>
+            <a:off x="960120" y="1645920"/>
+            <a:ext cx="2926080" cy="4480560"/>
           </a:xfrm>
           <a:prstGeom prst="rect">
             <a:avLst/>
@@ -3875,83 +4250,113 @@
           <a:lstStyle/>
           <a:p>
             <a:pPr>
-              <a:defRPr sz="1600" b="1">
-                <a:solidFill>
-                  <a:srgbClr val="F1F5F9"/>
-                </a:solidFill>
-              </a:defRPr>
-            </a:pPr>
-            <a:r>
-              <a:t>Q2: Shopfloor Loop</a:t>
-            </a:r>
-          </a:p>
-          <a:p>
-            <a:pPr>
-              <a:spcBef>
-                <a:spcPts val="600"/>
-              </a:spcBef>
-              <a:defRPr sz="1200">
-                <a:solidFill>
-                  <a:srgbClr val="94A3B8"/>
-                </a:solidFill>
-              </a:defRPr>
-            </a:pPr>
-            <a:r>
-              <a:t>• Install mobile HMI tablets on furnace pulpits.</a:t>
-            </a:r>
-          </a:p>
-          <a:p>
-            <a:pPr>
-              <a:spcBef>
-                <a:spcPts val="600"/>
-              </a:spcBef>
-              <a:defRPr sz="1200">
-                <a:solidFill>
-                  <a:srgbClr val="94A3B8"/>
-                </a:solidFill>
-              </a:defRPr>
-            </a:pPr>
-            <a:r>
-              <a:t>• Implement holding-guard alarms with operator training.</a:t>
-            </a:r>
-          </a:p>
-          <a:p>
-            <a:pPr>
-              <a:spcBef>
-                <a:spcPts val="600"/>
-              </a:spcBef>
-              <a:defRPr sz="1200">
-                <a:solidFill>
-                  <a:srgbClr val="94A3B8"/>
-                </a:solidFill>
-              </a:defRPr>
-            </a:pPr>
-            <a:r>
-              <a:t>• First CBAM audit exports for EU shipments.</a:t>
-            </a:r>
-          </a:p>
-        </p:txBody>
-      </p:sp>
-      <p:sp>
-        <p:nvSpPr>
-          <p:cNvPr id="8" name="Rounded Rectangle 7"/>
+              <a:defRPr sz="1500" b="1">
+                <a:solidFill>
+                  <a:srgbClr val="0F172A"/>
+                </a:solidFill>
+              </a:defRPr>
+            </a:pPr>
+            <a:r>
+              <a:t>1. Real-Time 3D Digital Twin</a:t>
+            </a:r>
+          </a:p>
+          <a:p>
+            <a:pPr>
+              <a:spcBef>
+                <a:spcPts val="200"/>
+              </a:spcBef>
+              <a:defRPr sz="1000" b="1">
+                <a:solidFill>
+                  <a:srgbClr val="009530"/>
+                </a:solidFill>
+              </a:defRPr>
+            </a:pPr>
+            <a:r>
+              <a:t>FRONTEND ENGINEERING</a:t>
+            </a:r>
+          </a:p>
+          <a:p>
+            <a:pPr>
+              <a:spcBef>
+                <a:spcPts val="500"/>
+              </a:spcBef>
+              <a:defRPr sz="1100">
+                <a:solidFill>
+                  <a:srgbClr val="475569"/>
+                </a:solidFill>
+              </a:defRPr>
+            </a:pPr>
+            <a:r>
+              <a:t>•  Production-Ready Front-End: Built with React 19, Vite, Three.js WebGL, and Tailwind CSS.</a:t>
+            </a:r>
+          </a:p>
+          <a:p>
+            <a:pPr>
+              <a:spcBef>
+                <a:spcPts val="500"/>
+              </a:spcBef>
+              <a:defRPr sz="1100">
+                <a:solidFill>
+                  <a:srgbClr val="475569"/>
+                </a:solidFill>
+              </a:defRPr>
+            </a:pPr>
+            <a:r>
+              <a:t>•  Live Thermal Physics: Real-time visual incandescence reflecting molten bath temperatures from 25°C to 1600°C.</a:t>
+            </a:r>
+          </a:p>
+          <a:p>
+            <a:pPr>
+              <a:spcBef>
+                <a:spcPts val="500"/>
+              </a:spcBef>
+              <a:defRPr sz="1100">
+                <a:solidFill>
+                  <a:srgbClr val="475569"/>
+                </a:solidFill>
+              </a:defRPr>
+            </a:pPr>
+            <a:r>
+              <a:t>•  Interactive Controls: Real-time buttons to simulate scrap charging, power ramp setpoints, lid opening, and tapping tilt.</a:t>
+            </a:r>
+          </a:p>
+          <a:p>
+            <a:pPr>
+              <a:spcBef>
+                <a:spcPts val="500"/>
+              </a:spcBef>
+              <a:defRPr sz="1100">
+                <a:solidFill>
+                  <a:srgbClr val="475569"/>
+                </a:solidFill>
+              </a:defRPr>
+            </a:pPr>
+            <a:r>
+              <a:t>•  Sub-Second Latency: 1 Hz telemetry streaming over native WebSockets.</a:t>
+            </a:r>
+          </a:p>
+        </p:txBody>
+      </p:sp>
+      <p:sp>
+        <p:nvSpPr>
+          <p:cNvPr id="7" name="Rounded Rectangle 6"/>
           <p:cNvSpPr/>
           <p:nvPr/>
         </p:nvSpPr>
         <p:spPr>
           <a:xfrm>
-            <a:off x="6217920" y="1645920"/>
-            <a:ext cx="2468880" cy="4572000"/>
+            <a:off x="4389120" y="1463040"/>
+            <a:ext cx="3383280" cy="4846320"/>
           </a:xfrm>
           <a:prstGeom prst="roundRect">
             <a:avLst/>
           </a:prstGeom>
           <a:solidFill>
-            <a:srgbClr val="111722"/>
+            <a:srgbClr val="F8FAFC"/>
           </a:solidFill>
           <a:ln w="19050">
             <a:solidFill>
-              <a:srgbClr val="F59E0B"/>
+              <a:srgbClr val="D97706"/>
             </a:solidFill>
           </a:ln>
         </p:spPr>
@@ -3979,14 +4384,14 @@
       </p:sp>
       <p:sp>
         <p:nvSpPr>
-          <p:cNvPr id="9" name="TextBox 8"/>
+          <p:cNvPr id="8" name="TextBox 7"/>
           <p:cNvSpPr txBox="1"/>
           <p:nvPr/>
         </p:nvSpPr>
         <p:spPr>
           <a:xfrm>
-            <a:off x="6400800" y="1828800"/>
-            <a:ext cx="2103120" cy="4206240"/>
+            <a:off x="4617720" y="1645920"/>
+            <a:ext cx="2926080" cy="4480560"/>
           </a:xfrm>
           <a:prstGeom prst="rect">
             <a:avLst/>
@@ -4000,83 +4405,113 @@
           <a:lstStyle/>
           <a:p>
             <a:pPr>
-              <a:defRPr sz="1600" b="1">
-                <a:solidFill>
-                  <a:srgbClr val="F1F5F9"/>
-                </a:solidFill>
-              </a:defRPr>
-            </a:pPr>
-            <a:r>
-              <a:t>Q3: Cluster Rollout</a:t>
-            </a:r>
-          </a:p>
-          <a:p>
-            <a:pPr>
-              <a:spcBef>
-                <a:spcPts val="600"/>
-              </a:spcBef>
-              <a:defRPr sz="1200">
-                <a:solidFill>
-                  <a:srgbClr val="94A3B8"/>
-                </a:solidFill>
-              </a:defRPr>
-            </a:pPr>
-            <a:r>
-              <a:t>• Partner with Kolhapur Engineering Association (KEA) &amp; BEE.</a:t>
-            </a:r>
-          </a:p>
-          <a:p>
-            <a:pPr>
-              <a:spcBef>
-                <a:spcPts val="600"/>
-              </a:spcBef>
-              <a:defRPr sz="1200">
-                <a:solidFill>
-                  <a:srgbClr val="94A3B8"/>
-                </a:solidFill>
-              </a:defRPr>
-            </a:pPr>
-            <a:r>
-              <a:t>• Onboard 50 MSME foundries across Kolhapur &amp; Belgaum.</a:t>
-            </a:r>
-          </a:p>
-          <a:p>
-            <a:pPr>
-              <a:spcBef>
-                <a:spcPts val="600"/>
-              </a:spcBef>
-              <a:defRPr sz="1200">
-                <a:solidFill>
-                  <a:srgbClr val="94A3B8"/>
-                </a:solidFill>
-              </a:defRPr>
-            </a:pPr>
-            <a:r>
-              <a:t>• Cloud analytics dashboard for multi-furnace plants.</a:t>
-            </a:r>
-          </a:p>
-        </p:txBody>
-      </p:sp>
-      <p:sp>
-        <p:nvSpPr>
-          <p:cNvPr id="10" name="Rounded Rectangle 9"/>
+              <a:defRPr sz="1500" b="1">
+                <a:solidFill>
+                  <a:srgbClr val="0F172A"/>
+                </a:solidFill>
+              </a:defRPr>
+            </a:pPr>
+            <a:r>
+              <a:t>2. High-Performance Backend</a:t>
+            </a:r>
+          </a:p>
+          <a:p>
+            <a:pPr>
+              <a:spcBef>
+                <a:spcPts val="200"/>
+              </a:spcBef>
+              <a:defRPr sz="1000" b="1">
+                <a:solidFill>
+                  <a:srgbClr val="009530"/>
+                </a:solidFill>
+              </a:defRPr>
+            </a:pPr>
+            <a:r>
+              <a:t>BACKEND &amp; IOT INGESTION</a:t>
+            </a:r>
+          </a:p>
+          <a:p>
+            <a:pPr>
+              <a:spcBef>
+                <a:spcPts val="500"/>
+              </a:spcBef>
+              <a:defRPr sz="1100">
+                <a:solidFill>
+                  <a:srgbClr val="475569"/>
+                </a:solidFill>
+              </a:defRPr>
+            </a:pPr>
+            <a:r>
+              <a:t>•  Asynchronous Python 3.13: Built on FastAPI and Uvicorn for ultra-low latency.</a:t>
+            </a:r>
+          </a:p>
+          <a:p>
+            <a:pPr>
+              <a:spcBef>
+                <a:spcPts val="500"/>
+              </a:spcBef>
+              <a:defRPr sz="1100">
+                <a:solidFill>
+                  <a:srgbClr val="475569"/>
+                </a:solidFill>
+              </a:defRPr>
+            </a:pPr>
+            <a:r>
+              <a:t>•  Industrial Modbus Engine: Full Schneider PM5350 / ION9000 protocol parsing over TCP/IP.</a:t>
+            </a:r>
+          </a:p>
+          <a:p>
+            <a:pPr>
+              <a:spcBef>
+                <a:spcPts val="500"/>
+              </a:spcBef>
+              <a:defRPr sz="1100">
+                <a:solidFill>
+                  <a:srgbClr val="475569"/>
+                </a:solidFill>
+              </a:defRPr>
+            </a:pPr>
+            <a:r>
+              <a:t>•  Scikit-Learn Predictive Model: Trained ML inference pipeline estimating batch completion within ±2.5 min.</a:t>
+            </a:r>
+          </a:p>
+          <a:p>
+            <a:pPr>
+              <a:spcBef>
+                <a:spcPts val="500"/>
+              </a:spcBef>
+              <a:defRPr sz="1100">
+                <a:solidFill>
+                  <a:srgbClr val="475569"/>
+                </a:solidFill>
+              </a:defRPr>
+            </a:pPr>
+            <a:r>
+              <a:t>•  Statutory Tariff Engine: MSEDCL HT-II industrial tariff schedule logic with automated off-peak detection.</a:t>
+            </a:r>
+          </a:p>
+        </p:txBody>
+      </p:sp>
+      <p:sp>
+        <p:nvSpPr>
+          <p:cNvPr id="9" name="Rounded Rectangle 8"/>
           <p:cNvSpPr/>
           <p:nvPr/>
         </p:nvSpPr>
         <p:spPr>
           <a:xfrm>
-            <a:off x="8961120" y="1645920"/>
-            <a:ext cx="2468880" cy="4572000"/>
+            <a:off x="8046720" y="1463040"/>
+            <a:ext cx="3383280" cy="4846320"/>
           </a:xfrm>
           <a:prstGeom prst="roundRect">
             <a:avLst/>
           </a:prstGeom>
           <a:solidFill>
-            <a:srgbClr val="111722"/>
+            <a:srgbClr val="F8FAFC"/>
           </a:solidFill>
           <a:ln w="19050">
             <a:solidFill>
-              <a:srgbClr val="3DCD58"/>
+              <a:srgbClr val="009530"/>
             </a:solidFill>
           </a:ln>
         </p:spPr>
@@ -4104,14 +4539,14 @@
       </p:sp>
       <p:sp>
         <p:nvSpPr>
-          <p:cNvPr id="11" name="TextBox 10"/>
+          <p:cNvPr id="10" name="TextBox 9"/>
           <p:cNvSpPr txBox="1"/>
           <p:nvPr/>
         </p:nvSpPr>
         <p:spPr>
           <a:xfrm>
-            <a:off x="9144000" y="1828800"/>
-            <a:ext cx="2103120" cy="4206240"/>
+            <a:off x="8275320" y="1645920"/>
+            <a:ext cx="2926080" cy="4480560"/>
           </a:xfrm>
           <a:prstGeom prst="rect">
             <a:avLst/>
@@ -4125,59 +4560,89 @@
           <a:lstStyle/>
           <a:p>
             <a:pPr>
-              <a:defRPr sz="1600" b="1">
-                <a:solidFill>
-                  <a:srgbClr val="F1F5F9"/>
-                </a:solidFill>
-              </a:defRPr>
-            </a:pPr>
-            <a:r>
-              <a:t>Q4: Schneider Ecosystem</a:t>
-            </a:r>
-          </a:p>
-          <a:p>
-            <a:pPr>
-              <a:spcBef>
-                <a:spcPts val="600"/>
-              </a:spcBef>
-              <a:defRPr sz="1200">
-                <a:solidFill>
-                  <a:srgbClr val="94A3B8"/>
-                </a:solidFill>
-              </a:defRPr>
-            </a:pPr>
-            <a:r>
-              <a:t>• Publish as certified app on Schneider Electric Exchange.</a:t>
-            </a:r>
-          </a:p>
-          <a:p>
-            <a:pPr>
-              <a:spcBef>
-                <a:spcPts val="600"/>
-              </a:spcBef>
-              <a:defRPr sz="1200">
-                <a:solidFill>
-                  <a:srgbClr val="94A3B8"/>
-                </a:solidFill>
-              </a:defRPr>
-            </a:pPr>
-            <a:r>
-              <a:t>• Integration with Schneider edge box bundles.</a:t>
-            </a:r>
-          </a:p>
-          <a:p>
-            <a:pPr>
-              <a:spcBef>
-                <a:spcPts val="600"/>
-              </a:spcBef>
-              <a:defRPr sz="1200">
-                <a:solidFill>
-                  <a:srgbClr val="94A3B8"/>
-                </a:solidFill>
-              </a:defRPr>
-            </a:pPr>
-            <a:r>
-              <a:t>• Expand to Coimbatore, Rajkot, and Belgaum clusters.</a:t>
+              <a:defRPr sz="1500" b="1">
+                <a:solidFill>
+                  <a:srgbClr val="0F172A"/>
+                </a:solidFill>
+              </a:defRPr>
+            </a:pPr>
+            <a:r>
+              <a:t>3. Automated Audit Engine</a:t>
+            </a:r>
+          </a:p>
+          <a:p>
+            <a:pPr>
+              <a:spcBef>
+                <a:spcPts val="200"/>
+              </a:spcBef>
+              <a:defRPr sz="1000" b="1">
+                <a:solidFill>
+                  <a:srgbClr val="009530"/>
+                </a:solidFill>
+              </a:defRPr>
+            </a:pPr>
+            <a:r>
+              <a:t>STATUTORY VERIFICATION</a:t>
+            </a:r>
+          </a:p>
+          <a:p>
+            <a:pPr>
+              <a:spcBef>
+                <a:spcPts val="500"/>
+              </a:spcBef>
+              <a:defRPr sz="1100">
+                <a:solidFill>
+                  <a:srgbClr val="475569"/>
+                </a:solidFill>
+              </a:defRPr>
+            </a:pPr>
+            <a:r>
+              <a:t>•  Instant Vector PDF Generation: ReportLab engine producing formal Form CA-26 certificates in &lt; 500 ms.</a:t>
+            </a:r>
+          </a:p>
+          <a:p>
+            <a:pPr>
+              <a:spcBef>
+                <a:spcPts val="500"/>
+              </a:spcBef>
+              <a:defRPr sz="1100">
+                <a:solidFill>
+                  <a:srgbClr val="475569"/>
+                </a:solidFill>
+              </a:defRPr>
+            </a:pPr>
+            <a:r>
+              <a:t>•  Cryptographic SHA-256 Stamp: Unique digital fingerprint sealing batch mass, SEC, and EU CBAM duty metrics.</a:t>
+            </a:r>
+          </a:p>
+          <a:p>
+            <a:pPr>
+              <a:spcBef>
+                <a:spcPts val="500"/>
+              </a:spcBef>
+              <a:defRPr sz="1100">
+                <a:solidFill>
+                  <a:srgbClr val="475569"/>
+                </a:solidFill>
+              </a:defRPr>
+            </a:pPr>
+            <a:r>
+              <a:t>•  Audit Ledger: Exportable CSV and JSON records ready for European customs and BEE PAT accreditation.</a:t>
+            </a:r>
+          </a:p>
+          <a:p>
+            <a:pPr>
+              <a:spcBef>
+                <a:spcPts val="500"/>
+              </a:spcBef>
+              <a:defRPr sz="1100">
+                <a:solidFill>
+                  <a:srgbClr val="475569"/>
+                </a:solidFill>
+              </a:defRPr>
+            </a:pPr>
+            <a:r>
+              <a:t>•  Cloud &amp; Edge Deployable: Tested on Render, Vercel, and local Docker containers.</a:t>
             </a:r>
           </a:p>
         </p:txBody>
@@ -4196,7 +4661,7 @@
     <p:bg>
       <p:bgPr>
         <a:solidFill>
-          <a:srgbClr val="0A0E14"/>
+          <a:srgbClr val="FFFFFF"/>
         </a:solidFill>
         <a:effectLst/>
       </p:bgPr>
@@ -4210,95 +4675,23 @@
       <p:grpSpPr/>
       <p:sp>
         <p:nvSpPr>
-          <p:cNvPr id="2" name="TextBox 1"/>
-          <p:cNvSpPr txBox="1"/>
-          <p:nvPr/>
-        </p:nvSpPr>
-        <p:spPr>
-          <a:xfrm>
-            <a:off x="731520" y="365760"/>
-            <a:ext cx="10698480" cy="365760"/>
-          </a:xfrm>
-          <a:prstGeom prst="rect">
-            <a:avLst/>
-          </a:prstGeom>
-          <a:noFill/>
-        </p:spPr>
-        <p:txBody>
-          <a:bodyPr wrap="square">
-            <a:spAutoFit/>
-          </a:bodyPr>
-          <a:lstStyle/>
-          <a:p>
-            <a:pPr>
-              <a:defRPr sz="1100" b="1">
-                <a:solidFill>
-                  <a:srgbClr val="3DCD58"/>
-                </a:solidFill>
-              </a:defRPr>
-            </a:pPr>
-            <a:r>
-              <a:t>SCHNEIDER ELECTRIC YUVA YODHA 2026 • CHALLENGE 4: SMART MANUFACTURING</a:t>
-            </a:r>
-          </a:p>
-        </p:txBody>
-      </p:sp>
-      <p:sp>
-        <p:nvSpPr>
-          <p:cNvPr id="3" name="TextBox 2"/>
-          <p:cNvSpPr txBox="1"/>
-          <p:nvPr/>
-        </p:nvSpPr>
-        <p:spPr>
-          <a:xfrm>
-            <a:off x="731520" y="640080"/>
-            <a:ext cx="10698480" cy="731520"/>
-          </a:xfrm>
-          <a:prstGeom prst="rect">
-            <a:avLst/>
-          </a:prstGeom>
-          <a:noFill/>
-        </p:spPr>
-        <p:txBody>
-          <a:bodyPr wrap="square">
-            <a:spAutoFit/>
-          </a:bodyPr>
-          <a:lstStyle/>
-          <a:p>
-            <a:pPr>
-              <a:defRPr sz="2400" b="1">
-                <a:solidFill>
-                  <a:srgbClr val="F1F5F9"/>
-                </a:solidFill>
-              </a:defRPr>
-            </a:pPr>
-            <a:r>
-              <a:t>Team &amp; Conclusion: Ready to Power India's Green MSME Transition</a:t>
-            </a:r>
-          </a:p>
-        </p:txBody>
-      </p:sp>
-      <p:sp>
-        <p:nvSpPr>
-          <p:cNvPr id="4" name="Rounded Rectangle 3"/>
+          <p:cNvPr id="2" name="Rectangle 1"/>
           <p:cNvSpPr/>
           <p:nvPr/>
         </p:nvSpPr>
         <p:spPr>
           <a:xfrm>
-            <a:off x="731520" y="1645920"/>
-            <a:ext cx="5120640" cy="4572000"/>
-          </a:xfrm>
-          <a:prstGeom prst="roundRect">
+            <a:off x="0" y="0"/>
+            <a:ext cx="12191695" cy="109728"/>
+          </a:xfrm>
+          <a:prstGeom prst="rect">
             <a:avLst/>
           </a:prstGeom>
           <a:solidFill>
-            <a:srgbClr val="111722"/>
+            <a:srgbClr val="009530"/>
           </a:solidFill>
-          <a:ln w="19050">
-            <a:solidFill>
-              <a:srgbClr val="3DCD58"/>
-            </a:solidFill>
+          <a:ln>
+            <a:noFill/>
           </a:ln>
         </p:spPr>
         <p:style>
@@ -4325,14 +4718,14 @@
       </p:sp>
       <p:sp>
         <p:nvSpPr>
-          <p:cNvPr id="5" name="TextBox 4"/>
+          <p:cNvPr id="3" name="TextBox 2"/>
           <p:cNvSpPr txBox="1"/>
           <p:nvPr/>
         </p:nvSpPr>
         <p:spPr>
           <a:xfrm>
-            <a:off x="914400" y="1828800"/>
-            <a:ext cx="4754880" cy="4206240"/>
+            <a:off x="731520" y="320040"/>
+            <a:ext cx="10698480" cy="320040"/>
           </a:xfrm>
           <a:prstGeom prst="rect">
             <a:avLst/>
@@ -4346,68 +4739,73 @@
           <a:lstStyle/>
           <a:p>
             <a:pPr>
-              <a:defRPr sz="1600" b="1">
-                <a:solidFill>
-                  <a:srgbClr val="F1F5F9"/>
-                </a:solidFill>
-              </a:defRPr>
-            </a:pPr>
-            <a:r>
-              <a:t>Team Members</a:t>
-            </a:r>
-          </a:p>
-          <a:p>
-            <a:pPr>
-              <a:spcBef>
-                <a:spcPts val="600"/>
-              </a:spcBef>
-              <a:defRPr sz="1200">
-                <a:solidFill>
-                  <a:srgbClr val="94A3B8"/>
-                </a:solidFill>
-              </a:defRPr>
-            </a:pPr>
-            <a:r>
-              <a:t>• Deepak R (Team Lead): Systems engineering, edge computing, full-stack architectures, 3D WebGL digital twins, and industrial Modbus/MQTT IoT protocols.</a:t>
-            </a:r>
-          </a:p>
-          <a:p>
-            <a:pPr>
-              <a:spcBef>
-                <a:spcPts val="600"/>
-              </a:spcBef>
-              <a:defRPr sz="1200">
-                <a:solidFill>
-                  <a:srgbClr val="94A3B8"/>
-                </a:solidFill>
-              </a:defRPr>
-            </a:pPr>
-            <a:r>
-              <a:t>• Saranya Dutta (Team Member): Indian Institute of Petroleum and Energy (IIPE), Roll No: 23CH10028 (saranyadutta@iipe.ac.in). Chemical process engineering, thermodynamic energy balances, SEC benchmarking, and CBAM/BEE compliance modeling.</a:t>
-            </a:r>
-          </a:p>
-        </p:txBody>
-      </p:sp>
-      <p:sp>
-        <p:nvSpPr>
-          <p:cNvPr id="6" name="Rounded Rectangle 5"/>
+              <a:defRPr sz="1100" b="1">
+                <a:solidFill>
+                  <a:srgbClr val="009530"/>
+                </a:solidFill>
+              </a:defRPr>
+            </a:pPr>
+            <a:r>
+              <a:t>SCHNEIDER ELECTRIC YUVA YODHA 2026 • CHALLENGE 4: SMART MANUFACTURING</a:t>
+            </a:r>
+          </a:p>
+        </p:txBody>
+      </p:sp>
+      <p:sp>
+        <p:nvSpPr>
+          <p:cNvPr id="4" name="TextBox 3"/>
+          <p:cNvSpPr txBox="1"/>
+          <p:nvPr/>
+        </p:nvSpPr>
+        <p:spPr>
+          <a:xfrm>
+            <a:off x="731520" y="594360"/>
+            <a:ext cx="10698480" cy="685800"/>
+          </a:xfrm>
+          <a:prstGeom prst="rect">
+            <a:avLst/>
+          </a:prstGeom>
+          <a:noFill/>
+        </p:spPr>
+        <p:txBody>
+          <a:bodyPr wrap="square">
+            <a:spAutoFit/>
+          </a:bodyPr>
+          <a:lstStyle/>
+          <a:p>
+            <a:pPr>
+              <a:defRPr sz="2200" b="1">
+                <a:solidFill>
+                  <a:srgbClr val="0F172A"/>
+                </a:solidFill>
+              </a:defRPr>
+            </a:pPr>
+            <a:r>
+              <a:t>Team &amp; Conclusion: Ready to Power India's Green MSME Transition</a:t>
+            </a:r>
+          </a:p>
+        </p:txBody>
+      </p:sp>
+      <p:sp>
+        <p:nvSpPr>
+          <p:cNvPr id="5" name="Rounded Rectangle 4"/>
           <p:cNvSpPr/>
           <p:nvPr/>
         </p:nvSpPr>
         <p:spPr>
           <a:xfrm>
-            <a:off x="6217920" y="1645920"/>
-            <a:ext cx="5120640" cy="4572000"/>
+            <a:off x="731520" y="1463040"/>
+            <a:ext cx="5212080" cy="4846320"/>
           </a:xfrm>
           <a:prstGeom prst="roundRect">
             <a:avLst/>
           </a:prstGeom>
           <a:solidFill>
-            <a:srgbClr val="111722"/>
+            <a:srgbClr val="F8FAFC"/>
           </a:solidFill>
           <a:ln w="19050">
             <a:solidFill>
-              <a:srgbClr val="3DCD58"/>
+              <a:srgbClr val="E2E8F0"/>
             </a:solidFill>
           </a:ln>
         </p:spPr>
@@ -4435,14 +4833,14 @@
       </p:sp>
       <p:sp>
         <p:nvSpPr>
-          <p:cNvPr id="7" name="TextBox 6"/>
+          <p:cNvPr id="6" name="TextBox 5"/>
           <p:cNvSpPr txBox="1"/>
           <p:nvPr/>
         </p:nvSpPr>
         <p:spPr>
           <a:xfrm>
-            <a:off x="6400800" y="1828800"/>
-            <a:ext cx="4754880" cy="4206240"/>
+            <a:off x="960120" y="1645920"/>
+            <a:ext cx="4754880" cy="4480560"/>
           </a:xfrm>
           <a:prstGeom prst="rect">
             <a:avLst/>
@@ -4456,74 +4854,289 @@
           <a:lstStyle/>
           <a:p>
             <a:pPr>
-              <a:defRPr sz="1600" b="1">
-                <a:solidFill>
-                  <a:srgbClr val="F1F5F9"/>
-                </a:solidFill>
-              </a:defRPr>
-            </a:pPr>
-            <a:r>
-              <a:t>Why EcoCast AI Wins</a:t>
-            </a:r>
-          </a:p>
-          <a:p>
-            <a:pPr>
-              <a:spcBef>
-                <a:spcPts val="600"/>
-              </a:spcBef>
-              <a:defRPr sz="1200">
-                <a:solidFill>
-                  <a:srgbClr val="94A3B8"/>
-                </a:solidFill>
-              </a:defRPr>
-            </a:pPr>
-            <a:r>
-              <a:t>• Working Full-Stack Software: Complete FastAPI + Three.js 3D twin running live right now.</a:t>
-            </a:r>
-          </a:p>
-          <a:p>
-            <a:pPr>
-              <a:spcBef>
-                <a:spcPts val="600"/>
-              </a:spcBef>
-              <a:defRPr sz="1200">
-                <a:solidFill>
-                  <a:srgbClr val="94A3B8"/>
-                </a:solidFill>
-              </a:defRPr>
-            </a:pPr>
-            <a:r>
-              <a:t>• Proven Mathematical Foundation: Built on documented BEE Kolhapur case studies &amp; CEA grid standards.</a:t>
-            </a:r>
-          </a:p>
-          <a:p>
-            <a:pPr>
-              <a:spcBef>
-                <a:spcPts val="600"/>
-              </a:spcBef>
-              <a:defRPr sz="1200">
-                <a:solidFill>
-                  <a:srgbClr val="94A3B8"/>
-                </a:solidFill>
-              </a:defRPr>
-            </a:pPr>
-            <a:r>
-              <a:t>• Schneider Electric Hardware Synergy: Directly drives Schneider energy meter and drive adoption.</a:t>
-            </a:r>
-          </a:p>
-          <a:p>
-            <a:pPr>
-              <a:spcBef>
-                <a:spcPts val="600"/>
-              </a:spcBef>
-              <a:defRPr sz="1200">
-                <a:solidFill>
-                  <a:srgbClr val="94A3B8"/>
-                </a:solidFill>
-              </a:defRPr>
-            </a:pPr>
-            <a:r>
-              <a:t>• Verifiable ROI: Sub-6-month payback solving India's most urgent industrial decarbonization challenge.</a:t>
+              <a:defRPr sz="1500" b="1">
+                <a:solidFill>
+                  <a:srgbClr val="0F172A"/>
+                </a:solidFill>
+              </a:defRPr>
+            </a:pPr>
+            <a:r>
+              <a:t>Project Team (IIPE)</a:t>
+            </a:r>
+          </a:p>
+          <a:p>
+            <a:pPr>
+              <a:spcBef>
+                <a:spcPts val="200"/>
+              </a:spcBef>
+              <a:defRPr sz="1000" b="1">
+                <a:solidFill>
+                  <a:srgbClr val="009530"/>
+                </a:solidFill>
+              </a:defRPr>
+            </a:pPr>
+            <a:r>
+              <a:t>DOMAIN-ENGINEERED CAPABILITIES</a:t>
+            </a:r>
+          </a:p>
+          <a:p>
+            <a:pPr>
+              <a:spcBef>
+                <a:spcPts val="500"/>
+              </a:spcBef>
+              <a:defRPr sz="1100">
+                <a:solidFill>
+                  <a:srgbClr val="475569"/>
+                </a:solidFill>
+              </a:defRPr>
+            </a:pPr>
+            <a:r>
+              <a:t>•  Deepak R (Team Lead):</a:t>
+            </a:r>
+          </a:p>
+          <a:p>
+            <a:pPr>
+              <a:spcBef>
+                <a:spcPts val="500"/>
+              </a:spcBef>
+              <a:defRPr sz="1100">
+                <a:solidFill>
+                  <a:srgbClr val="475569"/>
+                </a:solidFill>
+              </a:defRPr>
+            </a:pPr>
+            <a:r>
+              <a:t>•    • Systems architecture, full-stack edge computing, and Three.js 3D WebGL digital twin engineering.</a:t>
+            </a:r>
+          </a:p>
+          <a:p>
+            <a:pPr>
+              <a:spcBef>
+                <a:spcPts val="500"/>
+              </a:spcBef>
+              <a:defRPr sz="1100">
+                <a:solidFill>
+                  <a:srgbClr val="475569"/>
+                </a:solidFill>
+              </a:defRPr>
+            </a:pPr>
+            <a:r>
+              <a:t>•    • Industrial Modbus-TCP / MQTT protocol integration and real-time WebSocket pipelines.</a:t>
+            </a:r>
+          </a:p>
+          <a:p>
+            <a:pPr>
+              <a:spcBef>
+                <a:spcPts val="500"/>
+              </a:spcBef>
+              <a:defRPr sz="1100">
+                <a:solidFill>
+                  <a:srgbClr val="475569"/>
+                </a:solidFill>
+              </a:defRPr>
+            </a:pPr>
+            <a:r>
+              <a:t>•  Saranya Dutta (Team Member):</a:t>
+            </a:r>
+          </a:p>
+          <a:p>
+            <a:pPr>
+              <a:spcBef>
+                <a:spcPts val="500"/>
+              </a:spcBef>
+              <a:defRPr sz="1100">
+                <a:solidFill>
+                  <a:srgbClr val="475569"/>
+                </a:solidFill>
+              </a:defRPr>
+            </a:pPr>
+            <a:r>
+              <a:t>•    • Chemical Engineering, Indian Institute of Petroleum and Energy (IIPE).</a:t>
+            </a:r>
+          </a:p>
+          <a:p>
+            <a:pPr>
+              <a:spcBef>
+                <a:spcPts val="500"/>
+              </a:spcBef>
+              <a:defRPr sz="1100">
+                <a:solidFill>
+                  <a:srgbClr val="475569"/>
+                </a:solidFill>
+              </a:defRPr>
+            </a:pPr>
+            <a:r>
+              <a:t>•    • Student Roll No: 23CH10028 | saranyadutta@iipe.ac.in</a:t>
+            </a:r>
+          </a:p>
+          <a:p>
+            <a:pPr>
+              <a:spcBef>
+                <a:spcPts val="500"/>
+              </a:spcBef>
+              <a:defRPr sz="1100">
+                <a:solidFill>
+                  <a:srgbClr val="475569"/>
+                </a:solidFill>
+              </a:defRPr>
+            </a:pPr>
+            <a:r>
+              <a:t>•    • Process thermodynamics, metal fusion heat balances, SEC energy benchmarking, and EU CBAM/BEE statutory compliance modeling.</a:t>
+            </a:r>
+          </a:p>
+        </p:txBody>
+      </p:sp>
+      <p:sp>
+        <p:nvSpPr>
+          <p:cNvPr id="7" name="Rounded Rectangle 6"/>
+          <p:cNvSpPr/>
+          <p:nvPr/>
+        </p:nvSpPr>
+        <p:spPr>
+          <a:xfrm>
+            <a:off x="6217920" y="1463040"/>
+            <a:ext cx="5212080" cy="4846320"/>
+          </a:xfrm>
+          <a:prstGeom prst="roundRect">
+            <a:avLst/>
+          </a:prstGeom>
+          <a:solidFill>
+            <a:srgbClr val="F8FAFC"/>
+          </a:solidFill>
+          <a:ln w="19050">
+            <a:solidFill>
+              <a:srgbClr val="009530"/>
+            </a:solidFill>
+          </a:ln>
+        </p:spPr>
+        <p:style>
+          <a:lnRef idx="1">
+            <a:schemeClr val="accent1"/>
+          </a:lnRef>
+          <a:fillRef idx="3">
+            <a:schemeClr val="accent1"/>
+          </a:fillRef>
+          <a:effectRef idx="2">
+            <a:schemeClr val="accent1"/>
+          </a:effectRef>
+          <a:fontRef idx="minor">
+            <a:schemeClr val="lt1"/>
+          </a:fontRef>
+        </p:style>
+        <p:txBody>
+          <a:bodyPr rtlCol="0" anchor="ctr"/>
+          <a:lstStyle/>
+          <a:p>
+            <a:pPr algn="ctr"/>
+          </a:p>
+        </p:txBody>
+      </p:sp>
+      <p:sp>
+        <p:nvSpPr>
+          <p:cNvPr id="8" name="TextBox 7"/>
+          <p:cNvSpPr txBox="1"/>
+          <p:nvPr/>
+        </p:nvSpPr>
+        <p:spPr>
+          <a:xfrm>
+            <a:off x="6446520" y="1645920"/>
+            <a:ext cx="4754880" cy="4480560"/>
+          </a:xfrm>
+          <a:prstGeom prst="rect">
+            <a:avLst/>
+          </a:prstGeom>
+          <a:noFill/>
+        </p:spPr>
+        <p:txBody>
+          <a:bodyPr wrap="square">
+            <a:spAutoFit/>
+          </a:bodyPr>
+          <a:lstStyle/>
+          <a:p>
+            <a:pPr>
+              <a:defRPr sz="1500" b="1">
+                <a:solidFill>
+                  <a:srgbClr val="0F172A"/>
+                </a:solidFill>
+              </a:defRPr>
+            </a:pPr>
+            <a:r>
+              <a:t>Why EcoCast AI Wins Challenge 4</a:t>
+            </a:r>
+          </a:p>
+          <a:p>
+            <a:pPr>
+              <a:spcBef>
+                <a:spcPts val="200"/>
+              </a:spcBef>
+              <a:defRPr sz="1000" b="1">
+                <a:solidFill>
+                  <a:srgbClr val="009530"/>
+                </a:solidFill>
+              </a:defRPr>
+            </a:pPr>
+            <a:r>
+              <a:t>WINNING VALUE PROPOSITION</a:t>
+            </a:r>
+          </a:p>
+          <a:p>
+            <a:pPr>
+              <a:spcBef>
+                <a:spcPts val="500"/>
+              </a:spcBef>
+              <a:defRPr sz="1100">
+                <a:solidFill>
+                  <a:srgbClr val="475569"/>
+                </a:solidFill>
+              </a:defRPr>
+            </a:pPr>
+            <a:r>
+              <a:t>•  1. Solves a Real ₹14 Crore Problem: Targets the specific 12–18% operational decision waste in India's highest-power MSME sector.</a:t>
+            </a:r>
+          </a:p>
+          <a:p>
+            <a:pPr>
+              <a:spcBef>
+                <a:spcPts val="500"/>
+              </a:spcBef>
+              <a:defRPr sz="1100">
+                <a:solidFill>
+                  <a:srgbClr val="475569"/>
+                </a:solidFill>
+              </a:defRPr>
+            </a:pPr>
+            <a:r>
+              <a:t>•  2. Working Code, Not Just Slides: Full working digital twin, Modbus telemetry driver, and PDF certificate generator ready to inspect.</a:t>
+            </a:r>
+          </a:p>
+          <a:p>
+            <a:pPr>
+              <a:spcBef>
+                <a:spcPts val="500"/>
+              </a:spcBef>
+              <a:defRPr sz="1100">
+                <a:solidFill>
+                  <a:srgbClr val="475569"/>
+                </a:solidFill>
+              </a:defRPr>
+            </a:pPr>
+            <a:r>
+              <a:t>•  3. Clear Schneider Electric Synergy: Drives customer adoption of Schneider PM5350 meters, Harmony edge gateways, and Altivar drives.</a:t>
+            </a:r>
+          </a:p>
+          <a:p>
+            <a:pPr>
+              <a:spcBef>
+                <a:spcPts val="500"/>
+              </a:spcBef>
+              <a:defRPr sz="1100">
+                <a:solidFill>
+                  <a:srgbClr val="475569"/>
+                </a:solidFill>
+              </a:defRPr>
+            </a:pPr>
+            <a:r>
+              <a:t>•  4. Unbeatable Business Case: Proven 6.7-month payback for foundry owners, protecting India's export competitiveness under EU CBAM 2026.</a:t>
             </a:r>
           </a:p>
         </p:txBody>
@@ -4542,7 +5155,7 @@
     <p:bg>
       <p:bgPr>
         <a:solidFill>
-          <a:srgbClr val="0A0E14"/>
+          <a:srgbClr val="FFFFFF"/>
         </a:solidFill>
         <a:effectLst/>
       </p:bgPr>
@@ -4556,95 +5169,23 @@
       <p:grpSpPr/>
       <p:sp>
         <p:nvSpPr>
-          <p:cNvPr id="2" name="TextBox 1"/>
-          <p:cNvSpPr txBox="1"/>
-          <p:nvPr/>
-        </p:nvSpPr>
-        <p:spPr>
-          <a:xfrm>
-            <a:off x="731520" y="365760"/>
-            <a:ext cx="10698480" cy="365760"/>
-          </a:xfrm>
-          <a:prstGeom prst="rect">
-            <a:avLst/>
-          </a:prstGeom>
-          <a:noFill/>
-        </p:spPr>
-        <p:txBody>
-          <a:bodyPr wrap="square">
-            <a:spAutoFit/>
-          </a:bodyPr>
-          <a:lstStyle/>
-          <a:p>
-            <a:pPr>
-              <a:defRPr sz="1100" b="1">
-                <a:solidFill>
-                  <a:srgbClr val="3DCD58"/>
-                </a:solidFill>
-              </a:defRPr>
-            </a:pPr>
-            <a:r>
-              <a:t>SCHNEIDER ELECTRIC YUVA YODHA 2026 • CHALLENGE 4: SMART MANUFACTURING</a:t>
-            </a:r>
-          </a:p>
-        </p:txBody>
-      </p:sp>
-      <p:sp>
-        <p:nvSpPr>
-          <p:cNvPr id="3" name="TextBox 2"/>
-          <p:cNvSpPr txBox="1"/>
-          <p:nvPr/>
-        </p:nvSpPr>
-        <p:spPr>
-          <a:xfrm>
-            <a:off x="731520" y="640080"/>
-            <a:ext cx="10698480" cy="731520"/>
-          </a:xfrm>
-          <a:prstGeom prst="rect">
-            <a:avLst/>
-          </a:prstGeom>
-          <a:noFill/>
-        </p:spPr>
-        <p:txBody>
-          <a:bodyPr wrap="square">
-            <a:spAutoFit/>
-          </a:bodyPr>
-          <a:lstStyle/>
-          <a:p>
-            <a:pPr>
-              <a:defRPr sz="2400" b="1">
-                <a:solidFill>
-                  <a:srgbClr val="F1F5F9"/>
-                </a:solidFill>
-              </a:defRPr>
-            </a:pPr>
-            <a:r>
-              <a:t>The Problem: Decision-Level Energy Waste in India's MSME Foundries</a:t>
-            </a:r>
-          </a:p>
-        </p:txBody>
-      </p:sp>
-      <p:sp>
-        <p:nvSpPr>
-          <p:cNvPr id="4" name="Rounded Rectangle 3"/>
+          <p:cNvPr id="2" name="Rectangle 1"/>
           <p:cNvSpPr/>
           <p:nvPr/>
         </p:nvSpPr>
         <p:spPr>
           <a:xfrm>
-            <a:off x="731520" y="1645920"/>
-            <a:ext cx="5120640" cy="4572000"/>
-          </a:xfrm>
-          <a:prstGeom prst="roundRect">
+            <a:off x="0" y="0"/>
+            <a:ext cx="12191695" cy="109728"/>
+          </a:xfrm>
+          <a:prstGeom prst="rect">
             <a:avLst/>
           </a:prstGeom>
           <a:solidFill>
-            <a:srgbClr val="111722"/>
+            <a:srgbClr val="009530"/>
           </a:solidFill>
-          <a:ln w="19050">
-            <a:solidFill>
-              <a:srgbClr val="3DCD58"/>
-            </a:solidFill>
+          <a:ln>
+            <a:noFill/>
           </a:ln>
         </p:spPr>
         <p:style>
@@ -4671,14 +5212,14 @@
       </p:sp>
       <p:sp>
         <p:nvSpPr>
-          <p:cNvPr id="5" name="TextBox 4"/>
+          <p:cNvPr id="3" name="TextBox 2"/>
           <p:cNvSpPr txBox="1"/>
           <p:nvPr/>
         </p:nvSpPr>
         <p:spPr>
           <a:xfrm>
-            <a:off x="914400" y="1828800"/>
-            <a:ext cx="4754880" cy="4206240"/>
+            <a:off x="731520" y="320040"/>
+            <a:ext cx="10698480" cy="320040"/>
           </a:xfrm>
           <a:prstGeom prst="rect">
             <a:avLst/>
@@ -4692,113 +5233,73 @@
           <a:lstStyle/>
           <a:p>
             <a:pPr>
-              <a:defRPr sz="1600" b="1">
-                <a:solidFill>
-                  <a:srgbClr val="F1F5F9"/>
-                </a:solidFill>
-              </a:defRPr>
-            </a:pPr>
-            <a:r>
-              <a:t>Kolhapur Cluster Baseline</a:t>
-            </a:r>
-          </a:p>
-          <a:p>
-            <a:pPr>
-              <a:spcBef>
-                <a:spcPts val="600"/>
-              </a:spcBef>
-              <a:defRPr sz="1200">
-                <a:solidFill>
-                  <a:srgbClr val="94A3B8"/>
-                </a:solidFill>
-              </a:defRPr>
-            </a:pPr>
-            <a:r>
-              <a:t>• 300+ MSME units producing 600,000 tonnes of automotive castings annually.</a:t>
-            </a:r>
-          </a:p>
-          <a:p>
-            <a:pPr>
-              <a:spcBef>
-                <a:spcPts val="600"/>
-              </a:spcBef>
-              <a:defRPr sz="1200">
-                <a:solidFill>
-                  <a:srgbClr val="94A3B8"/>
-                </a:solidFill>
-              </a:defRPr>
-            </a:pPr>
-            <a:r>
-              <a:t>• Consumes ~166,910 tonnes of oil equivalent (toe) annually.</a:t>
-            </a:r>
-          </a:p>
-          <a:p>
-            <a:pPr>
-              <a:spcBef>
-                <a:spcPts val="600"/>
-              </a:spcBef>
-              <a:defRPr sz="1200">
-                <a:solidFill>
-                  <a:srgbClr val="94A3B8"/>
-                </a:solidFill>
-              </a:defRPr>
-            </a:pPr>
-            <a:r>
-              <a:t>• Energy represents 30% to 50% of total manufacturing costs.</a:t>
-            </a:r>
-          </a:p>
-          <a:p>
-            <a:pPr>
-              <a:spcBef>
-                <a:spcPts val="600"/>
-              </a:spcBef>
-              <a:defRPr sz="1200">
-                <a:solidFill>
-                  <a:srgbClr val="94A3B8"/>
-                </a:solidFill>
-              </a:defRPr>
-            </a:pPr>
-            <a:r>
-              <a:t>• Induction melting furnaces consume over 70% of total plant power.</a:t>
-            </a:r>
-          </a:p>
-          <a:p>
-            <a:pPr>
-              <a:spcBef>
-                <a:spcPts val="600"/>
-              </a:spcBef>
-              <a:defRPr sz="1200">
-                <a:solidFill>
-                  <a:srgbClr val="94A3B8"/>
-                </a:solidFill>
-              </a:defRPr>
-            </a:pPr>
-            <a:r>
-              <a:t>• Average Specific Energy Consumption (SEC): 780 to 900 kWh/t.</a:t>
-            </a:r>
-          </a:p>
-        </p:txBody>
-      </p:sp>
-      <p:sp>
-        <p:nvSpPr>
-          <p:cNvPr id="6" name="Rounded Rectangle 5"/>
+              <a:defRPr sz="1100" b="1">
+                <a:solidFill>
+                  <a:srgbClr val="009530"/>
+                </a:solidFill>
+              </a:defRPr>
+            </a:pPr>
+            <a:r>
+              <a:t>SCHNEIDER ELECTRIC YUVA YODHA 2026 • CHALLENGE 4: SMART MANUFACTURING</a:t>
+            </a:r>
+          </a:p>
+        </p:txBody>
+      </p:sp>
+      <p:sp>
+        <p:nvSpPr>
+          <p:cNvPr id="4" name="TextBox 3"/>
+          <p:cNvSpPr txBox="1"/>
+          <p:nvPr/>
+        </p:nvSpPr>
+        <p:spPr>
+          <a:xfrm>
+            <a:off x="731520" y="594360"/>
+            <a:ext cx="10698480" cy="685800"/>
+          </a:xfrm>
+          <a:prstGeom prst="rect">
+            <a:avLst/>
+          </a:prstGeom>
+          <a:noFill/>
+        </p:spPr>
+        <p:txBody>
+          <a:bodyPr wrap="square">
+            <a:spAutoFit/>
+          </a:bodyPr>
+          <a:lstStyle/>
+          <a:p>
+            <a:pPr>
+              <a:defRPr sz="2200" b="1">
+                <a:solidFill>
+                  <a:srgbClr val="0F172A"/>
+                </a:solidFill>
+              </a:defRPr>
+            </a:pPr>
+            <a:r>
+              <a:t>The Problem: Decision-Level Energy Waste in India's MSME Foundries</a:t>
+            </a:r>
+          </a:p>
+        </p:txBody>
+      </p:sp>
+      <p:sp>
+        <p:nvSpPr>
+          <p:cNvPr id="5" name="Rounded Rectangle 4"/>
           <p:cNvSpPr/>
           <p:nvPr/>
         </p:nvSpPr>
         <p:spPr>
           <a:xfrm>
-            <a:off x="6217920" y="1645920"/>
-            <a:ext cx="5120640" cy="4572000"/>
+            <a:off x="731520" y="1463040"/>
+            <a:ext cx="4937760" cy="4846320"/>
           </a:xfrm>
           <a:prstGeom prst="roundRect">
             <a:avLst/>
           </a:prstGeom>
           <a:solidFill>
-            <a:srgbClr val="111722"/>
+            <a:srgbClr val="F8FAFC"/>
           </a:solidFill>
           <a:ln w="19050">
             <a:solidFill>
-              <a:srgbClr val="F59E0B"/>
+              <a:srgbClr val="E2E8F0"/>
             </a:solidFill>
           </a:ln>
         </p:spPr>
@@ -4826,14 +5327,14 @@
       </p:sp>
       <p:sp>
         <p:nvSpPr>
-          <p:cNvPr id="7" name="TextBox 6"/>
+          <p:cNvPr id="6" name="TextBox 5"/>
           <p:cNvSpPr txBox="1"/>
           <p:nvPr/>
         </p:nvSpPr>
         <p:spPr>
           <a:xfrm>
-            <a:off x="6400800" y="1828800"/>
-            <a:ext cx="4754880" cy="4206240"/>
+            <a:off x="960120" y="1645920"/>
+            <a:ext cx="4480560" cy="4480560"/>
           </a:xfrm>
           <a:prstGeom prst="rect">
             <a:avLst/>
@@ -4847,78 +5348,132 @@
           <a:lstStyle/>
           <a:p>
             <a:pPr>
-              <a:defRPr sz="1600" b="1">
-                <a:solidFill>
-                  <a:srgbClr val="F1F5F9"/>
-                </a:solidFill>
-              </a:defRPr>
-            </a:pPr>
-            <a:r>
-              <a:t>The 9–45% Decision-Level Waste</a:t>
-            </a:r>
-          </a:p>
-          <a:p>
-            <a:pPr>
-              <a:spcBef>
-                <a:spcPts val="600"/>
-              </a:spcBef>
-              <a:defRPr sz="1200">
-                <a:solidFill>
-                  <a:srgbClr val="94A3B8"/>
-                </a:solidFill>
-              </a:defRPr>
-            </a:pPr>
-            <a:r>
-              <a:t>• Unsynchronized Melting: Molten metal at 1520°C idles 20–60 min waiting for ladles, burning 120–150 kWh every idle hour.</a:t>
-            </a:r>
-          </a:p>
-          <a:p>
-            <a:pPr>
-              <a:spcBef>
-                <a:spcPts val="600"/>
-              </a:spcBef>
-              <a:defRPr sz="1200">
-                <a:solidFill>
-                  <a:srgbClr val="94A3B8"/>
-                </a:solidFill>
-              </a:defRPr>
-            </a:pPr>
-            <a:r>
-              <a:t>• Time-of-Use Blindness: Melting during evening peak surcharge hours (+₹1.50/unit) instead of night off-peak windows (-₹1.50/unit).</a:t>
-            </a:r>
-          </a:p>
-          <a:p>
-            <a:pPr>
-              <a:spcBef>
-                <a:spcPts val="600"/>
-              </a:spcBef>
-              <a:defRPr sz="1200">
-                <a:solidFill>
-                  <a:srgbClr val="94A3B8"/>
-                </a:solidFill>
-              </a:defRPr>
-            </a:pPr>
-            <a:r>
-              <a:t>• Crucible Radiation Leak: Operating without automated lid covers wastes 32.7 kWh per batch.</a:t>
-            </a:r>
-          </a:p>
-          <a:p>
-            <a:pPr>
-              <a:spcBef>
-                <a:spcPts val="600"/>
-              </a:spcBef>
-              <a:defRPr sz="1200">
-                <a:solidFill>
-                  <a:srgbClr val="94A3B8"/>
-                </a:solidFill>
-              </a:defRPr>
-            </a:pPr>
-            <a:r>
-              <a:t>• Diagnosis: Not an equipment deficit—an intelligence and decision-support gap.</a:t>
-            </a:r>
-          </a:p>
-        </p:txBody>
-      </p:sp>
+              <a:defRPr sz="1500" b="1">
+                <a:solidFill>
+                  <a:srgbClr val="0F172A"/>
+                </a:solidFill>
+              </a:defRPr>
+            </a:pPr>
+            <a:r>
+              <a:t>The 'Giant Boiling Kettle' Dilemma</a:t>
+            </a:r>
+          </a:p>
+          <a:p>
+            <a:pPr>
+              <a:spcBef>
+                <a:spcPts val="200"/>
+              </a:spcBef>
+              <a:defRPr sz="1000" b="1">
+                <a:solidFill>
+                  <a:srgbClr val="009530"/>
+                </a:solidFill>
+              </a:defRPr>
+            </a:pPr>
+            <a:r>
+              <a:t>KOLHAPUR CLUSTER BASELINE</a:t>
+            </a:r>
+          </a:p>
+          <a:p>
+            <a:pPr>
+              <a:spcBef>
+                <a:spcPts val="500"/>
+              </a:spcBef>
+              <a:defRPr sz="1100">
+                <a:solidFill>
+                  <a:srgbClr val="475569"/>
+                </a:solidFill>
+              </a:defRPr>
+            </a:pPr>
+            <a:r>
+              <a:t>•  Simple Analogy: Melting metal is like boiling a giant 500 kW water kettle. If you reach boiling point but keep it on full flame waiting for cups, power is pure waste!</a:t>
+            </a:r>
+          </a:p>
+          <a:p>
+            <a:pPr>
+              <a:spcBef>
+                <a:spcPts val="500"/>
+              </a:spcBef>
+              <a:defRPr sz="1100">
+                <a:solidFill>
+                  <a:srgbClr val="475569"/>
+                </a:solidFill>
+              </a:defRPr>
+            </a:pPr>
+            <a:r>
+              <a:t>•  The Kolhapur Reality: 300+ MSME foundries melt 600,000 MT/year of automotive castings.</a:t>
+            </a:r>
+          </a:p>
+          <a:p>
+            <a:pPr>
+              <a:spcBef>
+                <a:spcPts val="500"/>
+              </a:spcBef>
+              <a:defRPr sz="1100">
+                <a:solidFill>
+                  <a:srgbClr val="475569"/>
+                </a:solidFill>
+              </a:defRPr>
+            </a:pPr>
+            <a:r>
+              <a:t>•  Huge Electricity Bill: Energy accounts for 30–50% of total plant manufacturing cost. Induction furnaces consume over 70% of total factory power.</a:t>
+            </a:r>
+          </a:p>
+          <a:p>
+            <a:pPr>
+              <a:spcBef>
+                <a:spcPts val="500"/>
+              </a:spcBef>
+              <a:defRPr sz="1100">
+                <a:solidFill>
+                  <a:srgbClr val="475569"/>
+                </a:solidFill>
+              </a:defRPr>
+            </a:pPr>
+            <a:r>
+              <a:t>•  High Baseline Consumption: Indian MSMEs average 780–900 kWh/tonne vs 550 kWh/tonne global best practice.</a:t>
+            </a:r>
+          </a:p>
+          <a:p>
+            <a:pPr>
+              <a:spcBef>
+                <a:spcPts val="500"/>
+              </a:spcBef>
+              <a:defRPr sz="1100">
+                <a:solidFill>
+                  <a:srgbClr val="475569"/>
+                </a:solidFill>
+              </a:defRPr>
+            </a:pPr>
+            <a:r>
+              <a:t>•  Core Bottleneck: It is not old equipment—it is a human decision gap! Shopfloor crews lack real-time digital sync between melting and ladle pouring.</a:t>
+            </a:r>
+          </a:p>
+        </p:txBody>
+      </p:sp>
+      <p:pic>
+        <p:nvPicPr>
+          <p:cNvPr id="7" name="Picture 6" descr="fig1_problem_flowchart.png"/>
+          <p:cNvPicPr>
+            <a:picLocks noChangeAspect="1"/>
+          </p:cNvPicPr>
+          <p:nvPr/>
+        </p:nvPicPr>
+        <p:blipFill>
+          <a:blip r:embed="rId2"/>
+          <a:stretch>
+            <a:fillRect/>
+          </a:stretch>
+        </p:blipFill>
+        <p:spPr>
+          <a:xfrm>
+            <a:off x="5943600" y="1463040"/>
+            <a:ext cx="5486400" cy="4846320"/>
+          </a:xfrm>
+          <a:prstGeom prst="rect">
+            <a:avLst/>
+          </a:prstGeom>
+        </p:spPr>
+      </p:pic>
     </p:spTree>
   </p:cSld>
   <p:clrMapOvr>
@@ -4933,7 +5488,7 @@
     <p:bg>
       <p:bgPr>
         <a:solidFill>
-          <a:srgbClr val="0A0E14"/>
+          <a:srgbClr val="FFFFFF"/>
         </a:solidFill>
         <a:effectLst/>
       </p:bgPr>
@@ -4947,95 +5502,23 @@
       <p:grpSpPr/>
       <p:sp>
         <p:nvSpPr>
-          <p:cNvPr id="2" name="TextBox 1"/>
-          <p:cNvSpPr txBox="1"/>
-          <p:nvPr/>
-        </p:nvSpPr>
-        <p:spPr>
-          <a:xfrm>
-            <a:off x="731520" y="365760"/>
-            <a:ext cx="10698480" cy="365760"/>
-          </a:xfrm>
-          <a:prstGeom prst="rect">
-            <a:avLst/>
-          </a:prstGeom>
-          <a:noFill/>
-        </p:spPr>
-        <p:txBody>
-          <a:bodyPr wrap="square">
-            <a:spAutoFit/>
-          </a:bodyPr>
-          <a:lstStyle/>
-          <a:p>
-            <a:pPr>
-              <a:defRPr sz="1100" b="1">
-                <a:solidFill>
-                  <a:srgbClr val="3DCD58"/>
-                </a:solidFill>
-              </a:defRPr>
-            </a:pPr>
-            <a:r>
-              <a:t>SCHNEIDER ELECTRIC YUVA YODHA 2026 • CHALLENGE 4: SMART MANUFACTURING</a:t>
-            </a:r>
-          </a:p>
-        </p:txBody>
-      </p:sp>
-      <p:sp>
-        <p:nvSpPr>
-          <p:cNvPr id="3" name="TextBox 2"/>
-          <p:cNvSpPr txBox="1"/>
-          <p:nvPr/>
-        </p:nvSpPr>
-        <p:spPr>
-          <a:xfrm>
-            <a:off x="731520" y="640080"/>
-            <a:ext cx="10698480" cy="731520"/>
-          </a:xfrm>
-          <a:prstGeom prst="rect">
-            <a:avLst/>
-          </a:prstGeom>
-          <a:noFill/>
-        </p:spPr>
-        <p:txBody>
-          <a:bodyPr wrap="square">
-            <a:spAutoFit/>
-          </a:bodyPr>
-          <a:lstStyle/>
-          <a:p>
-            <a:pPr>
-              <a:defRPr sz="2400" b="1">
-                <a:solidFill>
-                  <a:srgbClr val="F1F5F9"/>
-                </a:solidFill>
-              </a:defRPr>
-            </a:pPr>
-            <a:r>
-              <a:t>Why It Matters Now: Single-Digit Margins &amp; EU CBAM Carbon Tariffs</a:t>
-            </a:r>
-          </a:p>
-        </p:txBody>
-      </p:sp>
-      <p:sp>
-        <p:nvSpPr>
-          <p:cNvPr id="4" name="Rounded Rectangle 3"/>
+          <p:cNvPr id="2" name="Rectangle 1"/>
           <p:cNvSpPr/>
           <p:nvPr/>
         </p:nvSpPr>
         <p:spPr>
           <a:xfrm>
-            <a:off x="731520" y="1645920"/>
-            <a:ext cx="5120640" cy="4572000"/>
-          </a:xfrm>
-          <a:prstGeom prst="roundRect">
+            <a:off x="0" y="0"/>
+            <a:ext cx="12191695" cy="109728"/>
+          </a:xfrm>
+          <a:prstGeom prst="rect">
             <a:avLst/>
           </a:prstGeom>
           <a:solidFill>
-            <a:srgbClr val="111722"/>
+            <a:srgbClr val="009530"/>
           </a:solidFill>
-          <a:ln w="19050">
-            <a:solidFill>
-              <a:srgbClr val="3DCD58"/>
-            </a:solidFill>
+          <a:ln>
+            <a:noFill/>
           </a:ln>
         </p:spPr>
         <p:style>
@@ -5062,14 +5545,14 @@
       </p:sp>
       <p:sp>
         <p:nvSpPr>
-          <p:cNvPr id="5" name="TextBox 4"/>
+          <p:cNvPr id="3" name="TextBox 2"/>
           <p:cNvSpPr txBox="1"/>
           <p:nvPr/>
         </p:nvSpPr>
         <p:spPr>
           <a:xfrm>
-            <a:off x="914400" y="1828800"/>
-            <a:ext cx="4754880" cy="4206240"/>
+            <a:off x="731520" y="320040"/>
+            <a:ext cx="10698480" cy="320040"/>
           </a:xfrm>
           <a:prstGeom prst="rect">
             <a:avLst/>
@@ -5083,98 +5566,73 @@
           <a:lstStyle/>
           <a:p>
             <a:pPr>
-              <a:defRPr sz="1600" b="1">
-                <a:solidFill>
-                  <a:srgbClr val="F1F5F9"/>
-                </a:solidFill>
-              </a:defRPr>
-            </a:pPr>
-            <a:r>
-              <a:t>Thin Profit Margins (4–8%)</a:t>
-            </a:r>
-          </a:p>
-          <a:p>
-            <a:pPr>
-              <a:spcBef>
-                <a:spcPts val="600"/>
-              </a:spcBef>
-              <a:defRPr sz="1200">
-                <a:solidFill>
-                  <a:srgbClr val="94A3B8"/>
-                </a:solidFill>
-              </a:defRPr>
-            </a:pPr>
-            <a:r>
-              <a:t>• Foundry survival depends on unit electricity costs.</a:t>
-            </a:r>
-          </a:p>
-          <a:p>
-            <a:pPr>
-              <a:spcBef>
-                <a:spcPts val="600"/>
-              </a:spcBef>
-              <a:defRPr sz="1200">
-                <a:solidFill>
-                  <a:srgbClr val="94A3B8"/>
-                </a:solidFill>
-              </a:defRPr>
-            </a:pPr>
-            <a:r>
-              <a:t>• A 10% reduction in power consumption directly doubles foundry operating profit margins.</a:t>
-            </a:r>
-          </a:p>
-          <a:p>
-            <a:pPr>
-              <a:spcBef>
-                <a:spcPts val="600"/>
-              </a:spcBef>
-              <a:defRPr sz="1200">
-                <a:solidFill>
-                  <a:srgbClr val="94A3B8"/>
-                </a:solidFill>
-              </a:defRPr>
-            </a:pPr>
-            <a:r>
-              <a:t>• Energy bills reach up to 19% of total turnover in typical Kolhapur units.</a:t>
-            </a:r>
-          </a:p>
-          <a:p>
-            <a:pPr>
-              <a:spcBef>
-                <a:spcPts val="600"/>
-              </a:spcBef>
-              <a:defRPr sz="1200">
-                <a:solidFill>
-                  <a:srgbClr val="94A3B8"/>
-                </a:solidFill>
-              </a:defRPr>
-            </a:pPr>
-            <a:r>
-              <a:t>• Payback periods for operational energy savings are proven to be under 6–12 months.</a:t>
-            </a:r>
-          </a:p>
-        </p:txBody>
-      </p:sp>
-      <p:sp>
-        <p:nvSpPr>
-          <p:cNvPr id="6" name="Rounded Rectangle 5"/>
+              <a:defRPr sz="1100" b="1">
+                <a:solidFill>
+                  <a:srgbClr val="009530"/>
+                </a:solidFill>
+              </a:defRPr>
+            </a:pPr>
+            <a:r>
+              <a:t>SCHNEIDER ELECTRIC YUVA YODHA 2026 • CHALLENGE 4: SMART MANUFACTURING</a:t>
+            </a:r>
+          </a:p>
+        </p:txBody>
+      </p:sp>
+      <p:sp>
+        <p:nvSpPr>
+          <p:cNvPr id="4" name="TextBox 3"/>
+          <p:cNvSpPr txBox="1"/>
+          <p:nvPr/>
+        </p:nvSpPr>
+        <p:spPr>
+          <a:xfrm>
+            <a:off x="731520" y="594360"/>
+            <a:ext cx="10698480" cy="685800"/>
+          </a:xfrm>
+          <a:prstGeom prst="rect">
+            <a:avLst/>
+          </a:prstGeom>
+          <a:noFill/>
+        </p:spPr>
+        <p:txBody>
+          <a:bodyPr wrap="square">
+            <a:spAutoFit/>
+          </a:bodyPr>
+          <a:lstStyle/>
+          <a:p>
+            <a:pPr>
+              <a:defRPr sz="2200" b="1">
+                <a:solidFill>
+                  <a:srgbClr val="0F172A"/>
+                </a:solidFill>
+              </a:defRPr>
+            </a:pPr>
+            <a:r>
+              <a:t>Why It Matters Now: Single-Digit Margins &amp; EU CBAM Carbon Tariffs</a:t>
+            </a:r>
+          </a:p>
+        </p:txBody>
+      </p:sp>
+      <p:sp>
+        <p:nvSpPr>
+          <p:cNvPr id="5" name="Rounded Rectangle 4"/>
           <p:cNvSpPr/>
           <p:nvPr/>
         </p:nvSpPr>
         <p:spPr>
           <a:xfrm>
-            <a:off x="6217920" y="1645920"/>
-            <a:ext cx="5120640" cy="4572000"/>
+            <a:off x="731520" y="1463040"/>
+            <a:ext cx="5212080" cy="4846320"/>
           </a:xfrm>
           <a:prstGeom prst="roundRect">
             <a:avLst/>
           </a:prstGeom>
           <a:solidFill>
-            <a:srgbClr val="111722"/>
+            <a:srgbClr val="F8FAFC"/>
           </a:solidFill>
           <a:ln w="19050">
             <a:solidFill>
-              <a:srgbClr val="38BDF8"/>
+              <a:srgbClr val="D97706"/>
             </a:solidFill>
           </a:ln>
         </p:spPr>
@@ -5202,14 +5660,14 @@
       </p:sp>
       <p:sp>
         <p:nvSpPr>
-          <p:cNvPr id="7" name="TextBox 6"/>
+          <p:cNvPr id="6" name="TextBox 5"/>
           <p:cNvSpPr txBox="1"/>
           <p:nvPr/>
         </p:nvSpPr>
         <p:spPr>
           <a:xfrm>
-            <a:off x="6400800" y="1828800"/>
-            <a:ext cx="4754880" cy="4206240"/>
+            <a:off x="960120" y="1645920"/>
+            <a:ext cx="4754880" cy="4480560"/>
           </a:xfrm>
           <a:prstGeom prst="rect">
             <a:avLst/>
@@ -5223,89 +5681,259 @@
           <a:lstStyle/>
           <a:p>
             <a:pPr>
-              <a:defRPr sz="1600" b="1">
-                <a:solidFill>
-                  <a:srgbClr val="F1F5F9"/>
-                </a:solidFill>
-              </a:defRPr>
-            </a:pPr>
-            <a:r>
-              <a:t>EU CBAM Enforcement (2026 Crisis)</a:t>
-            </a:r>
-          </a:p>
-          <a:p>
-            <a:pPr>
-              <a:spcBef>
-                <a:spcPts val="600"/>
-              </a:spcBef>
-              <a:defRPr sz="1200">
-                <a:solidFill>
-                  <a:srgbClr val="94A3B8"/>
-                </a:solidFill>
-              </a:defRPr>
-            </a:pPr>
-            <a:r>
-              <a:t>• Nearly 30% of Kolhapur's castings are exported to EU, US, and Middle East markets.</a:t>
-            </a:r>
-          </a:p>
-          <a:p>
-            <a:pPr>
-              <a:spcBef>
-                <a:spcPts val="600"/>
-              </a:spcBef>
-              <a:defRPr sz="1200">
-                <a:solidFill>
-                  <a:srgbClr val="94A3B8"/>
-                </a:solidFill>
-              </a:defRPr>
-            </a:pPr>
-            <a:r>
-              <a:t>• Full CBAM implementation began in 2026, penalizing high carbon intensity.</a:t>
-            </a:r>
-          </a:p>
-          <a:p>
-            <a:pPr>
-              <a:spcBef>
-                <a:spcPts val="600"/>
-              </a:spcBef>
-              <a:defRPr sz="1200">
-                <a:solidFill>
-                  <a:srgbClr val="94A3B8"/>
-                </a:solidFill>
-              </a:defRPr>
-            </a:pPr>
-            <a:r>
-              <a:t>• Indian steel emits ~2.5 tCO2/t versus the EU benchmark of 1.5 tCO2/t.</a:t>
-            </a:r>
-          </a:p>
-          <a:p>
-            <a:pPr>
-              <a:spcBef>
-                <a:spcPts val="600"/>
-              </a:spcBef>
-              <a:defRPr sz="1200">
-                <a:solidFill>
-                  <a:srgbClr val="94A3B8"/>
-                </a:solidFill>
-              </a:defRPr>
-            </a:pPr>
-            <a:r>
-              <a:t>• Non-compliant exporters face carbon tariffs of €79.68/tCO2 (up to €173/t steel duty).</a:t>
-            </a:r>
-          </a:p>
-          <a:p>
-            <a:pPr>
-              <a:spcBef>
-                <a:spcPts val="600"/>
-              </a:spcBef>
-              <a:defRPr sz="1200">
-                <a:solidFill>
-                  <a:srgbClr val="94A3B8"/>
-                </a:solidFill>
-              </a:defRPr>
-            </a:pPr>
-            <a:r>
-              <a:t>• Verifiable Scope 2 carbon auditing is now mandatory to protect export revenue.</a:t>
+              <a:defRPr sz="1500" b="1">
+                <a:solidFill>
+                  <a:srgbClr val="0F172A"/>
+                </a:solidFill>
+              </a:defRPr>
+            </a:pPr>
+            <a:r>
+              <a:t>1. Thin Profit Margins (4%–8%)</a:t>
+            </a:r>
+          </a:p>
+          <a:p>
+            <a:pPr>
+              <a:spcBef>
+                <a:spcPts val="200"/>
+              </a:spcBef>
+              <a:defRPr sz="1000" b="1">
+                <a:solidFill>
+                  <a:srgbClr val="009530"/>
+                </a:solidFill>
+              </a:defRPr>
+            </a:pPr>
+            <a:r>
+              <a:t>FINANCIAL VIABILITY CRISIS</a:t>
+            </a:r>
+          </a:p>
+          <a:p>
+            <a:pPr>
+              <a:spcBef>
+                <a:spcPts val="500"/>
+              </a:spcBef>
+              <a:defRPr sz="1100">
+                <a:solidFill>
+                  <a:srgbClr val="475569"/>
+                </a:solidFill>
+              </a:defRPr>
+            </a:pPr>
+            <a:r>
+              <a:t>•  Severe Profit Sensitivity: Electricity is billed at ₹8.50/kWh on average. Power bills equal up to 19% of total foundry revenue.</a:t>
+            </a:r>
+          </a:p>
+          <a:p>
+            <a:pPr>
+              <a:spcBef>
+                <a:spcPts val="500"/>
+              </a:spcBef>
+              <a:defRPr sz="1100">
+                <a:solidFill>
+                  <a:srgbClr val="475569"/>
+                </a:solidFill>
+              </a:defRPr>
+            </a:pPr>
+            <a:r>
+              <a:t>•  Doubling Operating Profits: Because margins are razor thin, saving just 10% on furnace power directly doubles the owner's net profit margin!</a:t>
+            </a:r>
+          </a:p>
+          <a:p>
+            <a:pPr>
+              <a:spcBef>
+                <a:spcPts val="500"/>
+              </a:spcBef>
+              <a:defRPr sz="1100">
+                <a:solidFill>
+                  <a:srgbClr val="475569"/>
+                </a:solidFill>
+              </a:defRPr>
+            </a:pPr>
+            <a:r>
+              <a:t>•  Payback Speed: Energy intelligence software pays for itself in under 6 months without requiring expensive furnace replacements.</a:t>
+            </a:r>
+          </a:p>
+          <a:p>
+            <a:pPr>
+              <a:spcBef>
+                <a:spcPts val="500"/>
+              </a:spcBef>
+              <a:defRPr sz="1100">
+                <a:solidFill>
+                  <a:srgbClr val="475569"/>
+                </a:solidFill>
+              </a:defRPr>
+            </a:pPr>
+            <a:r>
+              <a:t>•  Demand Penalties: Missing peak tariff limits triggers severe MSEDCL penalty surcharges of ₹1.50/kWh on maximum demand.</a:t>
+            </a:r>
+          </a:p>
+        </p:txBody>
+      </p:sp>
+      <p:sp>
+        <p:nvSpPr>
+          <p:cNvPr id="7" name="Rounded Rectangle 6"/>
+          <p:cNvSpPr/>
+          <p:nvPr/>
+        </p:nvSpPr>
+        <p:spPr>
+          <a:xfrm>
+            <a:off x="6217920" y="1463040"/>
+            <a:ext cx="5212080" cy="4846320"/>
+          </a:xfrm>
+          <a:prstGeom prst="roundRect">
+            <a:avLst/>
+          </a:prstGeom>
+          <a:solidFill>
+            <a:srgbClr val="F8FAFC"/>
+          </a:solidFill>
+          <a:ln w="19050">
+            <a:solidFill>
+              <a:srgbClr val="2563EB"/>
+            </a:solidFill>
+          </a:ln>
+        </p:spPr>
+        <p:style>
+          <a:lnRef idx="1">
+            <a:schemeClr val="accent1"/>
+          </a:lnRef>
+          <a:fillRef idx="3">
+            <a:schemeClr val="accent1"/>
+          </a:fillRef>
+          <a:effectRef idx="2">
+            <a:schemeClr val="accent1"/>
+          </a:effectRef>
+          <a:fontRef idx="minor">
+            <a:schemeClr val="lt1"/>
+          </a:fontRef>
+        </p:style>
+        <p:txBody>
+          <a:bodyPr rtlCol="0" anchor="ctr"/>
+          <a:lstStyle/>
+          <a:p>
+            <a:pPr algn="ctr"/>
+          </a:p>
+        </p:txBody>
+      </p:sp>
+      <p:sp>
+        <p:nvSpPr>
+          <p:cNvPr id="8" name="TextBox 7"/>
+          <p:cNvSpPr txBox="1"/>
+          <p:nvPr/>
+        </p:nvSpPr>
+        <p:spPr>
+          <a:xfrm>
+            <a:off x="6446520" y="1645920"/>
+            <a:ext cx="4754880" cy="4480560"/>
+          </a:xfrm>
+          <a:prstGeom prst="rect">
+            <a:avLst/>
+          </a:prstGeom>
+          <a:noFill/>
+        </p:spPr>
+        <p:txBody>
+          <a:bodyPr wrap="square">
+            <a:spAutoFit/>
+          </a:bodyPr>
+          <a:lstStyle/>
+          <a:p>
+            <a:pPr>
+              <a:defRPr sz="1500" b="1">
+                <a:solidFill>
+                  <a:srgbClr val="0F172A"/>
+                </a:solidFill>
+              </a:defRPr>
+            </a:pPr>
+            <a:r>
+              <a:t>2. The 2026 EU CBAM Export Crisis</a:t>
+            </a:r>
+          </a:p>
+          <a:p>
+            <a:pPr>
+              <a:spcBef>
+                <a:spcPts val="200"/>
+              </a:spcBef>
+              <a:defRPr sz="1000" b="1">
+                <a:solidFill>
+                  <a:srgbClr val="009530"/>
+                </a:solidFill>
+              </a:defRPr>
+            </a:pPr>
+            <a:r>
+              <a:t>GLOBAL MARKET ACCESS RISK</a:t>
+            </a:r>
+          </a:p>
+          <a:p>
+            <a:pPr>
+              <a:spcBef>
+                <a:spcPts val="500"/>
+              </a:spcBef>
+              <a:defRPr sz="1100">
+                <a:solidFill>
+                  <a:srgbClr val="475569"/>
+                </a:solidFill>
+              </a:defRPr>
+            </a:pPr>
+            <a:r>
+              <a:t>•  Export Dependency: Nearly 30% of Kolhapur's precision castings are exported to the European Union and USA.</a:t>
+            </a:r>
+          </a:p>
+          <a:p>
+            <a:pPr>
+              <a:spcBef>
+                <a:spcPts val="500"/>
+              </a:spcBef>
+              <a:defRPr sz="1100">
+                <a:solidFill>
+                  <a:srgbClr val="475569"/>
+                </a:solidFill>
+              </a:defRPr>
+            </a:pPr>
+            <a:r>
+              <a:t>•  Full CBAM Enforcement in 2026: European buyers must pay carbon penalties on high-emission imported steel and iron.</a:t>
+            </a:r>
+          </a:p>
+          <a:p>
+            <a:pPr>
+              <a:spcBef>
+                <a:spcPts val="500"/>
+              </a:spcBef>
+              <a:defRPr sz="1100">
+                <a:solidFill>
+                  <a:srgbClr val="475569"/>
+                </a:solidFill>
+              </a:defRPr>
+            </a:pPr>
+            <a:r>
+              <a:t>•  Indian Carbon Gap: Average Indian casting emits ~2.1 tCO2/t, far exceeding the EU 1.50 tCO2/t benchmark.</a:t>
+            </a:r>
+          </a:p>
+          <a:p>
+            <a:pPr>
+              <a:spcBef>
+                <a:spcPts val="500"/>
+              </a:spcBef>
+              <a:defRPr sz="1100">
+                <a:solidFill>
+                  <a:srgbClr val="475569"/>
+                </a:solidFill>
+              </a:defRPr>
+            </a:pPr>
+            <a:r>
+              <a:t>•  Direct Penalty Risk: Without verifiable carbon audits, Indian MSMEs face up to €79.68/tCO2 in tariffs (~₹7,450 per tonne).</a:t>
+            </a:r>
+          </a:p>
+          <a:p>
+            <a:pPr>
+              <a:spcBef>
+                <a:spcPts val="500"/>
+              </a:spcBef>
+              <a:defRPr sz="1100">
+                <a:solidFill>
+                  <a:srgbClr val="475569"/>
+                </a:solidFill>
+              </a:defRPr>
+            </a:pPr>
+            <a:r>
+              <a:t>•  Immediate Need: Automated, certified Scope 2 carbon passports are now mandatory for survival.</a:t>
             </a:r>
           </a:p>
         </p:txBody>
@@ -5324,7 +5952,7 @@
     <p:bg>
       <p:bgPr>
         <a:solidFill>
-          <a:srgbClr val="0A0E14"/>
+          <a:srgbClr val="FFFFFF"/>
         </a:solidFill>
         <a:effectLst/>
       </p:bgPr>
@@ -5338,95 +5966,23 @@
       <p:grpSpPr/>
       <p:sp>
         <p:nvSpPr>
-          <p:cNvPr id="2" name="TextBox 1"/>
-          <p:cNvSpPr txBox="1"/>
-          <p:nvPr/>
-        </p:nvSpPr>
-        <p:spPr>
-          <a:xfrm>
-            <a:off x="731520" y="365760"/>
-            <a:ext cx="10698480" cy="365760"/>
-          </a:xfrm>
-          <a:prstGeom prst="rect">
-            <a:avLst/>
-          </a:prstGeom>
-          <a:noFill/>
-        </p:spPr>
-        <p:txBody>
-          <a:bodyPr wrap="square">
-            <a:spAutoFit/>
-          </a:bodyPr>
-          <a:lstStyle/>
-          <a:p>
-            <a:pPr>
-              <a:defRPr sz="1100" b="1">
-                <a:solidFill>
-                  <a:srgbClr val="3DCD58"/>
-                </a:solidFill>
-              </a:defRPr>
-            </a:pPr>
-            <a:r>
-              <a:t>SCHNEIDER ELECTRIC YUVA YODHA 2026 • CHALLENGE 4: SMART MANUFACTURING</a:t>
-            </a:r>
-          </a:p>
-        </p:txBody>
-      </p:sp>
-      <p:sp>
-        <p:nvSpPr>
-          <p:cNvPr id="3" name="TextBox 2"/>
-          <p:cNvSpPr txBox="1"/>
-          <p:nvPr/>
-        </p:nvSpPr>
-        <p:spPr>
-          <a:xfrm>
-            <a:off x="731520" y="640080"/>
-            <a:ext cx="10698480" cy="731520"/>
-          </a:xfrm>
-          <a:prstGeom prst="rect">
-            <a:avLst/>
-          </a:prstGeom>
-          <a:noFill/>
-        </p:spPr>
-        <p:txBody>
-          <a:bodyPr wrap="square">
-            <a:spAutoFit/>
-          </a:bodyPr>
-          <a:lstStyle/>
-          <a:p>
-            <a:pPr>
-              <a:defRPr sz="2400" b="1">
-                <a:solidFill>
-                  <a:srgbClr val="F1F5F9"/>
-                </a:solidFill>
-              </a:defRPr>
-            </a:pPr>
-            <a:r>
-              <a:t>Strategic Fit: Extending EcoStruxure to 5,000+ MSME Foundries</a:t>
-            </a:r>
-          </a:p>
-        </p:txBody>
-      </p:sp>
-      <p:sp>
-        <p:nvSpPr>
-          <p:cNvPr id="4" name="Rounded Rectangle 3"/>
+          <p:cNvPr id="2" name="Rectangle 1"/>
           <p:cNvSpPr/>
           <p:nvPr/>
         </p:nvSpPr>
         <p:spPr>
           <a:xfrm>
-            <a:off x="731520" y="1645920"/>
-            <a:ext cx="5120640" cy="4572000"/>
-          </a:xfrm>
-          <a:prstGeom prst="roundRect">
+            <a:off x="0" y="0"/>
+            <a:ext cx="12191695" cy="109728"/>
+          </a:xfrm>
+          <a:prstGeom prst="rect">
             <a:avLst/>
           </a:prstGeom>
           <a:solidFill>
-            <a:srgbClr val="111722"/>
+            <a:srgbClr val="009530"/>
           </a:solidFill>
-          <a:ln w="19050">
-            <a:solidFill>
-              <a:srgbClr val="3DCD58"/>
-            </a:solidFill>
+          <a:ln>
+            <a:noFill/>
           </a:ln>
         </p:spPr>
         <p:style>
@@ -5453,14 +6009,14 @@
       </p:sp>
       <p:sp>
         <p:nvSpPr>
-          <p:cNvPr id="5" name="TextBox 4"/>
+          <p:cNvPr id="3" name="TextBox 2"/>
           <p:cNvSpPr txBox="1"/>
           <p:nvPr/>
         </p:nvSpPr>
         <p:spPr>
           <a:xfrm>
-            <a:off x="914400" y="1828800"/>
-            <a:ext cx="4754880" cy="4206240"/>
+            <a:off x="731520" y="320040"/>
+            <a:ext cx="10698480" cy="320040"/>
           </a:xfrm>
           <a:prstGeom prst="rect">
             <a:avLst/>
@@ -5474,83 +6030,73 @@
           <a:lstStyle/>
           <a:p>
             <a:pPr>
-              <a:defRPr sz="1600" b="1">
-                <a:solidFill>
-                  <a:srgbClr val="F1F5F9"/>
-                </a:solidFill>
-              </a:defRPr>
-            </a:pPr>
-            <a:r>
-              <a:t>The Enterprise vs MSME Gap</a:t>
-            </a:r>
-          </a:p>
-          <a:p>
-            <a:pPr>
-              <a:spcBef>
-                <a:spcPts val="600"/>
-              </a:spcBef>
-              <a:defRPr sz="1200">
-                <a:solidFill>
-                  <a:srgbClr val="94A3B8"/>
-                </a:solidFill>
-              </a:defRPr>
-            </a:pPr>
-            <a:r>
-              <a:t>• Schneider's EcoStruxure™ Power &amp; Process serves enterprise facilities with multi-crore instrumentation budgets.</a:t>
-            </a:r>
-          </a:p>
-          <a:p>
-            <a:pPr>
-              <a:spcBef>
-                <a:spcPts val="600"/>
-              </a:spcBef>
-              <a:defRPr sz="1200">
-                <a:solidFill>
-                  <a:srgbClr val="94A3B8"/>
-                </a:solidFill>
-              </a:defRPr>
-            </a:pPr>
-            <a:r>
-              <a:t>• India's 5,000+ MSME manufacturing units cannot afford or absorb heavy enterprise SCADA platforms.</a:t>
-            </a:r>
-          </a:p>
-          <a:p>
-            <a:pPr>
-              <a:spcBef>
-                <a:spcPts val="600"/>
-              </a:spcBef>
-              <a:defRPr sz="1200">
-                <a:solidFill>
-                  <a:srgbClr val="94A3B8"/>
-                </a:solidFill>
-              </a:defRPr>
-            </a:pPr>
-            <a:r>
-              <a:t>• They have thin capital, yet consume massive electrical loads and desperately require decision intelligence.</a:t>
-            </a:r>
-          </a:p>
-        </p:txBody>
-      </p:sp>
-      <p:sp>
-        <p:nvSpPr>
-          <p:cNvPr id="6" name="Rounded Rectangle 5"/>
+              <a:defRPr sz="1100" b="1">
+                <a:solidFill>
+                  <a:srgbClr val="009530"/>
+                </a:solidFill>
+              </a:defRPr>
+            </a:pPr>
+            <a:r>
+              <a:t>SCHNEIDER ELECTRIC YUVA YODHA 2026 • CHALLENGE 4: SMART MANUFACTURING</a:t>
+            </a:r>
+          </a:p>
+        </p:txBody>
+      </p:sp>
+      <p:sp>
+        <p:nvSpPr>
+          <p:cNvPr id="4" name="TextBox 3"/>
+          <p:cNvSpPr txBox="1"/>
+          <p:nvPr/>
+        </p:nvSpPr>
+        <p:spPr>
+          <a:xfrm>
+            <a:off x="731520" y="594360"/>
+            <a:ext cx="10698480" cy="685800"/>
+          </a:xfrm>
+          <a:prstGeom prst="rect">
+            <a:avLst/>
+          </a:prstGeom>
+          <a:noFill/>
+        </p:spPr>
+        <p:txBody>
+          <a:bodyPr wrap="square">
+            <a:spAutoFit/>
+          </a:bodyPr>
+          <a:lstStyle/>
+          <a:p>
+            <a:pPr>
+              <a:defRPr sz="2200" b="1">
+                <a:solidFill>
+                  <a:srgbClr val="0F172A"/>
+                </a:solidFill>
+              </a:defRPr>
+            </a:pPr>
+            <a:r>
+              <a:t>The Proposed Solution: EcoCast AI Overview &amp; System Architecture</a:t>
+            </a:r>
+          </a:p>
+        </p:txBody>
+      </p:sp>
+      <p:sp>
+        <p:nvSpPr>
+          <p:cNvPr id="5" name="Rounded Rectangle 4"/>
           <p:cNvSpPr/>
           <p:nvPr/>
         </p:nvSpPr>
         <p:spPr>
           <a:xfrm>
-            <a:off x="6217920" y="1645920"/>
-            <a:ext cx="5120640" cy="4572000"/>
+            <a:off x="731520" y="1463040"/>
+            <a:ext cx="4937760" cy="4846320"/>
           </a:xfrm>
           <a:prstGeom prst="roundRect">
             <a:avLst/>
           </a:prstGeom>
           <a:solidFill>
-            <a:srgbClr val="111722"/>
+            <a:srgbClr val="F8FAFC"/>
           </a:solidFill>
           <a:ln w="19050">
             <a:solidFill>
-              <a:srgbClr val="3DCD58"/>
+              <a:srgbClr val="009530"/>
             </a:solidFill>
           </a:ln>
         </p:spPr>
@@ -5578,14 +6124,14 @@
       </p:sp>
       <p:sp>
         <p:nvSpPr>
-          <p:cNvPr id="7" name="TextBox 6"/>
+          <p:cNvPr id="6" name="TextBox 5"/>
           <p:cNvSpPr txBox="1"/>
           <p:nvPr/>
         </p:nvSpPr>
         <p:spPr>
           <a:xfrm>
-            <a:off x="6400800" y="1828800"/>
-            <a:ext cx="4754880" cy="4206240"/>
+            <a:off x="960120" y="1645920"/>
+            <a:ext cx="4480560" cy="4480560"/>
           </a:xfrm>
           <a:prstGeom prst="rect">
             <a:avLst/>
@@ -5599,78 +6145,117 @@
           <a:lstStyle/>
           <a:p>
             <a:pPr>
-              <a:defRPr sz="1600" b="1">
-                <a:solidFill>
-                  <a:srgbClr val="F1F5F9"/>
-                </a:solidFill>
-              </a:defRPr>
-            </a:pPr>
-            <a:r>
-              <a:t>EcoCast as the 'EcoStruxure Edge MSME Gateway'</a:t>
-            </a:r>
-          </a:p>
-          <a:p>
-            <a:pPr>
-              <a:spcBef>
-                <a:spcPts val="600"/>
-              </a:spcBef>
-              <a:defRPr sz="1200">
-                <a:solidFill>
-                  <a:srgbClr val="94A3B8"/>
-                </a:solidFill>
-              </a:defRPr>
-            </a:pPr>
-            <a:r>
-              <a:t>• Non-invasive software layer connecting directly to Schneider EasyLogic™ PM5350 and PowerLogic™ ION meters via Modbus-TCP.</a:t>
-            </a:r>
-          </a:p>
-          <a:p>
-            <a:pPr>
-              <a:spcBef>
-                <a:spcPts val="600"/>
-              </a:spcBef>
-              <a:defRPr sz="1200">
-                <a:solidFill>
-                  <a:srgbClr val="94A3B8"/>
-                </a:solidFill>
-              </a:defRPr>
-            </a:pPr>
-            <a:r>
-              <a:t>• Turns raw meter telemetry into actionable furnace operational decisions.</a:t>
-            </a:r>
-          </a:p>
-          <a:p>
-            <a:pPr>
-              <a:spcBef>
-                <a:spcPts val="600"/>
-              </a:spcBef>
-              <a:defRPr sz="1200">
-                <a:solidFill>
-                  <a:srgbClr val="94A3B8"/>
-                </a:solidFill>
-              </a:defRPr>
-            </a:pPr>
-            <a:r>
-              <a:t>• Creates a recurring hardware on-ramp for Schneider smart meters, variable speed drives (Altivar), and edge gateways.</a:t>
-            </a:r>
-          </a:p>
-          <a:p>
-            <a:pPr>
-              <a:spcBef>
-                <a:spcPts val="600"/>
-              </a:spcBef>
-              <a:defRPr sz="1200">
-                <a:solidFill>
-                  <a:srgbClr val="94A3B8"/>
-                </a:solidFill>
-              </a:defRPr>
-            </a:pPr>
-            <a:r>
-              <a:t>• Directly aligns with SE Ventures' thesis on industrial decarbonization.</a:t>
-            </a:r>
-          </a:p>
-        </p:txBody>
-      </p:sp>
+              <a:defRPr sz="1500" b="1">
+                <a:solidFill>
+                  <a:srgbClr val="0F172A"/>
+                </a:solidFill>
+              </a:defRPr>
+            </a:pPr>
+            <a:r>
+              <a:t>Three-Pillar Intelligence Suite</a:t>
+            </a:r>
+          </a:p>
+          <a:p>
+            <a:pPr>
+              <a:spcBef>
+                <a:spcPts val="200"/>
+              </a:spcBef>
+              <a:defRPr sz="1000" b="1">
+                <a:solidFill>
+                  <a:srgbClr val="009530"/>
+                </a:solidFill>
+              </a:defRPr>
+            </a:pPr>
+            <a:r>
+              <a:t>ARCHITECTURE &amp; INNOVATION</a:t>
+            </a:r>
+          </a:p>
+          <a:p>
+            <a:pPr>
+              <a:spcBef>
+                <a:spcPts val="500"/>
+              </a:spcBef>
+              <a:defRPr sz="1100">
+                <a:solidFill>
+                  <a:srgbClr val="475569"/>
+                </a:solidFill>
+              </a:defRPr>
+            </a:pPr>
+            <a:r>
+              <a:t>•  Pillar 1: 3D Crucible Digital Twin: Live WebGL thermal model displaying real-time bath temperature incandescence and lid status warnings.</a:t>
+            </a:r>
+          </a:p>
+          <a:p>
+            <a:pPr>
+              <a:spcBef>
+                <a:spcPts val="500"/>
+              </a:spcBef>
+              <a:defRPr sz="1100">
+                <a:solidFill>
+                  <a:srgbClr val="475569"/>
+                </a:solidFill>
+              </a:defRPr>
+            </a:pPr>
+            <a:r>
+              <a:t>•  Pillar 2: Holding-Guard &amp; ToU Optimizer: Real-time financial ticker (₹/min and kg CO2/min) alerting operators the second molten metal sits idle. Auto-schedules heats into night off-peak windows.</a:t>
+            </a:r>
+          </a:p>
+          <a:p>
+            <a:pPr>
+              <a:spcBef>
+                <a:spcPts val="500"/>
+              </a:spcBef>
+              <a:defRPr sz="1100">
+                <a:solidFill>
+                  <a:srgbClr val="475569"/>
+                </a:solidFill>
+              </a:defRPr>
+            </a:pPr>
+            <a:r>
+              <a:t>•  Pillar 3: Verified Compliance &amp; ESCerts: Automatically creates export-ready PDF passports with SHA-256 digital seals, calculating EU CBAM duties and BEE PAT energy certificates.</a:t>
+            </a:r>
+          </a:p>
+          <a:p>
+            <a:pPr>
+              <a:spcBef>
+                <a:spcPts val="500"/>
+              </a:spcBef>
+              <a:defRPr sz="1100">
+                <a:solidFill>
+                  <a:srgbClr val="475569"/>
+                </a:solidFill>
+              </a:defRPr>
+            </a:pPr>
+            <a:r>
+              <a:t>•  Plug-and-Play Simplicity: Runs on edge hardware without halting ongoing factory operations.</a:t>
+            </a:r>
+          </a:p>
+        </p:txBody>
+      </p:sp>
+      <p:pic>
+        <p:nvPicPr>
+          <p:cNvPr id="7" name="Picture 6" descr="fig2_solution_architecture.png"/>
+          <p:cNvPicPr>
+            <a:picLocks noChangeAspect="1"/>
+          </p:cNvPicPr>
+          <p:nvPr/>
+        </p:nvPicPr>
+        <p:blipFill>
+          <a:blip r:embed="rId2"/>
+          <a:stretch>
+            <a:fillRect/>
+          </a:stretch>
+        </p:blipFill>
+        <p:spPr>
+          <a:xfrm>
+            <a:off x="5943600" y="1463040"/>
+            <a:ext cx="5486400" cy="4846320"/>
+          </a:xfrm>
+          <a:prstGeom prst="rect">
+            <a:avLst/>
+          </a:prstGeom>
+        </p:spPr>
+      </p:pic>
     </p:spTree>
   </p:cSld>
   <p:clrMapOvr>
@@ -5685,7 +6270,7 @@
     <p:bg>
       <p:bgPr>
         <a:solidFill>
-          <a:srgbClr val="0A0E14"/>
+          <a:srgbClr val="FFFFFF"/>
         </a:solidFill>
         <a:effectLst/>
       </p:bgPr>
@@ -5699,95 +6284,23 @@
       <p:grpSpPr/>
       <p:sp>
         <p:nvSpPr>
-          <p:cNvPr id="2" name="TextBox 1"/>
-          <p:cNvSpPr txBox="1"/>
-          <p:nvPr/>
-        </p:nvSpPr>
-        <p:spPr>
-          <a:xfrm>
-            <a:off x="731520" y="365760"/>
-            <a:ext cx="10698480" cy="365760"/>
-          </a:xfrm>
-          <a:prstGeom prst="rect">
-            <a:avLst/>
-          </a:prstGeom>
-          <a:noFill/>
-        </p:spPr>
-        <p:txBody>
-          <a:bodyPr wrap="square">
-            <a:spAutoFit/>
-          </a:bodyPr>
-          <a:lstStyle/>
-          <a:p>
-            <a:pPr>
-              <a:defRPr sz="1100" b="1">
-                <a:solidFill>
-                  <a:srgbClr val="3DCD58"/>
-                </a:solidFill>
-              </a:defRPr>
-            </a:pPr>
-            <a:r>
-              <a:t>SCHNEIDER ELECTRIC YUVA YODHA 2026 • CHALLENGE 4: SMART MANUFACTURING</a:t>
-            </a:r>
-          </a:p>
-        </p:txBody>
-      </p:sp>
-      <p:sp>
-        <p:nvSpPr>
-          <p:cNvPr id="3" name="TextBox 2"/>
-          <p:cNvSpPr txBox="1"/>
-          <p:nvPr/>
-        </p:nvSpPr>
-        <p:spPr>
-          <a:xfrm>
-            <a:off x="731520" y="640080"/>
-            <a:ext cx="10698480" cy="731520"/>
-          </a:xfrm>
-          <a:prstGeom prst="rect">
-            <a:avLst/>
-          </a:prstGeom>
-          <a:noFill/>
-        </p:spPr>
-        <p:txBody>
-          <a:bodyPr wrap="square">
-            <a:spAutoFit/>
-          </a:bodyPr>
-          <a:lstStyle/>
-          <a:p>
-            <a:pPr>
-              <a:defRPr sz="2400" b="1">
-                <a:solidFill>
-                  <a:srgbClr val="F1F5F9"/>
-                </a:solidFill>
-              </a:defRPr>
-            </a:pPr>
-            <a:r>
-              <a:t>The Proposed Solution: EcoCast AI Overview &amp; Core Innovation</a:t>
-            </a:r>
-          </a:p>
-        </p:txBody>
-      </p:sp>
-      <p:sp>
-        <p:nvSpPr>
-          <p:cNvPr id="4" name="Rounded Rectangle 3"/>
+          <p:cNvPr id="2" name="Rectangle 1"/>
           <p:cNvSpPr/>
           <p:nvPr/>
         </p:nvSpPr>
         <p:spPr>
           <a:xfrm>
-            <a:off x="731520" y="1645920"/>
-            <a:ext cx="3291840" cy="4572000"/>
-          </a:xfrm>
-          <a:prstGeom prst="roundRect">
+            <a:off x="0" y="0"/>
+            <a:ext cx="12191695" cy="109728"/>
+          </a:xfrm>
+          <a:prstGeom prst="rect">
             <a:avLst/>
           </a:prstGeom>
           <a:solidFill>
-            <a:srgbClr val="111722"/>
+            <a:srgbClr val="009530"/>
           </a:solidFill>
-          <a:ln w="19050">
-            <a:solidFill>
-              <a:srgbClr val="3DCD58"/>
-            </a:solidFill>
+          <a:ln>
+            <a:noFill/>
           </a:ln>
         </p:spPr>
         <p:style>
@@ -5814,14 +6327,14 @@
       </p:sp>
       <p:sp>
         <p:nvSpPr>
-          <p:cNvPr id="5" name="TextBox 4"/>
+          <p:cNvPr id="3" name="TextBox 2"/>
           <p:cNvSpPr txBox="1"/>
           <p:nvPr/>
         </p:nvSpPr>
         <p:spPr>
           <a:xfrm>
-            <a:off x="914400" y="1828800"/>
-            <a:ext cx="2926080" cy="4206240"/>
+            <a:off x="731520" y="320040"/>
+            <a:ext cx="10698480" cy="320040"/>
           </a:xfrm>
           <a:prstGeom prst="rect">
             <a:avLst/>
@@ -5835,98 +6348,73 @@
           <a:lstStyle/>
           <a:p>
             <a:pPr>
-              <a:defRPr sz="1600" b="1">
-                <a:solidFill>
-                  <a:srgbClr val="F1F5F9"/>
-                </a:solidFill>
-              </a:defRPr>
-            </a:pPr>
-            <a:r>
-              <a:t>1. 3D Digital Twin</a:t>
-            </a:r>
-          </a:p>
-          <a:p>
-            <a:pPr>
-              <a:spcBef>
-                <a:spcPts val="600"/>
-              </a:spcBef>
-              <a:defRPr sz="1200">
-                <a:solidFill>
-                  <a:srgbClr val="94A3B8"/>
-                </a:solidFill>
-              </a:defRPr>
-            </a:pPr>
-            <a:r>
-              <a:t>• Three.js WebGL visualization of crucible thermal gradient.</a:t>
-            </a:r>
-          </a:p>
-          <a:p>
-            <a:pPr>
-              <a:spcBef>
-                <a:spcPts val="600"/>
-              </a:spcBef>
-              <a:defRPr sz="1200">
-                <a:solidFill>
-                  <a:srgbClr val="94A3B8"/>
-                </a:solidFill>
-              </a:defRPr>
-            </a:pPr>
-            <a:r>
-              <a:t>• Real-time dynamic incandescence based on pyrometer bath temp.</a:t>
-            </a:r>
-          </a:p>
-          <a:p>
-            <a:pPr>
-              <a:spcBef>
-                <a:spcPts val="600"/>
-              </a:spcBef>
-              <a:defRPr sz="1200">
-                <a:solidFill>
-                  <a:srgbClr val="94A3B8"/>
-                </a:solidFill>
-              </a:defRPr>
-            </a:pPr>
-            <a:r>
-              <a:t>• Visual warning waves when insulated lid is open (+32.7 kW loss).</a:t>
-            </a:r>
-          </a:p>
-          <a:p>
-            <a:pPr>
-              <a:spcBef>
-                <a:spcPts val="600"/>
-              </a:spcBef>
-              <a:defRPr sz="1200">
-                <a:solidFill>
-                  <a:srgbClr val="94A3B8"/>
-                </a:solidFill>
-              </a:defRPr>
-            </a:pPr>
-            <a:r>
-              <a:t>• Hydraulic tilting animation during metal tapping.</a:t>
-            </a:r>
-          </a:p>
-        </p:txBody>
-      </p:sp>
-      <p:sp>
-        <p:nvSpPr>
-          <p:cNvPr id="6" name="Rounded Rectangle 5"/>
+              <a:defRPr sz="1100" b="1">
+                <a:solidFill>
+                  <a:srgbClr val="009530"/>
+                </a:solidFill>
+              </a:defRPr>
+            </a:pPr>
+            <a:r>
+              <a:t>SCHNEIDER ELECTRIC YUVA YODHA 2026 • CHALLENGE 4: SMART MANUFACTURING</a:t>
+            </a:r>
+          </a:p>
+        </p:txBody>
+      </p:sp>
+      <p:sp>
+        <p:nvSpPr>
+          <p:cNvPr id="4" name="TextBox 3"/>
+          <p:cNvSpPr txBox="1"/>
+          <p:nvPr/>
+        </p:nvSpPr>
+        <p:spPr>
+          <a:xfrm>
+            <a:off x="731520" y="594360"/>
+            <a:ext cx="10698480" cy="685800"/>
+          </a:xfrm>
+          <a:prstGeom prst="rect">
+            <a:avLst/>
+          </a:prstGeom>
+          <a:noFill/>
+        </p:spPr>
+        <p:txBody>
+          <a:bodyPr wrap="square">
+            <a:spAutoFit/>
+          </a:bodyPr>
+          <a:lstStyle/>
+          <a:p>
+            <a:pPr>
+              <a:defRPr sz="2200" b="1">
+                <a:solidFill>
+                  <a:srgbClr val="0F172A"/>
+                </a:solidFill>
+              </a:defRPr>
+            </a:pPr>
+            <a:r>
+              <a:t>Operator User Journey: Synchronized Melting from Scrap to Ingot</a:t>
+            </a:r>
+          </a:p>
+        </p:txBody>
+      </p:sp>
+      <p:sp>
+        <p:nvSpPr>
+          <p:cNvPr id="5" name="Rounded Rectangle 4"/>
           <p:cNvSpPr/>
           <p:nvPr/>
         </p:nvSpPr>
         <p:spPr>
           <a:xfrm>
-            <a:off x="4389120" y="1645920"/>
-            <a:ext cx="3291840" cy="4572000"/>
+            <a:off x="731520" y="1463040"/>
+            <a:ext cx="4937760" cy="4846320"/>
           </a:xfrm>
           <a:prstGeom prst="roundRect">
             <a:avLst/>
           </a:prstGeom>
           <a:solidFill>
-            <a:srgbClr val="111722"/>
+            <a:srgbClr val="F8FAFC"/>
           </a:solidFill>
           <a:ln w="19050">
             <a:solidFill>
-              <a:srgbClr val="F59E0B"/>
+              <a:srgbClr val="D97706"/>
             </a:solidFill>
           </a:ln>
         </p:spPr>
@@ -5954,14 +6442,14 @@
       </p:sp>
       <p:sp>
         <p:nvSpPr>
-          <p:cNvPr id="7" name="TextBox 6"/>
+          <p:cNvPr id="6" name="TextBox 5"/>
           <p:cNvSpPr txBox="1"/>
           <p:nvPr/>
         </p:nvSpPr>
         <p:spPr>
           <a:xfrm>
-            <a:off x="4572000" y="1828800"/>
-            <a:ext cx="2926080" cy="4206240"/>
+            <a:off x="960120" y="1645920"/>
+            <a:ext cx="4480560" cy="4480560"/>
           </a:xfrm>
           <a:prstGeom prst="rect">
             <a:avLst/>
@@ -5975,203 +6463,117 @@
           <a:lstStyle/>
           <a:p>
             <a:pPr>
-              <a:defRPr sz="1600" b="1">
-                <a:solidFill>
-                  <a:srgbClr val="F1F5F9"/>
-                </a:solidFill>
-              </a:defRPr>
-            </a:pPr>
-            <a:r>
-              <a:t>2. Holding Guard &amp; ToU</a:t>
-            </a:r>
-          </a:p>
-          <a:p>
-            <a:pPr>
-              <a:spcBef>
-                <a:spcPts val="600"/>
-              </a:spcBef>
-              <a:defRPr sz="1200">
-                <a:solidFill>
-                  <a:srgbClr val="94A3B8"/>
-                </a:solidFill>
-              </a:defRPr>
-            </a:pPr>
-            <a:r>
-              <a:t>• Watchdog detects when metal reaches 1520°C but is held idle.</a:t>
-            </a:r>
-          </a:p>
-          <a:p>
-            <a:pPr>
-              <a:spcBef>
-                <a:spcPts val="600"/>
-              </a:spcBef>
-              <a:defRPr sz="1200">
-                <a:solidFill>
-                  <a:srgbClr val="94A3B8"/>
-                </a:solidFill>
-              </a:defRPr>
-            </a:pPr>
-            <a:r>
-              <a:t>• Real-time burn ticker: ₹/minute and kg CO2/min wasted.</a:t>
-            </a:r>
-          </a:p>
-          <a:p>
-            <a:pPr>
-              <a:spcBef>
-                <a:spcPts val="600"/>
-              </a:spcBef>
-              <a:defRPr sz="1200">
-                <a:solidFill>
-                  <a:srgbClr val="94A3B8"/>
-                </a:solidFill>
-              </a:defRPr>
-            </a:pPr>
-            <a:r>
-              <a:t>• MSEDCL tariff optimizer recommends optimal batch start times to hit night rebate window (-₹1.50/unit).</a:t>
-            </a:r>
-          </a:p>
-        </p:txBody>
-      </p:sp>
-      <p:sp>
-        <p:nvSpPr>
-          <p:cNvPr id="8" name="Rounded Rectangle 7"/>
-          <p:cNvSpPr/>
+              <a:defRPr sz="1500" b="1">
+                <a:solidFill>
+                  <a:srgbClr val="0F172A"/>
+                </a:solidFill>
+              </a:defRPr>
+            </a:pPr>
+            <a:r>
+              <a:t>Shopfloor Pulpit Experience</a:t>
+            </a:r>
+          </a:p>
+          <a:p>
+            <a:pPr>
+              <a:spcBef>
+                <a:spcPts val="200"/>
+              </a:spcBef>
+              <a:defRPr sz="1000" b="1">
+                <a:solidFill>
+                  <a:srgbClr val="009530"/>
+                </a:solidFill>
+              </a:defRPr>
+            </a:pPr>
+            <a:r>
+              <a:t>ACTIONABLE HUMAN-CENTERED DESIGN</a:t>
+            </a:r>
+          </a:p>
+          <a:p>
+            <a:pPr>
+              <a:spcBef>
+                <a:spcPts val="500"/>
+              </a:spcBef>
+              <a:defRPr sz="1100">
+                <a:solidFill>
+                  <a:srgbClr val="475569"/>
+                </a:solidFill>
+              </a:defRPr>
+            </a:pPr>
+            <a:r>
+              <a:t>•  Step 1 (Charge &amp; AI Ramp): Operator selects metal grade (Grey Iron 1450°C, SG Iron 1500°C, Steel 1550°C). AI recommends optimal multi-stage kW ramp to protect furnace coils.</a:t>
+            </a:r>
+          </a:p>
+          <a:p>
+            <a:pPr>
+              <a:spcBef>
+                <a:spcPts val="500"/>
+              </a:spcBef>
+              <a:defRPr sz="1100">
+                <a:solidFill>
+                  <a:srgbClr val="475569"/>
+                </a:solidFill>
+              </a:defRPr>
+            </a:pPr>
+            <a:r>
+              <a:t>•  Step 2 (Lid Cover Guard): Infrared sensor checks furnace lid. If left open past 1000°C, a high-priority banner alerts operator to close lid, saving 32.7 kWh.</a:t>
+            </a:r>
+          </a:p>
+          <a:p>
+            <a:pPr>
+              <a:spcBef>
+                <a:spcPts val="500"/>
+              </a:spcBef>
+              <a:defRPr sz="1100">
+                <a:solidFill>
+                  <a:srgbClr val="475569"/>
+                </a:solidFill>
+              </a:defRPr>
+            </a:pPr>
+            <a:r>
+              <a:t>•  Step 3 (Holding Guard Watchdog): When target temp is reached, if ladles aren't ready, audio-visual alarm flashes 'Holding Loss: ₹22.50/min'. Prompts crew to tap or drop power.</a:t>
+            </a:r>
+          </a:p>
+          <a:p>
+            <a:pPr>
+              <a:spcBef>
+                <a:spcPts val="500"/>
+              </a:spcBef>
+              <a:defRPr sz="1100">
+                <a:solidFill>
+                  <a:srgbClr val="475569"/>
+                </a:solidFill>
+              </a:defRPr>
+            </a:pPr>
+            <a:r>
+              <a:t>•  Step 4 (Tapping &amp; One-Click Audit): Crucible tilts, pours metal, and instantly issues a tamper-proof PDF compliance certificate.</a:t>
+            </a:r>
+          </a:p>
+        </p:txBody>
+      </p:sp>
+      <p:pic>
+        <p:nvPicPr>
+          <p:cNvPr id="7" name="Picture 6" descr="fig3_operator_journey.png"/>
+          <p:cNvPicPr>
+            <a:picLocks noChangeAspect="1"/>
+          </p:cNvPicPr>
           <p:nvPr/>
-        </p:nvSpPr>
-        <p:spPr>
-          <a:xfrm>
-            <a:off x="8046720" y="1645920"/>
-            <a:ext cx="3291840" cy="4572000"/>
-          </a:xfrm>
-          <a:prstGeom prst="roundRect">
-            <a:avLst/>
-          </a:prstGeom>
-          <a:solidFill>
-            <a:srgbClr val="111722"/>
-          </a:solidFill>
-          <a:ln w="19050">
-            <a:solidFill>
-              <a:srgbClr val="38BDF8"/>
-            </a:solidFill>
-          </a:ln>
-        </p:spPr>
-        <p:style>
-          <a:lnRef idx="1">
-            <a:schemeClr val="accent1"/>
-          </a:lnRef>
-          <a:fillRef idx="3">
-            <a:schemeClr val="accent1"/>
-          </a:fillRef>
-          <a:effectRef idx="2">
-            <a:schemeClr val="accent1"/>
-          </a:effectRef>
-          <a:fontRef idx="minor">
-            <a:schemeClr val="lt1"/>
-          </a:fontRef>
-        </p:style>
-        <p:txBody>
-          <a:bodyPr rtlCol="0" anchor="ctr"/>
-          <a:lstStyle/>
-          <a:p>
-            <a:pPr algn="ctr"/>
-          </a:p>
-        </p:txBody>
-      </p:sp>
-      <p:sp>
-        <p:nvSpPr>
-          <p:cNvPr id="9" name="TextBox 8"/>
-          <p:cNvSpPr txBox="1"/>
-          <p:nvPr/>
-        </p:nvSpPr>
-        <p:spPr>
-          <a:xfrm>
-            <a:off x="8229600" y="1828800"/>
-            <a:ext cx="2926080" cy="4206240"/>
+        </p:nvPicPr>
+        <p:blipFill>
+          <a:blip r:embed="rId2"/>
+          <a:stretch>
+            <a:fillRect/>
+          </a:stretch>
+        </p:blipFill>
+        <p:spPr>
+          <a:xfrm>
+            <a:off x="5943600" y="1463040"/>
+            <a:ext cx="5486400" cy="4846320"/>
           </a:xfrm>
           <a:prstGeom prst="rect">
             <a:avLst/>
           </a:prstGeom>
-          <a:noFill/>
-        </p:spPr>
-        <p:txBody>
-          <a:bodyPr wrap="square">
-            <a:spAutoFit/>
-          </a:bodyPr>
-          <a:lstStyle/>
-          <a:p>
-            <a:pPr>
-              <a:defRPr sz="1600" b="1">
-                <a:solidFill>
-                  <a:srgbClr val="F1F5F9"/>
-                </a:solidFill>
-              </a:defRPr>
-            </a:pPr>
-            <a:r>
-              <a:t>3. Verified Certification</a:t>
-            </a:r>
-          </a:p>
-          <a:p>
-            <a:pPr>
-              <a:spcBef>
-                <a:spcPts val="600"/>
-              </a:spcBef>
-              <a:defRPr sz="1200">
-                <a:solidFill>
-                  <a:srgbClr val="94A3B8"/>
-                </a:solidFill>
-              </a:defRPr>
-            </a:pPr>
-            <a:r>
-              <a:t>• Auto-generates Form CA-26 compliance certificates upon tapping.</a:t>
-            </a:r>
-          </a:p>
-          <a:p>
-            <a:pPr>
-              <a:spcBef>
-                <a:spcPts val="600"/>
-              </a:spcBef>
-              <a:defRPr sz="1200">
-                <a:solidFill>
-                  <a:srgbClr val="94A3B8"/>
-                </a:solidFill>
-              </a:defRPr>
-            </a:pPr>
-            <a:r>
-              <a:t>• Cryptographic SHA-256 digital stamp for tamper-proof audits.</a:t>
-            </a:r>
-          </a:p>
-          <a:p>
-            <a:pPr>
-              <a:spcBef>
-                <a:spcPts val="600"/>
-              </a:spcBef>
-              <a:defRPr sz="1200">
-                <a:solidFill>
-                  <a:srgbClr val="94A3B8"/>
-                </a:solidFill>
-              </a:defRPr>
-            </a:pPr>
-            <a:r>
-              <a:t>• Quantifies EU CBAM duty savings in Euros (€) and INR (₹).</a:t>
-            </a:r>
-          </a:p>
-          <a:p>
-            <a:pPr>
-              <a:spcBef>
-                <a:spcPts val="600"/>
-              </a:spcBef>
-              <a:defRPr sz="1200">
-                <a:solidFill>
-                  <a:srgbClr val="94A3B8"/>
-                </a:solidFill>
-              </a:defRPr>
-            </a:pPr>
-            <a:r>
-              <a:t>• Calculates BEE PAT ESCerts for IEX exchange trading.</a:t>
-            </a:r>
-          </a:p>
-        </p:txBody>
-      </p:sp>
+        </p:spPr>
+      </p:pic>
     </p:spTree>
   </p:cSld>
   <p:clrMapOvr>
@@ -6186,7 +6588,7 @@
     <p:bg>
       <p:bgPr>
         <a:solidFill>
-          <a:srgbClr val="0A0E14"/>
+          <a:srgbClr val="FFFFFF"/>
         </a:solidFill>
         <a:effectLst/>
       </p:bgPr>
@@ -6200,95 +6602,23 @@
       <p:grpSpPr/>
       <p:sp>
         <p:nvSpPr>
-          <p:cNvPr id="2" name="TextBox 1"/>
-          <p:cNvSpPr txBox="1"/>
-          <p:nvPr/>
-        </p:nvSpPr>
-        <p:spPr>
-          <a:xfrm>
-            <a:off x="731520" y="365760"/>
-            <a:ext cx="10698480" cy="365760"/>
-          </a:xfrm>
-          <a:prstGeom prst="rect">
-            <a:avLst/>
-          </a:prstGeom>
-          <a:noFill/>
-        </p:spPr>
-        <p:txBody>
-          <a:bodyPr wrap="square">
-            <a:spAutoFit/>
-          </a:bodyPr>
-          <a:lstStyle/>
-          <a:p>
-            <a:pPr>
-              <a:defRPr sz="1100" b="1">
-                <a:solidFill>
-                  <a:srgbClr val="3DCD58"/>
-                </a:solidFill>
-              </a:defRPr>
-            </a:pPr>
-            <a:r>
-              <a:t>SCHNEIDER ELECTRIC YUVA YODHA 2026 • CHALLENGE 4: SMART MANUFACTURING</a:t>
-            </a:r>
-          </a:p>
-        </p:txBody>
-      </p:sp>
-      <p:sp>
-        <p:nvSpPr>
-          <p:cNvPr id="3" name="TextBox 2"/>
-          <p:cNvSpPr txBox="1"/>
-          <p:nvPr/>
-        </p:nvSpPr>
-        <p:spPr>
-          <a:xfrm>
-            <a:off x="731520" y="640080"/>
-            <a:ext cx="10698480" cy="731520"/>
-          </a:xfrm>
-          <a:prstGeom prst="rect">
-            <a:avLst/>
-          </a:prstGeom>
-          <a:noFill/>
-        </p:spPr>
-        <p:txBody>
-          <a:bodyPr wrap="square">
-            <a:spAutoFit/>
-          </a:bodyPr>
-          <a:lstStyle/>
-          <a:p>
-            <a:pPr>
-              <a:defRPr sz="2400" b="1">
-                <a:solidFill>
-                  <a:srgbClr val="F1F5F9"/>
-                </a:solidFill>
-              </a:defRPr>
-            </a:pPr>
-            <a:r>
-              <a:t>Operator User Journey: Synchronized Melting from Scrap to Ingot</a:t>
-            </a:r>
-          </a:p>
-        </p:txBody>
-      </p:sp>
-      <p:sp>
-        <p:nvSpPr>
-          <p:cNvPr id="4" name="Rounded Rectangle 3"/>
+          <p:cNvPr id="2" name="Rectangle 1"/>
           <p:cNvSpPr/>
           <p:nvPr/>
         </p:nvSpPr>
         <p:spPr>
           <a:xfrm>
-            <a:off x="731520" y="1645920"/>
-            <a:ext cx="2468880" cy="4572000"/>
-          </a:xfrm>
-          <a:prstGeom prst="roundRect">
+            <a:off x="0" y="0"/>
+            <a:ext cx="12191695" cy="109728"/>
+          </a:xfrm>
+          <a:prstGeom prst="rect">
             <a:avLst/>
           </a:prstGeom>
           <a:solidFill>
-            <a:srgbClr val="111722"/>
+            <a:srgbClr val="009530"/>
           </a:solidFill>
-          <a:ln w="19050">
-            <a:solidFill>
-              <a:srgbClr val="3DCD58"/>
-            </a:solidFill>
+          <a:ln>
+            <a:noFill/>
           </a:ln>
         </p:spPr>
         <p:style>
@@ -6315,14 +6645,14 @@
       </p:sp>
       <p:sp>
         <p:nvSpPr>
-          <p:cNvPr id="5" name="TextBox 4"/>
+          <p:cNvPr id="3" name="TextBox 2"/>
           <p:cNvSpPr txBox="1"/>
           <p:nvPr/>
         </p:nvSpPr>
         <p:spPr>
           <a:xfrm>
-            <a:off x="914400" y="1828800"/>
-            <a:ext cx="2103120" cy="4206240"/>
+            <a:off x="731520" y="320040"/>
+            <a:ext cx="10698480" cy="320040"/>
           </a:xfrm>
           <a:prstGeom prst="rect">
             <a:avLst/>
@@ -6336,83 +6666,73 @@
           <a:lstStyle/>
           <a:p>
             <a:pPr>
-              <a:defRPr sz="1600" b="1">
-                <a:solidFill>
-                  <a:srgbClr val="F1F5F9"/>
-                </a:solidFill>
-              </a:defRPr>
-            </a:pPr>
-            <a:r>
-              <a:t>Phase 1: Charge &amp; Ramp</a:t>
-            </a:r>
-          </a:p>
-          <a:p>
-            <a:pPr>
-              <a:spcBef>
-                <a:spcPts val="600"/>
-              </a:spcBef>
-              <a:defRPr sz="1200">
-                <a:solidFill>
-                  <a:srgbClr val="94A3B8"/>
-                </a:solidFill>
-              </a:defRPr>
-            </a:pPr>
-            <a:r>
-              <a:t>• 1.5 MT scrap loaded.</a:t>
-            </a:r>
-          </a:p>
-          <a:p>
-            <a:pPr>
-              <a:spcBef>
-                <a:spcPts val="600"/>
-              </a:spcBef>
-              <a:defRPr sz="1200">
-                <a:solidFill>
-                  <a:srgbClr val="94A3B8"/>
-                </a:solidFill>
-              </a:defRPr>
-            </a:pPr>
-            <a:r>
-              <a:t>• AI recommends 3-stage power ramp setpoint (720 kW -&gt; 520 kW -&gt; 640 kW).</a:t>
-            </a:r>
-          </a:p>
-          <a:p>
-            <a:pPr>
-              <a:spcBef>
-                <a:spcPts val="600"/>
-              </a:spcBef>
-              <a:defRPr sz="1200">
-                <a:solidFill>
-                  <a:srgbClr val="94A3B8"/>
-                </a:solidFill>
-              </a:defRPr>
-            </a:pPr>
-            <a:r>
-              <a:t>• Minimizes peak demand charges and refractory thermal shock.</a:t>
-            </a:r>
-          </a:p>
-        </p:txBody>
-      </p:sp>
-      <p:sp>
-        <p:nvSpPr>
-          <p:cNvPr id="6" name="Rounded Rectangle 5"/>
+              <a:defRPr sz="1100" b="1">
+                <a:solidFill>
+                  <a:srgbClr val="009530"/>
+                </a:solidFill>
+              </a:defRPr>
+            </a:pPr>
+            <a:r>
+              <a:t>SCHNEIDER ELECTRIC YUVA YODHA 2026 • CHALLENGE 4: SMART MANUFACTURING</a:t>
+            </a:r>
+          </a:p>
+        </p:txBody>
+      </p:sp>
+      <p:sp>
+        <p:nvSpPr>
+          <p:cNvPr id="4" name="TextBox 3"/>
+          <p:cNvSpPr txBox="1"/>
+          <p:nvPr/>
+        </p:nvSpPr>
+        <p:spPr>
+          <a:xfrm>
+            <a:off x="731520" y="594360"/>
+            <a:ext cx="10698480" cy="685800"/>
+          </a:xfrm>
+          <a:prstGeom prst="rect">
+            <a:avLst/>
+          </a:prstGeom>
+          <a:noFill/>
+        </p:spPr>
+        <p:txBody>
+          <a:bodyPr wrap="square">
+            <a:spAutoFit/>
+          </a:bodyPr>
+          <a:lstStyle/>
+          <a:p>
+            <a:pPr>
+              <a:defRPr sz="2200" b="1">
+                <a:solidFill>
+                  <a:srgbClr val="0F172A"/>
+                </a:solidFill>
+              </a:defRPr>
+            </a:pPr>
+            <a:r>
+              <a:t>Technical Approach: Thermodynamics &amp; Tariff-Synchronized Melting</a:t>
+            </a:r>
+          </a:p>
+        </p:txBody>
+      </p:sp>
+      <p:sp>
+        <p:nvSpPr>
+          <p:cNvPr id="5" name="Rounded Rectangle 4"/>
           <p:cNvSpPr/>
           <p:nvPr/>
         </p:nvSpPr>
         <p:spPr>
           <a:xfrm>
-            <a:off x="3474720" y="1645920"/>
-            <a:ext cx="2468880" cy="4572000"/>
+            <a:off x="731520" y="1463040"/>
+            <a:ext cx="4937760" cy="4846320"/>
           </a:xfrm>
           <a:prstGeom prst="roundRect">
             <a:avLst/>
           </a:prstGeom>
           <a:solidFill>
-            <a:srgbClr val="111722"/>
+            <a:srgbClr val="F8FAFC"/>
           </a:solidFill>
           <a:ln w="19050">
             <a:solidFill>
-              <a:srgbClr val="3DCD58"/>
+              <a:srgbClr val="009530"/>
             </a:solidFill>
           </a:ln>
         </p:spPr>
@@ -6440,14 +6760,14 @@
       </p:sp>
       <p:sp>
         <p:nvSpPr>
-          <p:cNvPr id="7" name="TextBox 6"/>
+          <p:cNvPr id="6" name="TextBox 5"/>
           <p:cNvSpPr txBox="1"/>
           <p:nvPr/>
         </p:nvSpPr>
         <p:spPr>
           <a:xfrm>
-            <a:off x="3657600" y="1828800"/>
-            <a:ext cx="2103120" cy="4206240"/>
+            <a:off x="960120" y="1645920"/>
+            <a:ext cx="4480560" cy="4480560"/>
           </a:xfrm>
           <a:prstGeom prst="rect">
             <a:avLst/>
@@ -6461,313 +6781,117 @@
           <a:lstStyle/>
           <a:p>
             <a:pPr>
-              <a:defRPr sz="1600" b="1">
-                <a:solidFill>
-                  <a:srgbClr val="F1F5F9"/>
-                </a:solidFill>
-              </a:defRPr>
-            </a:pPr>
-            <a:r>
-              <a:t>Phase 2: Radiation Guard</a:t>
-            </a:r>
-          </a:p>
-          <a:p>
-            <a:pPr>
-              <a:spcBef>
-                <a:spcPts val="600"/>
-              </a:spcBef>
-              <a:defRPr sz="1200">
-                <a:solidFill>
-                  <a:srgbClr val="94A3B8"/>
-                </a:solidFill>
-              </a:defRPr>
-            </a:pPr>
-            <a:r>
-              <a:t>• Bath temperature exceeds 1000°C.</a:t>
-            </a:r>
-          </a:p>
-          <a:p>
-            <a:pPr>
-              <a:spcBef>
-                <a:spcPts val="600"/>
-              </a:spcBef>
-              <a:defRPr sz="1200">
-                <a:solidFill>
-                  <a:srgbClr val="94A3B8"/>
-                </a:solidFill>
-              </a:defRPr>
-            </a:pPr>
-            <a:r>
-              <a:t>• System alerts if insulated lid is open.</a:t>
-            </a:r>
-          </a:p>
-          <a:p>
-            <a:pPr>
-              <a:spcBef>
-                <a:spcPts val="600"/>
-              </a:spcBef>
-              <a:defRPr sz="1200">
-                <a:solidFill>
-                  <a:srgbClr val="94A3B8"/>
-                </a:solidFill>
-              </a:defRPr>
-            </a:pPr>
-            <a:r>
-              <a:t>• Preserves 32.7 kWh radiation energy per heat cycle.</a:t>
-            </a:r>
-          </a:p>
-        </p:txBody>
-      </p:sp>
-      <p:sp>
-        <p:nvSpPr>
-          <p:cNvPr id="8" name="Rounded Rectangle 7"/>
-          <p:cNvSpPr/>
+              <a:defRPr sz="1500" b="1">
+                <a:solidFill>
+                  <a:srgbClr val="0F172A"/>
+                </a:solidFill>
+              </a:defRPr>
+            </a:pPr>
+            <a:r>
+              <a:t>Physics-Informed Optimization</a:t>
+            </a:r>
+          </a:p>
+          <a:p>
+            <a:pPr>
+              <a:spcBef>
+                <a:spcPts val="200"/>
+              </a:spcBef>
+              <a:defRPr sz="1000" b="1">
+                <a:solidFill>
+                  <a:srgbClr val="009530"/>
+                </a:solidFill>
+              </a:defRPr>
+            </a:pPr>
+            <a:r>
+              <a:t>PHYSICS + AI HYBRID ENGINE</a:t>
+            </a:r>
+          </a:p>
+          <a:p>
+            <a:pPr>
+              <a:spcBef>
+                <a:spcPts val="500"/>
+              </a:spcBef>
+              <a:defRPr sz="1100">
+                <a:solidFill>
+                  <a:srgbClr val="475569"/>
+                </a:solidFill>
+              </a:defRPr>
+            </a:pPr>
+            <a:r>
+              <a:t>•  Sensible &amp; Latent Heat Physics: Accurately models specific heat capacity (Cp = 0.68 kJ/kg·K) and latent heat of fusion (270 kJ/kg for scrap iron).</a:t>
+            </a:r>
+          </a:p>
+          <a:p>
+            <a:pPr>
+              <a:spcBef>
+                <a:spcPts val="500"/>
+              </a:spcBef>
+              <a:defRPr sz="1100">
+                <a:solidFill>
+                  <a:srgbClr val="475569"/>
+                </a:solidFill>
+              </a:defRPr>
+            </a:pPr>
+            <a:r>
+              <a:t>•  Radiation Loss Formula: Calculates Stefan-Boltzmann heat escape (Q = ε·σ·A·T⁴) when the furnace cover remains open at 1500°C.</a:t>
+            </a:r>
+          </a:p>
+          <a:p>
+            <a:pPr>
+              <a:spcBef>
+                <a:spcPts val="500"/>
+              </a:spcBef>
+              <a:defRPr sz="1100">
+                <a:solidFill>
+                  <a:srgbClr val="475569"/>
+                </a:solidFill>
+              </a:defRPr>
+            </a:pPr>
+            <a:r>
+              <a:t>•  MSEDCL Time-of-Use Shift: Shifting batch start times from evening peak (18:00–22:00, +₹1.50/kWh penalty) to night off-peak (22:00–06:00, -₹1.50/kWh rebate) saves ₹3,750 per single heat!</a:t>
+            </a:r>
+          </a:p>
+          <a:p>
+            <a:pPr>
+              <a:spcBef>
+                <a:spcPts val="500"/>
+              </a:spcBef>
+              <a:defRPr sz="1100">
+                <a:solidFill>
+                  <a:srgbClr val="475569"/>
+                </a:solidFill>
+              </a:defRPr>
+            </a:pPr>
+            <a:r>
+              <a:t>•  Predictive AI Models: Scikit-learn Random Forest &amp; Gradient Boosting regressors predict exact minutes to tap within ±2.5 min.</a:t>
+            </a:r>
+          </a:p>
+        </p:txBody>
+      </p:sp>
+      <p:pic>
+        <p:nvPicPr>
+          <p:cNvPr id="7" name="Picture 6" descr="fig4_tou_holding_chart.png"/>
+          <p:cNvPicPr>
+            <a:picLocks noChangeAspect="1"/>
+          </p:cNvPicPr>
           <p:nvPr/>
-        </p:nvSpPr>
-        <p:spPr>
-          <a:xfrm>
-            <a:off x="6217920" y="1645920"/>
-            <a:ext cx="2468880" cy="4572000"/>
-          </a:xfrm>
-          <a:prstGeom prst="roundRect">
-            <a:avLst/>
-          </a:prstGeom>
-          <a:solidFill>
-            <a:srgbClr val="111722"/>
-          </a:solidFill>
-          <a:ln w="19050">
-            <a:solidFill>
-              <a:srgbClr val="F59E0B"/>
-            </a:solidFill>
-          </a:ln>
-        </p:spPr>
-        <p:style>
-          <a:lnRef idx="1">
-            <a:schemeClr val="accent1"/>
-          </a:lnRef>
-          <a:fillRef idx="3">
-            <a:schemeClr val="accent1"/>
-          </a:fillRef>
-          <a:effectRef idx="2">
-            <a:schemeClr val="accent1"/>
-          </a:effectRef>
-          <a:fontRef idx="minor">
-            <a:schemeClr val="lt1"/>
-          </a:fontRef>
-        </p:style>
-        <p:txBody>
-          <a:bodyPr rtlCol="0" anchor="ctr"/>
-          <a:lstStyle/>
-          <a:p>
-            <a:pPr algn="ctr"/>
-          </a:p>
-        </p:txBody>
-      </p:sp>
-      <p:sp>
-        <p:nvSpPr>
-          <p:cNvPr id="9" name="TextBox 8"/>
-          <p:cNvSpPr txBox="1"/>
-          <p:nvPr/>
-        </p:nvSpPr>
-        <p:spPr>
-          <a:xfrm>
-            <a:off x="6400800" y="1828800"/>
-            <a:ext cx="2103120" cy="4206240"/>
+        </p:nvPicPr>
+        <p:blipFill>
+          <a:blip r:embed="rId2"/>
+          <a:stretch>
+            <a:fillRect/>
+          </a:stretch>
+        </p:blipFill>
+        <p:spPr>
+          <a:xfrm>
+            <a:off x="5943600" y="1463040"/>
+            <a:ext cx="5486400" cy="4846320"/>
           </a:xfrm>
           <a:prstGeom prst="rect">
             <a:avLst/>
           </a:prstGeom>
-          <a:noFill/>
-        </p:spPr>
-        <p:txBody>
-          <a:bodyPr wrap="square">
-            <a:spAutoFit/>
-          </a:bodyPr>
-          <a:lstStyle/>
-          <a:p>
-            <a:pPr>
-              <a:defRPr sz="1600" b="1">
-                <a:solidFill>
-                  <a:srgbClr val="F1F5F9"/>
-                </a:solidFill>
-              </a:defRPr>
-            </a:pPr>
-            <a:r>
-              <a:t>Phase 3: Holding Guard</a:t>
-            </a:r>
-          </a:p>
-          <a:p>
-            <a:pPr>
-              <a:spcBef>
-                <a:spcPts val="600"/>
-              </a:spcBef>
-              <a:defRPr sz="1200">
-                <a:solidFill>
-                  <a:srgbClr val="94A3B8"/>
-                </a:solidFill>
-              </a:defRPr>
-            </a:pPr>
-            <a:r>
-              <a:t>• Bath hits 1520°C tapping temp.</a:t>
-            </a:r>
-          </a:p>
-          <a:p>
-            <a:pPr>
-              <a:spcBef>
-                <a:spcPts val="600"/>
-              </a:spcBef>
-              <a:defRPr sz="1200">
-                <a:solidFill>
-                  <a:srgbClr val="94A3B8"/>
-                </a:solidFill>
-              </a:defRPr>
-            </a:pPr>
-            <a:r>
-              <a:t>• If crane is delayed, red alarm flashes.</a:t>
-            </a:r>
-          </a:p>
-          <a:p>
-            <a:pPr>
-              <a:spcBef>
-                <a:spcPts val="600"/>
-              </a:spcBef>
-              <a:defRPr sz="1200">
-                <a:solidFill>
-                  <a:srgbClr val="94A3B8"/>
-                </a:solidFill>
-              </a:defRPr>
-            </a:pPr>
-            <a:r>
-              <a:t>• Live burn rate ticker (₹22.5/min) prompts crew to pour or ramp down.</a:t>
-            </a:r>
-          </a:p>
-        </p:txBody>
-      </p:sp>
-      <p:sp>
-        <p:nvSpPr>
-          <p:cNvPr id="10" name="Rounded Rectangle 9"/>
-          <p:cNvSpPr/>
-          <p:nvPr/>
-        </p:nvSpPr>
-        <p:spPr>
-          <a:xfrm>
-            <a:off x="8961120" y="1645920"/>
-            <a:ext cx="2468880" cy="4572000"/>
-          </a:xfrm>
-          <a:prstGeom prst="roundRect">
-            <a:avLst/>
-          </a:prstGeom>
-          <a:solidFill>
-            <a:srgbClr val="111722"/>
-          </a:solidFill>
-          <a:ln w="19050">
-            <a:solidFill>
-              <a:srgbClr val="3DCD58"/>
-            </a:solidFill>
-          </a:ln>
-        </p:spPr>
-        <p:style>
-          <a:lnRef idx="1">
-            <a:schemeClr val="accent1"/>
-          </a:lnRef>
-          <a:fillRef idx="3">
-            <a:schemeClr val="accent1"/>
-          </a:fillRef>
-          <a:effectRef idx="2">
-            <a:schemeClr val="accent1"/>
-          </a:effectRef>
-          <a:fontRef idx="minor">
-            <a:schemeClr val="lt1"/>
-          </a:fontRef>
-        </p:style>
-        <p:txBody>
-          <a:bodyPr rtlCol="0" anchor="ctr"/>
-          <a:lstStyle/>
-          <a:p>
-            <a:pPr algn="ctr"/>
-          </a:p>
-        </p:txBody>
-      </p:sp>
-      <p:sp>
-        <p:nvSpPr>
-          <p:cNvPr id="11" name="TextBox 10"/>
-          <p:cNvSpPr txBox="1"/>
-          <p:nvPr/>
-        </p:nvSpPr>
-        <p:spPr>
-          <a:xfrm>
-            <a:off x="9144000" y="1828800"/>
-            <a:ext cx="2103120" cy="4206240"/>
-          </a:xfrm>
-          <a:prstGeom prst="rect">
-            <a:avLst/>
-          </a:prstGeom>
-          <a:noFill/>
-        </p:spPr>
-        <p:txBody>
-          <a:bodyPr wrap="square">
-            <a:spAutoFit/>
-          </a:bodyPr>
-          <a:lstStyle/>
-          <a:p>
-            <a:pPr>
-              <a:defRPr sz="1600" b="1">
-                <a:solidFill>
-                  <a:srgbClr val="F1F5F9"/>
-                </a:solidFill>
-              </a:defRPr>
-            </a:pPr>
-            <a:r>
-              <a:t>Phase 4: Tap &amp; Certify</a:t>
-            </a:r>
-          </a:p>
-          <a:p>
-            <a:pPr>
-              <a:spcBef>
-                <a:spcPts val="600"/>
-              </a:spcBef>
-              <a:defRPr sz="1200">
-                <a:solidFill>
-                  <a:srgbClr val="94A3B8"/>
-                </a:solidFill>
-              </a:defRPr>
-            </a:pPr>
-            <a:r>
-              <a:t>• Crucible tilts and pours.</a:t>
-            </a:r>
-          </a:p>
-          <a:p>
-            <a:pPr>
-              <a:spcBef>
-                <a:spcPts val="600"/>
-              </a:spcBef>
-              <a:defRPr sz="1200">
-                <a:solidFill>
-                  <a:srgbClr val="94A3B8"/>
-                </a:solidFill>
-              </a:defRPr>
-            </a:pPr>
-            <a:r>
-              <a:t>• Digital weighbridge logs net tonnage.</a:t>
-            </a:r>
-          </a:p>
-          <a:p>
-            <a:pPr>
-              <a:spcBef>
-                <a:spcPts val="600"/>
-              </a:spcBef>
-              <a:defRPr sz="1200">
-                <a:solidFill>
-                  <a:srgbClr val="94A3B8"/>
-                </a:solidFill>
-              </a:defRPr>
-            </a:pPr>
-            <a:r>
-              <a:t>• Form CA-26 PDF/CSV certificate auto-generated with SHA-256 seal.</a:t>
-            </a:r>
-          </a:p>
-        </p:txBody>
-      </p:sp>
+        </p:spPr>
+      </p:pic>
     </p:spTree>
   </p:cSld>
   <p:clrMapOvr>
@@ -6782,7 +6906,7 @@
     <p:bg>
       <p:bgPr>
         <a:solidFill>
-          <a:srgbClr val="0A0E14"/>
+          <a:srgbClr val="FFFFFF"/>
         </a:solidFill>
         <a:effectLst/>
       </p:bgPr>
@@ -6796,95 +6920,23 @@
       <p:grpSpPr/>
       <p:sp>
         <p:nvSpPr>
-          <p:cNvPr id="2" name="TextBox 1"/>
-          <p:cNvSpPr txBox="1"/>
-          <p:nvPr/>
-        </p:nvSpPr>
-        <p:spPr>
-          <a:xfrm>
-            <a:off x="731520" y="365760"/>
-            <a:ext cx="10698480" cy="365760"/>
-          </a:xfrm>
-          <a:prstGeom prst="rect">
-            <a:avLst/>
-          </a:prstGeom>
-          <a:noFill/>
-        </p:spPr>
-        <p:txBody>
-          <a:bodyPr wrap="square">
-            <a:spAutoFit/>
-          </a:bodyPr>
-          <a:lstStyle/>
-          <a:p>
-            <a:pPr>
-              <a:defRPr sz="1100" b="1">
-                <a:solidFill>
-                  <a:srgbClr val="3DCD58"/>
-                </a:solidFill>
-              </a:defRPr>
-            </a:pPr>
-            <a:r>
-              <a:t>SCHNEIDER ELECTRIC YUVA YODHA 2026 • CHALLENGE 4: SMART MANUFACTURING</a:t>
-            </a:r>
-          </a:p>
-        </p:txBody>
-      </p:sp>
-      <p:sp>
-        <p:nvSpPr>
-          <p:cNvPr id="3" name="TextBox 2"/>
-          <p:cNvSpPr txBox="1"/>
-          <p:nvPr/>
-        </p:nvSpPr>
-        <p:spPr>
-          <a:xfrm>
-            <a:off x="731520" y="640080"/>
-            <a:ext cx="10698480" cy="731520"/>
-          </a:xfrm>
-          <a:prstGeom prst="rect">
-            <a:avLst/>
-          </a:prstGeom>
-          <a:noFill/>
-        </p:spPr>
-        <p:txBody>
-          <a:bodyPr wrap="square">
-            <a:spAutoFit/>
-          </a:bodyPr>
-          <a:lstStyle/>
-          <a:p>
-            <a:pPr>
-              <a:defRPr sz="2400" b="1">
-                <a:solidFill>
-                  <a:srgbClr val="F1F5F9"/>
-                </a:solidFill>
-              </a:defRPr>
-            </a:pPr>
-            <a:r>
-              <a:t>Technical Architecture: Edge-Native Industrial IoT Pipeline</a:t>
-            </a:r>
-          </a:p>
-        </p:txBody>
-      </p:sp>
-      <p:sp>
-        <p:nvSpPr>
-          <p:cNvPr id="4" name="Rounded Rectangle 3"/>
+          <p:cNvPr id="2" name="Rectangle 1"/>
           <p:cNvSpPr/>
           <p:nvPr/>
         </p:nvSpPr>
         <p:spPr>
           <a:xfrm>
-            <a:off x="731520" y="1645920"/>
-            <a:ext cx="5120640" cy="4572000"/>
-          </a:xfrm>
-          <a:prstGeom prst="roundRect">
+            <a:off x="0" y="0"/>
+            <a:ext cx="12191695" cy="109728"/>
+          </a:xfrm>
+          <a:prstGeom prst="rect">
             <a:avLst/>
           </a:prstGeom>
           <a:solidFill>
-            <a:srgbClr val="111722"/>
+            <a:srgbClr val="009530"/>
           </a:solidFill>
-          <a:ln w="19050">
-            <a:solidFill>
-              <a:srgbClr val="3DCD58"/>
-            </a:solidFill>
+          <a:ln>
+            <a:noFill/>
           </a:ln>
         </p:spPr>
         <p:style>
@@ -6911,14 +6963,14 @@
       </p:sp>
       <p:sp>
         <p:nvSpPr>
-          <p:cNvPr id="5" name="TextBox 4"/>
+          <p:cNvPr id="3" name="TextBox 2"/>
           <p:cNvSpPr txBox="1"/>
           <p:nvPr/>
         </p:nvSpPr>
         <p:spPr>
           <a:xfrm>
-            <a:off x="914400" y="1828800"/>
-            <a:ext cx="4754880" cy="4206240"/>
+            <a:off x="731520" y="320040"/>
+            <a:ext cx="10698480" cy="320040"/>
           </a:xfrm>
           <a:prstGeom prst="rect">
             <a:avLst/>
@@ -6932,98 +6984,73 @@
           <a:lstStyle/>
           <a:p>
             <a:pPr>
-              <a:defRPr sz="1600" b="1">
-                <a:solidFill>
-                  <a:srgbClr val="F1F5F9"/>
-                </a:solidFill>
-              </a:defRPr>
-            </a:pPr>
-            <a:r>
-              <a:t>Hardware &amp; Edge Ingestion</a:t>
-            </a:r>
-          </a:p>
-          <a:p>
-            <a:pPr>
-              <a:spcBef>
-                <a:spcPts val="600"/>
-              </a:spcBef>
-              <a:defRPr sz="1200">
-                <a:solidFill>
-                  <a:srgbClr val="94A3B8"/>
-                </a:solidFill>
-              </a:defRPr>
-            </a:pPr>
-            <a:r>
-              <a:t>• Schneider EasyLogic™ PM5350 / PowerLogic™ ION meters connected via Modbus-TCP (Port 502).</a:t>
-            </a:r>
-          </a:p>
-          <a:p>
-            <a:pPr>
-              <a:spcBef>
-                <a:spcPts val="600"/>
-              </a:spcBef>
-              <a:defRPr sz="1200">
-                <a:solidFill>
-                  <a:srgbClr val="94A3B8"/>
-                </a:solidFill>
-              </a:defRPr>
-            </a:pPr>
-            <a:r>
-              <a:t>• Ingests active power (kW), reactive power (kVAR), power factor, and voltage.</a:t>
-            </a:r>
-          </a:p>
-          <a:p>
-            <a:pPr>
-              <a:spcBef>
-                <a:spcPts val="600"/>
-              </a:spcBef>
-              <a:defRPr sz="1200">
-                <a:solidFill>
-                  <a:srgbClr val="94A3B8"/>
-                </a:solidFill>
-              </a:defRPr>
-            </a:pPr>
-            <a:r>
-              <a:t>• Optical infrared pyrometer feeding 4–20 mA melt bath temperature.</a:t>
-            </a:r>
-          </a:p>
-          <a:p>
-            <a:pPr>
-              <a:spcBef>
-                <a:spcPts val="600"/>
-              </a:spcBef>
-              <a:defRPr sz="1200">
-                <a:solidFill>
-                  <a:srgbClr val="94A3B8"/>
-                </a:solidFill>
-              </a:defRPr>
-            </a:pPr>
-            <a:r>
-              <a:t>• Runs on edge hardware: Raspberry Pi 4/5, Schneider Harmony iPC, or standard industrial PC.</a:t>
-            </a:r>
-          </a:p>
-        </p:txBody>
-      </p:sp>
-      <p:sp>
-        <p:nvSpPr>
-          <p:cNvPr id="6" name="Rounded Rectangle 5"/>
+              <a:defRPr sz="1100" b="1">
+                <a:solidFill>
+                  <a:srgbClr val="009530"/>
+                </a:solidFill>
+              </a:defRPr>
+            </a:pPr>
+            <a:r>
+              <a:t>SCHNEIDER ELECTRIC YUVA YODHA 2026 • CHALLENGE 4: SMART MANUFACTURING</a:t>
+            </a:r>
+          </a:p>
+        </p:txBody>
+      </p:sp>
+      <p:sp>
+        <p:nvSpPr>
+          <p:cNvPr id="4" name="TextBox 3"/>
+          <p:cNvSpPr txBox="1"/>
+          <p:nvPr/>
+        </p:nvSpPr>
+        <p:spPr>
+          <a:xfrm>
+            <a:off x="731520" y="594360"/>
+            <a:ext cx="10698480" cy="685800"/>
+          </a:xfrm>
+          <a:prstGeom prst="rect">
+            <a:avLst/>
+          </a:prstGeom>
+          <a:noFill/>
+        </p:spPr>
+        <p:txBody>
+          <a:bodyPr wrap="square">
+            <a:spAutoFit/>
+          </a:bodyPr>
+          <a:lstStyle/>
+          <a:p>
+            <a:pPr>
+              <a:defRPr sz="2200" b="1">
+                <a:solidFill>
+                  <a:srgbClr val="0F172A"/>
+                </a:solidFill>
+              </a:defRPr>
+            </a:pPr>
+            <a:r>
+              <a:t>Strategic Fit: Extending EcoStruxure to 5,000+ MSME Foundries</a:t>
+            </a:r>
+          </a:p>
+        </p:txBody>
+      </p:sp>
+      <p:sp>
+        <p:nvSpPr>
+          <p:cNvPr id="5" name="Rounded Rectangle 4"/>
           <p:cNvSpPr/>
           <p:nvPr/>
         </p:nvSpPr>
         <p:spPr>
           <a:xfrm>
-            <a:off x="6217920" y="1645920"/>
-            <a:ext cx="5120640" cy="4572000"/>
+            <a:off x="731520" y="1463040"/>
+            <a:ext cx="5212080" cy="4846320"/>
           </a:xfrm>
           <a:prstGeom prst="roundRect">
             <a:avLst/>
           </a:prstGeom>
           <a:solidFill>
-            <a:srgbClr val="111722"/>
+            <a:srgbClr val="F8FAFC"/>
           </a:solidFill>
           <a:ln w="19050">
             <a:solidFill>
-              <a:srgbClr val="38BDF8"/>
+              <a:srgbClr val="E2E8F0"/>
             </a:solidFill>
           </a:ln>
         </p:spPr>
@@ -7051,14 +7078,14 @@
       </p:sp>
       <p:sp>
         <p:nvSpPr>
-          <p:cNvPr id="7" name="TextBox 6"/>
+          <p:cNvPr id="6" name="TextBox 5"/>
           <p:cNvSpPr txBox="1"/>
           <p:nvPr/>
         </p:nvSpPr>
         <p:spPr>
           <a:xfrm>
-            <a:off x="6400800" y="1828800"/>
-            <a:ext cx="4754880" cy="4206240"/>
+            <a:off x="960120" y="1645920"/>
+            <a:ext cx="4754880" cy="4480560"/>
           </a:xfrm>
           <a:prstGeom prst="rect">
             <a:avLst/>
@@ -7072,74 +7099,244 @@
           <a:lstStyle/>
           <a:p>
             <a:pPr>
-              <a:defRPr sz="1600" b="1">
-                <a:solidFill>
-                  <a:srgbClr val="F1F5F9"/>
-                </a:solidFill>
-              </a:defRPr>
-            </a:pPr>
-            <a:r>
-              <a:t>Backend Engine &amp; WebSockets</a:t>
-            </a:r>
-          </a:p>
-          <a:p>
-            <a:pPr>
-              <a:spcBef>
-                <a:spcPts val="600"/>
-              </a:spcBef>
-              <a:defRPr sz="1200">
-                <a:solidFill>
-                  <a:srgbClr val="94A3B8"/>
-                </a:solidFill>
-              </a:defRPr>
-            </a:pPr>
-            <a:r>
-              <a:t>• FastAPI (Python 3.13) asynchronous gateway.</a:t>
-            </a:r>
-          </a:p>
-          <a:p>
-            <a:pPr>
-              <a:spcBef>
-                <a:spcPts val="600"/>
-              </a:spcBef>
-              <a:defRPr sz="1200">
-                <a:solidFill>
-                  <a:srgbClr val="94A3B8"/>
-                </a:solidFill>
-              </a:defRPr>
-            </a:pPr>
-            <a:r>
-              <a:t>• WebSockets streaming 1 Hz real-time telemetry packets (/ws/telemetry).</a:t>
-            </a:r>
-          </a:p>
-          <a:p>
-            <a:pPr>
-              <a:spcBef>
-                <a:spcPts val="600"/>
-              </a:spcBef>
-              <a:defRPr sz="1200">
-                <a:solidFill>
-                  <a:srgbClr val="94A3B8"/>
-                </a:solidFill>
-              </a:defRPr>
-            </a:pPr>
-            <a:r>
-              <a:t>• Thermodynamic physics simulator modeling latent heat of fusion (270 kJ/kg) and convective/radiation losses.</a:t>
-            </a:r>
-          </a:p>
-          <a:p>
-            <a:pPr>
-              <a:spcBef>
-                <a:spcPts val="600"/>
-              </a:spcBef>
-              <a:defRPr sz="1200">
-                <a:solidFill>
-                  <a:srgbClr val="94A3B8"/>
-                </a:solidFill>
-              </a:defRPr>
-            </a:pPr>
-            <a:r>
-              <a:t>• ReportLab vector engine generating digitally stamped PDF audit certificates.</a:t>
+              <a:defRPr sz="1500" b="1">
+                <a:solidFill>
+                  <a:srgbClr val="0F172A"/>
+                </a:solidFill>
+              </a:defRPr>
+            </a:pPr>
+            <a:r>
+              <a:t>The Enterprise vs MSME Market Gap</a:t>
+            </a:r>
+          </a:p>
+          <a:p>
+            <a:pPr>
+              <a:spcBef>
+                <a:spcPts val="200"/>
+              </a:spcBef>
+              <a:defRPr sz="1000" b="1">
+                <a:solidFill>
+                  <a:srgbClr val="009530"/>
+                </a:solidFill>
+              </a:defRPr>
+            </a:pPr>
+            <a:r>
+              <a:t>MARKET EXPANSION OPPORTUNITY</a:t>
+            </a:r>
+          </a:p>
+          <a:p>
+            <a:pPr>
+              <a:spcBef>
+                <a:spcPts val="500"/>
+              </a:spcBef>
+              <a:defRPr sz="1100">
+                <a:solidFill>
+                  <a:srgbClr val="475569"/>
+                </a:solidFill>
+              </a:defRPr>
+            </a:pPr>
+            <a:r>
+              <a:t>•  Schneider's Existing Portfolio: EcoStruxure™ Power &amp; Process provides world-class energy monitoring for enterprise steel mills and large automotive plants.</a:t>
+            </a:r>
+          </a:p>
+          <a:p>
+            <a:pPr>
+              <a:spcBef>
+                <a:spcPts val="500"/>
+              </a:spcBef>
+              <a:defRPr sz="1100">
+                <a:solidFill>
+                  <a:srgbClr val="475569"/>
+                </a:solidFill>
+              </a:defRPr>
+            </a:pPr>
+            <a:r>
+              <a:t>•  The Untapped MSME Segment: India's 5,000+ MSME foundries cannot afford multi-crore enterprise SCADA deployments, yet consume massive high-tension power.</a:t>
+            </a:r>
+          </a:p>
+          <a:p>
+            <a:pPr>
+              <a:spcBef>
+                <a:spcPts val="500"/>
+              </a:spcBef>
+              <a:defRPr sz="1100">
+                <a:solidFill>
+                  <a:srgbClr val="475569"/>
+                </a:solidFill>
+              </a:defRPr>
+            </a:pPr>
+            <a:r>
+              <a:t>•  Critical Need: Lightweight, non-invasive digital intelligence that delivers immediate, proven payback without replacing physical switchgear.</a:t>
+            </a:r>
+          </a:p>
+          <a:p>
+            <a:pPr>
+              <a:spcBef>
+                <a:spcPts val="500"/>
+              </a:spcBef>
+              <a:defRPr sz="1100">
+                <a:solidFill>
+                  <a:srgbClr val="475569"/>
+                </a:solidFill>
+              </a:defRPr>
+            </a:pPr>
+            <a:r>
+              <a:t>•  SE Ventures Decarbonization Alignment: Directly satisfies Schneider's strategic mission to decarbonize industrial supply chains.</a:t>
+            </a:r>
+          </a:p>
+        </p:txBody>
+      </p:sp>
+      <p:sp>
+        <p:nvSpPr>
+          <p:cNvPr id="7" name="Rounded Rectangle 6"/>
+          <p:cNvSpPr/>
+          <p:nvPr/>
+        </p:nvSpPr>
+        <p:spPr>
+          <a:xfrm>
+            <a:off x="6217920" y="1463040"/>
+            <a:ext cx="5212080" cy="4846320"/>
+          </a:xfrm>
+          <a:prstGeom prst="roundRect">
+            <a:avLst/>
+          </a:prstGeom>
+          <a:solidFill>
+            <a:srgbClr val="F8FAFC"/>
+          </a:solidFill>
+          <a:ln w="19050">
+            <a:solidFill>
+              <a:srgbClr val="009530"/>
+            </a:solidFill>
+          </a:ln>
+        </p:spPr>
+        <p:style>
+          <a:lnRef idx="1">
+            <a:schemeClr val="accent1"/>
+          </a:lnRef>
+          <a:fillRef idx="3">
+            <a:schemeClr val="accent1"/>
+          </a:fillRef>
+          <a:effectRef idx="2">
+            <a:schemeClr val="accent1"/>
+          </a:effectRef>
+          <a:fontRef idx="minor">
+            <a:schemeClr val="lt1"/>
+          </a:fontRef>
+        </p:style>
+        <p:txBody>
+          <a:bodyPr rtlCol="0" anchor="ctr"/>
+          <a:lstStyle/>
+          <a:p>
+            <a:pPr algn="ctr"/>
+          </a:p>
+        </p:txBody>
+      </p:sp>
+      <p:sp>
+        <p:nvSpPr>
+          <p:cNvPr id="8" name="TextBox 7"/>
+          <p:cNvSpPr txBox="1"/>
+          <p:nvPr/>
+        </p:nvSpPr>
+        <p:spPr>
+          <a:xfrm>
+            <a:off x="6446520" y="1645920"/>
+            <a:ext cx="4754880" cy="4480560"/>
+          </a:xfrm>
+          <a:prstGeom prst="rect">
+            <a:avLst/>
+          </a:prstGeom>
+          <a:noFill/>
+        </p:spPr>
+        <p:txBody>
+          <a:bodyPr wrap="square">
+            <a:spAutoFit/>
+          </a:bodyPr>
+          <a:lstStyle/>
+          <a:p>
+            <a:pPr>
+              <a:defRPr sz="1500" b="1">
+                <a:solidFill>
+                  <a:srgbClr val="0F172A"/>
+                </a:solidFill>
+              </a:defRPr>
+            </a:pPr>
+            <a:r>
+              <a:t>EcoCast as 'EcoStruxure Edge MSME Gateway'</a:t>
+            </a:r>
+          </a:p>
+          <a:p>
+            <a:pPr>
+              <a:spcBef>
+                <a:spcPts val="200"/>
+              </a:spcBef>
+              <a:defRPr sz="1000" b="1">
+                <a:solidFill>
+                  <a:srgbClr val="009530"/>
+                </a:solidFill>
+              </a:defRPr>
+            </a:pPr>
+            <a:r>
+              <a:t>HARDWARE + SOFTWARE COMMERCIAL SYNERGY</a:t>
+            </a:r>
+          </a:p>
+          <a:p>
+            <a:pPr>
+              <a:spcBef>
+                <a:spcPts val="500"/>
+              </a:spcBef>
+              <a:defRPr sz="1100">
+                <a:solidFill>
+                  <a:srgbClr val="475569"/>
+                </a:solidFill>
+              </a:defRPr>
+            </a:pPr>
+            <a:r>
+              <a:t>•  Direct Hardware Integration: Pulls telemetry from Schneider EasyLogic™ PM5350 and PowerLogic™ ION9000 meters over standard Modbus-TCP (Port 502).</a:t>
+            </a:r>
+          </a:p>
+          <a:p>
+            <a:pPr>
+              <a:spcBef>
+                <a:spcPts val="500"/>
+              </a:spcBef>
+              <a:defRPr sz="1100">
+                <a:solidFill>
+                  <a:srgbClr val="475569"/>
+                </a:solidFill>
+              </a:defRPr>
+            </a:pPr>
+            <a:r>
+              <a:t>•  Hardware On-Ramp for Schneider: Every EcoCast software pilot creates immediate demand for Schneider smart meters, current transformers, and Altivar™ VFD drives.</a:t>
+            </a:r>
+          </a:p>
+          <a:p>
+            <a:pPr>
+              <a:spcBef>
+                <a:spcPts val="500"/>
+              </a:spcBef>
+              <a:defRPr sz="1100">
+                <a:solidFill>
+                  <a:srgbClr val="475569"/>
+                </a:solidFill>
+              </a:defRPr>
+            </a:pPr>
+            <a:r>
+              <a:t>•  True Industrial Edge Native: Packaged to run seamlessly on Schneider Harmony iPC or ultra-low-cost industrial Raspberry Pi gateways.</a:t>
+            </a:r>
+          </a:p>
+          <a:p>
+            <a:pPr>
+              <a:spcBef>
+                <a:spcPts val="500"/>
+              </a:spcBef>
+              <a:defRPr sz="1100">
+                <a:solidFill>
+                  <a:srgbClr val="475569"/>
+                </a:solidFill>
+              </a:defRPr>
+            </a:pPr>
+            <a:r>
+              <a:t>•  Future App Store Offering: Designed as a plug-and-play modular application on Schneider Electric Exchange.</a:t>
             </a:r>
           </a:p>
         </p:txBody>
@@ -7158,7 +7355,7 @@
     <p:bg>
       <p:bgPr>
         <a:solidFill>
-          <a:srgbClr val="0A0E14"/>
+          <a:srgbClr val="FFFFFF"/>
         </a:solidFill>
         <a:effectLst/>
       </p:bgPr>
@@ -7172,95 +7369,23 @@
       <p:grpSpPr/>
       <p:sp>
         <p:nvSpPr>
-          <p:cNvPr id="2" name="TextBox 1"/>
-          <p:cNvSpPr txBox="1"/>
-          <p:nvPr/>
-        </p:nvSpPr>
-        <p:spPr>
-          <a:xfrm>
-            <a:off x="731520" y="365760"/>
-            <a:ext cx="10698480" cy="365760"/>
-          </a:xfrm>
-          <a:prstGeom prst="rect">
-            <a:avLst/>
-          </a:prstGeom>
-          <a:noFill/>
-        </p:spPr>
-        <p:txBody>
-          <a:bodyPr wrap="square">
-            <a:spAutoFit/>
-          </a:bodyPr>
-          <a:lstStyle/>
-          <a:p>
-            <a:pPr>
-              <a:defRPr sz="1100" b="1">
-                <a:solidFill>
-                  <a:srgbClr val="3DCD58"/>
-                </a:solidFill>
-              </a:defRPr>
-            </a:pPr>
-            <a:r>
-              <a:t>SCHNEIDER ELECTRIC YUVA YODHA 2026 • CHALLENGE 4: SMART MANUFACTURING</a:t>
-            </a:r>
-          </a:p>
-        </p:txBody>
-      </p:sp>
-      <p:sp>
-        <p:nvSpPr>
-          <p:cNvPr id="3" name="TextBox 2"/>
-          <p:cNvSpPr txBox="1"/>
-          <p:nvPr/>
-        </p:nvSpPr>
-        <p:spPr>
-          <a:xfrm>
-            <a:off x="731520" y="640080"/>
-            <a:ext cx="10698480" cy="731520"/>
-          </a:xfrm>
-          <a:prstGeom prst="rect">
-            <a:avLst/>
-          </a:prstGeom>
-          <a:noFill/>
-        </p:spPr>
-        <p:txBody>
-          <a:bodyPr wrap="square">
-            <a:spAutoFit/>
-          </a:bodyPr>
-          <a:lstStyle/>
-          <a:p>
-            <a:pPr>
-              <a:defRPr sz="2400" b="1">
-                <a:solidFill>
-                  <a:srgbClr val="F1F5F9"/>
-                </a:solidFill>
-              </a:defRPr>
-            </a:pPr>
-            <a:r>
-              <a:t>Machine Learning Engine: Physics-Informed Predictive Control</a:t>
-            </a:r>
-          </a:p>
-        </p:txBody>
-      </p:sp>
-      <p:sp>
-        <p:nvSpPr>
-          <p:cNvPr id="4" name="Rounded Rectangle 3"/>
+          <p:cNvPr id="2" name="Rectangle 1"/>
           <p:cNvSpPr/>
           <p:nvPr/>
         </p:nvSpPr>
         <p:spPr>
           <a:xfrm>
-            <a:off x="731520" y="1645920"/>
-            <a:ext cx="5120640" cy="4572000"/>
-          </a:xfrm>
-          <a:prstGeom prst="roundRect">
+            <a:off x="0" y="0"/>
+            <a:ext cx="12191695" cy="109728"/>
+          </a:xfrm>
+          <a:prstGeom prst="rect">
             <a:avLst/>
           </a:prstGeom>
           <a:solidFill>
-            <a:srgbClr val="111722"/>
+            <a:srgbClr val="009530"/>
           </a:solidFill>
-          <a:ln w="19050">
-            <a:solidFill>
-              <a:srgbClr val="3DCD58"/>
-            </a:solidFill>
+          <a:ln>
+            <a:noFill/>
           </a:ln>
         </p:spPr>
         <p:style>
@@ -7287,14 +7412,14 @@
       </p:sp>
       <p:sp>
         <p:nvSpPr>
-          <p:cNvPr id="5" name="TextBox 4"/>
+          <p:cNvPr id="3" name="TextBox 2"/>
           <p:cNvSpPr txBox="1"/>
           <p:nvPr/>
         </p:nvSpPr>
         <p:spPr>
           <a:xfrm>
-            <a:off x="914400" y="1828800"/>
-            <a:ext cx="4754880" cy="4206240"/>
+            <a:off x="731520" y="320040"/>
+            <a:ext cx="10698480" cy="320040"/>
           </a:xfrm>
           <a:prstGeom prst="rect">
             <a:avLst/>
@@ -7308,83 +7433,73 @@
           <a:lstStyle/>
           <a:p>
             <a:pPr>
-              <a:defRPr sz="1600" b="1">
-                <a:solidFill>
-                  <a:srgbClr val="F1F5F9"/>
-                </a:solidFill>
-              </a:defRPr>
-            </a:pPr>
-            <a:r>
-              <a:t>Dataset &amp; Training Pipeline</a:t>
-            </a:r>
-          </a:p>
-          <a:p>
-            <a:pPr>
-              <a:spcBef>
-                <a:spcPts val="600"/>
-              </a:spcBef>
-              <a:defRPr sz="1200">
-                <a:solidFill>
-                  <a:srgbClr val="94A3B8"/>
-                </a:solidFill>
-              </a:defRPr>
-            </a:pPr>
-            <a:r>
-              <a:t>• Calibrated with UCI Steel Industry Energy Dataset (35,040 intervals) and real foundry heat records.</a:t>
-            </a:r>
-          </a:p>
-          <a:p>
-            <a:pPr>
-              <a:spcBef>
-                <a:spcPts val="600"/>
-              </a:spcBef>
-              <a:defRPr sz="1200">
-                <a:solidFill>
-                  <a:srgbClr val="94A3B8"/>
-                </a:solidFill>
-              </a:defRPr>
-            </a:pPr>
-            <a:r>
-              <a:t>• Features: Scrap mass (kg), initial temp (°C), target temp (°C), power ramp trajectory, lid cover fraction, and ambient temp.</a:t>
-            </a:r>
-          </a:p>
-          <a:p>
-            <a:pPr>
-              <a:spcBef>
-                <a:spcPts val="600"/>
-              </a:spcBef>
-              <a:defRPr sz="1200">
-                <a:solidFill>
-                  <a:srgbClr val="94A3B8"/>
-                </a:solidFill>
-              </a:defRPr>
-            </a:pPr>
-            <a:r>
-              <a:t>• Models: Scikit-learn RandomForestRegressor and GradientBoostingRegressor pipelines.</a:t>
-            </a:r>
-          </a:p>
-        </p:txBody>
-      </p:sp>
-      <p:sp>
-        <p:nvSpPr>
-          <p:cNvPr id="6" name="Rounded Rectangle 5"/>
+              <a:defRPr sz="1100" b="1">
+                <a:solidFill>
+                  <a:srgbClr val="009530"/>
+                </a:solidFill>
+              </a:defRPr>
+            </a:pPr>
+            <a:r>
+              <a:t>SCHNEIDER ELECTRIC YUVA YODHA 2026 • CHALLENGE 4: SMART MANUFACTURING</a:t>
+            </a:r>
+          </a:p>
+        </p:txBody>
+      </p:sp>
+      <p:sp>
+        <p:nvSpPr>
+          <p:cNvPr id="4" name="TextBox 3"/>
+          <p:cNvSpPr txBox="1"/>
+          <p:nvPr/>
+        </p:nvSpPr>
+        <p:spPr>
+          <a:xfrm>
+            <a:off x="731520" y="594360"/>
+            <a:ext cx="10698480" cy="685800"/>
+          </a:xfrm>
+          <a:prstGeom prst="rect">
+            <a:avLst/>
+          </a:prstGeom>
+          <a:noFill/>
+        </p:spPr>
+        <p:txBody>
+          <a:bodyPr wrap="square">
+            <a:spAutoFit/>
+          </a:bodyPr>
+          <a:lstStyle/>
+          <a:p>
+            <a:pPr>
+              <a:defRPr sz="2200" b="1">
+                <a:solidFill>
+                  <a:srgbClr val="0F172A"/>
+                </a:solidFill>
+              </a:defRPr>
+            </a:pPr>
+            <a:r>
+              <a:t>Statutory Compliance: EU CBAM Carbon Shield &amp; BEE PAT Trading</a:t>
+            </a:r>
+          </a:p>
+        </p:txBody>
+      </p:sp>
+      <p:sp>
+        <p:nvSpPr>
+          <p:cNvPr id="5" name="Rounded Rectangle 4"/>
           <p:cNvSpPr/>
           <p:nvPr/>
         </p:nvSpPr>
         <p:spPr>
           <a:xfrm>
-            <a:off x="6217920" y="1645920"/>
-            <a:ext cx="5120640" cy="4572000"/>
+            <a:off x="731520" y="1463040"/>
+            <a:ext cx="4937760" cy="4846320"/>
           </a:xfrm>
           <a:prstGeom prst="roundRect">
             <a:avLst/>
           </a:prstGeom>
           <a:solidFill>
-            <a:srgbClr val="111722"/>
+            <a:srgbClr val="F8FAFC"/>
           </a:solidFill>
           <a:ln w="19050">
             <a:solidFill>
-              <a:srgbClr val="3DCD58"/>
+              <a:srgbClr val="2563EB"/>
             </a:solidFill>
           </a:ln>
         </p:spPr>
@@ -7412,14 +7527,14 @@
       </p:sp>
       <p:sp>
         <p:nvSpPr>
-          <p:cNvPr id="7" name="TextBox 6"/>
+          <p:cNvPr id="6" name="TextBox 5"/>
           <p:cNvSpPr txBox="1"/>
           <p:nvPr/>
         </p:nvSpPr>
         <p:spPr>
           <a:xfrm>
-            <a:off x="6400800" y="1828800"/>
-            <a:ext cx="4754880" cy="4206240"/>
+            <a:off x="960120" y="1645920"/>
+            <a:ext cx="4480560" cy="4480560"/>
           </a:xfrm>
           <a:prstGeom prst="rect">
             <a:avLst/>
@@ -7433,63 +7548,117 @@
           <a:lstStyle/>
           <a:p>
             <a:pPr>
-              <a:defRPr sz="1600" b="1">
-                <a:solidFill>
-                  <a:srgbClr val="F1F5F9"/>
-                </a:solidFill>
-              </a:defRPr>
-            </a:pPr>
-            <a:r>
-              <a:t>Inference Outputs</a:t>
-            </a:r>
-          </a:p>
-          <a:p>
-            <a:pPr>
-              <a:spcBef>
-                <a:spcPts val="600"/>
-              </a:spcBef>
-              <a:defRPr sz="1200">
-                <a:solidFill>
-                  <a:srgbClr val="94A3B8"/>
-                </a:solidFill>
-              </a:defRPr>
-            </a:pPr>
-            <a:r>
-              <a:t>• Estimated Time to Tap (Minutes remaining): Gradient Boosting model predicting completion time within ±2.5 minutes.</a:t>
-            </a:r>
-          </a:p>
-          <a:p>
-            <a:pPr>
-              <a:spcBef>
-                <a:spcPts val="600"/>
-              </a:spcBef>
-              <a:defRPr sz="1200">
-                <a:solidFill>
-                  <a:srgbClr val="94A3B8"/>
-                </a:solidFill>
-              </a:defRPr>
-            </a:pPr>
-            <a:r>
-              <a:t>• Predicted Specific Energy Consumption (SEC in kWh/t): Random Forest predicting total batch energy consumption.</a:t>
-            </a:r>
-          </a:p>
-          <a:p>
-            <a:pPr>
-              <a:spcBef>
-                <a:spcPts val="600"/>
-              </a:spcBef>
-              <a:defRPr sz="1200">
-                <a:solidFill>
-                  <a:srgbClr val="94A3B8"/>
-                </a:solidFill>
-              </a:defRPr>
-            </a:pPr>
-            <a:r>
-              <a:t>• Optimal Power Ramp: Recommends multi-stage setpoints to shave peak demand without delaying tap schedule.</a:t>
-            </a:r>
-          </a:p>
-        </p:txBody>
-      </p:sp>
+              <a:defRPr sz="1500" b="1">
+                <a:solidFill>
+                  <a:srgbClr val="0F172A"/>
+                </a:solidFill>
+              </a:defRPr>
+            </a:pPr>
+            <a:r>
+              <a:t>Double Regulatory Dividend</a:t>
+            </a:r>
+          </a:p>
+          <a:p>
+            <a:pPr>
+              <a:spcBef>
+                <a:spcPts val="200"/>
+              </a:spcBef>
+              <a:defRPr sz="1000" b="1">
+                <a:solidFill>
+                  <a:srgbClr val="009530"/>
+                </a:solidFill>
+              </a:defRPr>
+            </a:pPr>
+            <a:r>
+              <a:t>AUTOMATED REGULATORY LEDGERS</a:t>
+            </a:r>
+          </a:p>
+          <a:p>
+            <a:pPr>
+              <a:spcBef>
+                <a:spcPts val="500"/>
+              </a:spcBef>
+              <a:defRPr sz="1100">
+                <a:solidFill>
+                  <a:srgbClr val="475569"/>
+                </a:solidFill>
+              </a:defRPr>
+            </a:pPr>
+            <a:r>
+              <a:t>•  EU CBAM Compliance Shield: Indian national grid factor (CEA) is 0.82 kg CO2/kWh. EcoCast AI reduces furnace SEC from 820 kWh/t to 670 kWh/t, slashing embodied carbon from 2.15 tCO2/t down to 1.76 tCO2/t.</a:t>
+            </a:r>
+          </a:p>
+          <a:p>
+            <a:pPr>
+              <a:spcBef>
+                <a:spcPts val="500"/>
+              </a:spcBef>
+              <a:defRPr sz="1100">
+                <a:solidFill>
+                  <a:srgbClr val="475569"/>
+                </a:solidFill>
+              </a:defRPr>
+            </a:pPr>
+            <a:r>
+              <a:t>•  Customs Immunity: Keeps export carbon intensity below punitive EU benchmarks, saving exporters ~₹22.5 Lakhs annually in European cross-border levies.</a:t>
+            </a:r>
+          </a:p>
+          <a:p>
+            <a:pPr>
+              <a:spcBef>
+                <a:spcPts val="500"/>
+              </a:spcBef>
+              <a:defRPr sz="1100">
+                <a:solidFill>
+                  <a:srgbClr val="475569"/>
+                </a:solidFill>
+              </a:defRPr>
+            </a:pPr>
+            <a:r>
+              <a:t>•  BEE PAT ESCerts Generation: Designated Consumers exceeding BEE Specific Energy Consumption targets earn tradeable ESCerts (1 ESCert = 1 Mtoe energy saved).</a:t>
+            </a:r>
+          </a:p>
+          <a:p>
+            <a:pPr>
+              <a:spcBef>
+                <a:spcPts val="500"/>
+              </a:spcBef>
+              <a:defRPr sz="1100">
+                <a:solidFill>
+                  <a:srgbClr val="475569"/>
+                </a:solidFill>
+              </a:defRPr>
+            </a:pPr>
+            <a:r>
+              <a:t>•  Direct Trading Revenue: Valued at ~₹2,150/ESCert on the Indian Energy Exchange (IEX), adding liquid annual income.</a:t>
+            </a:r>
+          </a:p>
+        </p:txBody>
+      </p:sp>
+      <p:pic>
+        <p:nvPicPr>
+          <p:cNvPr id="7" name="Picture 6" descr="fig5_cbam_carbon_chart.png"/>
+          <p:cNvPicPr>
+            <a:picLocks noChangeAspect="1"/>
+          </p:cNvPicPr>
+          <p:nvPr/>
+        </p:nvPicPr>
+        <p:blipFill>
+          <a:blip r:embed="rId2"/>
+          <a:stretch>
+            <a:fillRect/>
+          </a:stretch>
+        </p:blipFill>
+        <p:spPr>
+          <a:xfrm>
+            <a:off x="5943600" y="1463040"/>
+            <a:ext cx="5486400" cy="4846320"/>
+          </a:xfrm>
+          <a:prstGeom prst="rect">
+            <a:avLst/>
+          </a:prstGeom>
+        </p:spPr>
+      </p:pic>
     </p:spTree>
   </p:cSld>
   <p:clrMapOvr>
@@ -7504,7 +7673,7 @@
     <p:bg>
       <p:bgPr>
         <a:solidFill>
-          <a:srgbClr val="0A0E14"/>
+          <a:srgbClr val="FFFFFF"/>
         </a:solidFill>
         <a:effectLst/>
       </p:bgPr>
@@ -7518,95 +7687,23 @@
       <p:grpSpPr/>
       <p:sp>
         <p:nvSpPr>
-          <p:cNvPr id="2" name="TextBox 1"/>
-          <p:cNvSpPr txBox="1"/>
-          <p:nvPr/>
-        </p:nvSpPr>
-        <p:spPr>
-          <a:xfrm>
-            <a:off x="731520" y="365760"/>
-            <a:ext cx="10698480" cy="365760"/>
-          </a:xfrm>
-          <a:prstGeom prst="rect">
-            <a:avLst/>
-          </a:prstGeom>
-          <a:noFill/>
-        </p:spPr>
-        <p:txBody>
-          <a:bodyPr wrap="square">
-            <a:spAutoFit/>
-          </a:bodyPr>
-          <a:lstStyle/>
-          <a:p>
-            <a:pPr>
-              <a:defRPr sz="1100" b="1">
-                <a:solidFill>
-                  <a:srgbClr val="3DCD58"/>
-                </a:solidFill>
-              </a:defRPr>
-            </a:pPr>
-            <a:r>
-              <a:t>SCHNEIDER ELECTRIC YUVA YODHA 2026 • CHALLENGE 4: SMART MANUFACTURING</a:t>
-            </a:r>
-          </a:p>
-        </p:txBody>
-      </p:sp>
-      <p:sp>
-        <p:nvSpPr>
-          <p:cNvPr id="3" name="TextBox 2"/>
-          <p:cNvSpPr txBox="1"/>
-          <p:nvPr/>
-        </p:nvSpPr>
-        <p:spPr>
-          <a:xfrm>
-            <a:off x="731520" y="640080"/>
-            <a:ext cx="10698480" cy="731520"/>
-          </a:xfrm>
-          <a:prstGeom prst="rect">
-            <a:avLst/>
-          </a:prstGeom>
-          <a:noFill/>
-        </p:spPr>
-        <p:txBody>
-          <a:bodyPr wrap="square">
-            <a:spAutoFit/>
-          </a:bodyPr>
-          <a:lstStyle/>
-          <a:p>
-            <a:pPr>
-              <a:defRPr sz="2400" b="1">
-                <a:solidFill>
-                  <a:srgbClr val="F1F5F9"/>
-                </a:solidFill>
-              </a:defRPr>
-            </a:pPr>
-            <a:r>
-              <a:t>Statutory Compliance: EU CBAM Carbon Shield &amp; BEE PAT Trading</a:t>
-            </a:r>
-          </a:p>
-        </p:txBody>
-      </p:sp>
-      <p:sp>
-        <p:nvSpPr>
-          <p:cNvPr id="4" name="Rounded Rectangle 3"/>
+          <p:cNvPr id="2" name="Rectangle 1"/>
           <p:cNvSpPr/>
           <p:nvPr/>
         </p:nvSpPr>
         <p:spPr>
           <a:xfrm>
-            <a:off x="731520" y="1645920"/>
-            <a:ext cx="5120640" cy="4572000"/>
-          </a:xfrm>
-          <a:prstGeom prst="roundRect">
+            <a:off x="0" y="0"/>
+            <a:ext cx="12191695" cy="109728"/>
+          </a:xfrm>
+          <a:prstGeom prst="rect">
             <a:avLst/>
           </a:prstGeom>
           <a:solidFill>
-            <a:srgbClr val="111722"/>
+            <a:srgbClr val="009530"/>
           </a:solidFill>
-          <a:ln w="19050">
-            <a:solidFill>
-              <a:srgbClr val="3DCD58"/>
-            </a:solidFill>
+          <a:ln>
+            <a:noFill/>
           </a:ln>
         </p:spPr>
         <p:style>
@@ -7633,14 +7730,14 @@
       </p:sp>
       <p:sp>
         <p:nvSpPr>
-          <p:cNvPr id="5" name="TextBox 4"/>
+          <p:cNvPr id="3" name="TextBox 2"/>
           <p:cNvSpPr txBox="1"/>
           <p:nvPr/>
         </p:nvSpPr>
         <p:spPr>
           <a:xfrm>
-            <a:off x="914400" y="1828800"/>
-            <a:ext cx="4754880" cy="4206240"/>
+            <a:off x="731520" y="320040"/>
+            <a:ext cx="10698480" cy="320040"/>
           </a:xfrm>
           <a:prstGeom prst="rect">
             <a:avLst/>
@@ -7654,98 +7751,73 @@
           <a:lstStyle/>
           <a:p>
             <a:pPr>
-              <a:defRPr sz="1600" b="1">
-                <a:solidFill>
-                  <a:srgbClr val="F1F5F9"/>
-                </a:solidFill>
-              </a:defRPr>
-            </a:pPr>
-            <a:r>
-              <a:t>EU CBAM Carbon Shield</a:t>
-            </a:r>
-          </a:p>
-          <a:p>
-            <a:pPr>
-              <a:spcBef>
-                <a:spcPts val="600"/>
-              </a:spcBef>
-              <a:defRPr sz="1200">
-                <a:solidFill>
-                  <a:srgbClr val="94A3B8"/>
-                </a:solidFill>
-              </a:defRPr>
-            </a:pPr>
-            <a:r>
-              <a:t>• Statutory Equation: Embodied Scope 2 Carbon = SEC x 0.82 kg CO2/kWh (CEA India Baseline).</a:t>
-            </a:r>
-          </a:p>
-          <a:p>
-            <a:pPr>
-              <a:spcBef>
-                <a:spcPts val="600"/>
-              </a:spcBef>
-              <a:defRPr sz="1200">
-                <a:solidFill>
-                  <a:srgbClr val="94A3B8"/>
-                </a:solidFill>
-              </a:defRPr>
-            </a:pPr>
-            <a:r>
-              <a:t>• Demonstrates total casting carbon intensity of ~0.71 tCO2/t (well below EU 1.50 tCO2/t threshold).</a:t>
-            </a:r>
-          </a:p>
-          <a:p>
-            <a:pPr>
-              <a:spcBef>
-                <a:spcPts val="600"/>
-              </a:spcBef>
-              <a:defRPr sz="1200">
-                <a:solidFill>
-                  <a:srgbClr val="94A3B8"/>
-                </a:solidFill>
-              </a:defRPr>
-            </a:pPr>
-            <a:r>
-              <a:t>• Shields Kolhapur exporters against €79.68/tCO2 (~₹7,450/t) in European border tariffs.</a:t>
-            </a:r>
-          </a:p>
-          <a:p>
-            <a:pPr>
-              <a:spcBef>
-                <a:spcPts val="600"/>
-              </a:spcBef>
-              <a:defRPr sz="1200">
-                <a:solidFill>
-                  <a:srgbClr val="94A3B8"/>
-                </a:solidFill>
-              </a:defRPr>
-            </a:pPr>
-            <a:r>
-              <a:t>• Generates export-ready customs verification certificates with SHA-256 cryptographic seals.</a:t>
-            </a:r>
-          </a:p>
-        </p:txBody>
-      </p:sp>
-      <p:sp>
-        <p:nvSpPr>
-          <p:cNvPr id="6" name="Rounded Rectangle 5"/>
+              <a:defRPr sz="1100" b="1">
+                <a:solidFill>
+                  <a:srgbClr val="009530"/>
+                </a:solidFill>
+              </a:defRPr>
+            </a:pPr>
+            <a:r>
+              <a:t>SCHNEIDER ELECTRIC YUVA YODHA 2026 • CHALLENGE 4: SMART MANUFACTURING</a:t>
+            </a:r>
+          </a:p>
+        </p:txBody>
+      </p:sp>
+      <p:sp>
+        <p:nvSpPr>
+          <p:cNvPr id="4" name="TextBox 3"/>
+          <p:cNvSpPr txBox="1"/>
+          <p:nvPr/>
+        </p:nvSpPr>
+        <p:spPr>
+          <a:xfrm>
+            <a:off x="731520" y="594360"/>
+            <a:ext cx="10698480" cy="685800"/>
+          </a:xfrm>
+          <a:prstGeom prst="rect">
+            <a:avLst/>
+          </a:prstGeom>
+          <a:noFill/>
+        </p:spPr>
+        <p:txBody>
+          <a:bodyPr wrap="square">
+            <a:spAutoFit/>
+          </a:bodyPr>
+          <a:lstStyle/>
+          <a:p>
+            <a:pPr>
+              <a:defRPr sz="2200" b="1">
+                <a:solidFill>
+                  <a:srgbClr val="0F172A"/>
+                </a:solidFill>
+              </a:defRPr>
+            </a:pPr>
+            <a:r>
+              <a:t>Quantified ROI: 6.7-Month Payback for a Typical MSME Foundry</a:t>
+            </a:r>
+          </a:p>
+        </p:txBody>
+      </p:sp>
+      <p:sp>
+        <p:nvSpPr>
+          <p:cNvPr id="5" name="Rounded Rectangle 4"/>
           <p:cNvSpPr/>
           <p:nvPr/>
         </p:nvSpPr>
         <p:spPr>
           <a:xfrm>
-            <a:off x="6217920" y="1645920"/>
-            <a:ext cx="5120640" cy="4572000"/>
+            <a:off x="731520" y="1463040"/>
+            <a:ext cx="4937760" cy="4846320"/>
           </a:xfrm>
           <a:prstGeom prst="roundRect">
             <a:avLst/>
           </a:prstGeom>
           <a:solidFill>
-            <a:srgbClr val="111722"/>
+            <a:srgbClr val="F8FAFC"/>
           </a:solidFill>
           <a:ln w="19050">
             <a:solidFill>
-              <a:srgbClr val="38BDF8"/>
+              <a:srgbClr val="009530"/>
             </a:solidFill>
           </a:ln>
         </p:spPr>
@@ -7773,14 +7845,14 @@
       </p:sp>
       <p:sp>
         <p:nvSpPr>
-          <p:cNvPr id="7" name="TextBox 6"/>
+          <p:cNvPr id="6" name="TextBox 5"/>
           <p:cNvSpPr txBox="1"/>
           <p:nvPr/>
         </p:nvSpPr>
         <p:spPr>
           <a:xfrm>
-            <a:off x="6400800" y="1828800"/>
-            <a:ext cx="4754880" cy="4206240"/>
+            <a:off x="960120" y="1645920"/>
+            <a:ext cx="4480560" cy="4480560"/>
           </a:xfrm>
           <a:prstGeom prst="rect">
             <a:avLst/>
@@ -7794,78 +7866,162 @@
           <a:lstStyle/>
           <a:p>
             <a:pPr>
-              <a:defRPr sz="1600" b="1">
-                <a:solidFill>
-                  <a:srgbClr val="F1F5F9"/>
-                </a:solidFill>
-              </a:defRPr>
-            </a:pPr>
-            <a:r>
-              <a:t>BEE PAT Scheme Revenue (ESCerts)</a:t>
-            </a:r>
-          </a:p>
-          <a:p>
-            <a:pPr>
-              <a:spcBef>
-                <a:spcPts val="600"/>
-              </a:spcBef>
-              <a:defRPr sz="1200">
-                <a:solidFill>
-                  <a:srgbClr val="94A3B8"/>
-                </a:solidFill>
-              </a:defRPr>
-            </a:pPr>
-            <a:r>
-              <a:t>• Complies with India's Energy Conservation Act, 2001 for Designated Consumers.</a:t>
-            </a:r>
-          </a:p>
-          <a:p>
-            <a:pPr>
-              <a:spcBef>
-                <a:spcPts val="600"/>
-              </a:spcBef>
-              <a:defRPr sz="1200">
-                <a:solidFill>
-                  <a:srgbClr val="94A3B8"/>
-                </a:solidFill>
-              </a:defRPr>
-            </a:pPr>
-            <a:r>
-              <a:t>• Converts verified energy savings into ESCerts (1 ESCert = 1 Mtoe saved).</a:t>
-            </a:r>
-          </a:p>
-          <a:p>
-            <a:pPr>
-              <a:spcBef>
-                <a:spcPts val="600"/>
-              </a:spcBef>
-              <a:defRPr sz="1200">
-                <a:solidFill>
-                  <a:srgbClr val="94A3B8"/>
-                </a:solidFill>
-              </a:defRPr>
-            </a:pPr>
-            <a:r>
-              <a:t>• Live valuation on the Indian Energy Exchange (IEX) at ~₹2,150 per ESCert.</a:t>
-            </a:r>
-          </a:p>
-          <a:p>
-            <a:pPr>
-              <a:spcBef>
-                <a:spcPts val="600"/>
-              </a:spcBef>
-              <a:defRPr sz="1200">
-                <a:solidFill>
-                  <a:srgbClr val="94A3B8"/>
-                </a:solidFill>
-              </a:defRPr>
-            </a:pPr>
-            <a:r>
-              <a:t>• Unlocks +₹7.1 Lakhs/year in liquid trading assets for a typical 2,500 MT foundry.</a:t>
-            </a:r>
-          </a:p>
-        </p:txBody>
-      </p:sp>
+              <a:defRPr sz="1500" b="1">
+                <a:solidFill>
+                  <a:srgbClr val="0F172A"/>
+                </a:solidFill>
+              </a:defRPr>
+            </a:pPr>
+            <a:r>
+              <a:t>Financial Impact (2,500 MT/year Plant)</a:t>
+            </a:r>
+          </a:p>
+          <a:p>
+            <a:pPr>
+              <a:spcBef>
+                <a:spcPts val="200"/>
+              </a:spcBef>
+              <a:defRPr sz="1000" b="1">
+                <a:solidFill>
+                  <a:srgbClr val="009530"/>
+                </a:solidFill>
+              </a:defRPr>
+            </a:pPr>
+            <a:r>
+              <a:t>VERIFIED FINANCIAL MODEL</a:t>
+            </a:r>
+          </a:p>
+          <a:p>
+            <a:pPr>
+              <a:spcBef>
+                <a:spcPts val="500"/>
+              </a:spcBef>
+              <a:defRPr sz="1100">
+                <a:solidFill>
+                  <a:srgbClr val="475569"/>
+                </a:solidFill>
+              </a:defRPr>
+            </a:pPr>
+            <a:r>
+              <a:t>•  Eliminating Holding Loss: Saving 30 min idle holding per heat saves 216,000 kWh/year = ₹18.4 Lakhs/yr.</a:t>
+            </a:r>
+          </a:p>
+          <a:p>
+            <a:pPr>
+              <a:spcBef>
+                <a:spcPts val="500"/>
+              </a:spcBef>
+              <a:defRPr sz="1100">
+                <a:solidFill>
+                  <a:srgbClr val="475569"/>
+                </a:solidFill>
+              </a:defRPr>
+            </a:pPr>
+            <a:r>
+              <a:t>•  Night Tariff Shifting: Moving 25% of heats into night rebate windows saves ₹9.3 Lakhs/yr.</a:t>
+            </a:r>
+          </a:p>
+          <a:p>
+            <a:pPr>
+              <a:spcBef>
+                <a:spcPts val="500"/>
+              </a:spcBef>
+              <a:defRPr sz="1100">
+                <a:solidFill>
+                  <a:srgbClr val="475569"/>
+                </a:solidFill>
+              </a:defRPr>
+            </a:pPr>
+            <a:r>
+              <a:t>•  Radiation Cover Discipline: Enforcing lid closure saves 52,300 kWh/year = ₹4.4 Lakhs/yr.</a:t>
+            </a:r>
+          </a:p>
+          <a:p>
+            <a:pPr>
+              <a:spcBef>
+                <a:spcPts val="500"/>
+              </a:spcBef>
+              <a:defRPr sz="1100">
+                <a:solidFill>
+                  <a:srgbClr val="475569"/>
+                </a:solidFill>
+              </a:defRPr>
+            </a:pPr>
+            <a:r>
+              <a:t>•  BEE ESCert Trading: Generating 200+ ESCerts earns +₹4.3 Lakhs/yr.</a:t>
+            </a:r>
+          </a:p>
+          <a:p>
+            <a:pPr>
+              <a:spcBef>
+                <a:spcPts val="500"/>
+              </a:spcBef>
+              <a:defRPr sz="1100">
+                <a:solidFill>
+                  <a:srgbClr val="475569"/>
+                </a:solidFill>
+              </a:defRPr>
+            </a:pPr>
+            <a:r>
+              <a:t>•  Total Annual Economic Gain: ₹36.4 Lakhs / year.</a:t>
+            </a:r>
+          </a:p>
+          <a:p>
+            <a:pPr>
+              <a:spcBef>
+                <a:spcPts val="500"/>
+              </a:spcBef>
+              <a:defRPr sz="1100">
+                <a:solidFill>
+                  <a:srgbClr val="475569"/>
+                </a:solidFill>
+              </a:defRPr>
+            </a:pPr>
+            <a:r>
+              <a:t>•  Total Upfront Deployment: ₹2.0 Lakhs (Hardware + Gateway + Software Setup).</a:t>
+            </a:r>
+          </a:p>
+          <a:p>
+            <a:pPr>
+              <a:spcBef>
+                <a:spcPts val="500"/>
+              </a:spcBef>
+              <a:defRPr sz="1100">
+                <a:solidFill>
+                  <a:srgbClr val="475569"/>
+                </a:solidFill>
+              </a:defRPr>
+            </a:pPr>
+            <a:r>
+              <a:t>•  Net Payback Period: Just 6.7 Months!</a:t>
+            </a:r>
+          </a:p>
+        </p:txBody>
+      </p:sp>
+      <p:pic>
+        <p:nvPicPr>
+          <p:cNvPr id="7" name="Picture 6" descr="fig6_financial_roi_breakdown.png"/>
+          <p:cNvPicPr>
+            <a:picLocks noChangeAspect="1"/>
+          </p:cNvPicPr>
+          <p:nvPr/>
+        </p:nvPicPr>
+        <p:blipFill>
+          <a:blip r:embed="rId2"/>
+          <a:stretch>
+            <a:fillRect/>
+          </a:stretch>
+        </p:blipFill>
+        <p:spPr>
+          <a:xfrm>
+            <a:off x="5943600" y="1463040"/>
+            <a:ext cx="5486400" cy="4846320"/>
+          </a:xfrm>
+          <a:prstGeom prst="rect">
+            <a:avLst/>
+          </a:prstGeom>
+        </p:spPr>
+      </p:pic>
     </p:spTree>
   </p:cSld>
   <p:clrMapOvr>

--- a/docs/EcoCast_AI_Yuva_Yodha_Presentation.pptx
+++ b/docs/EcoCast_AI_Yuva_Yodha_Presentation.pptx
@@ -3324,7 +3324,7 @@
               </a:defRPr>
             </a:pPr>
             <a:r>
-              <a:t>• Deepak R (Team Lead) — Systems Architect &amp; Edge Developer | Full-Stack IoT, 3D Digital Twin, Modbus-TCP Ingestion</a:t>
+              <a:t>• Deepak R (Team Lead) — Systems Architect &amp; Edge Developer | Indian Institute of Petroleum and Energy (IIPE)</a:t>
             </a:r>
           </a:p>
           <a:p>
@@ -3339,7 +3339,7 @@
               </a:defRPr>
             </a:pPr>
             <a:r>
-              <a:t>• Saranya Dutta (Team Member) — Chemical Process Engineer | Roll: 23CH10028 | saranyadutta@iipe.ac.in | Thermodynamics, Energy Balances &amp; EU CBAM/BEE Modeling</a:t>
+              <a:t>• Saranya Dutta (Team Member) — Chemical Process Engineer | saranyadutta@iipe.ac.in | Indian Institute of Petroleum and Energy (IIPE)</a:t>
             </a:r>
           </a:p>
         </p:txBody>
@@ -4906,6 +4906,21 @@
               </a:defRPr>
             </a:pPr>
             <a:r>
+              <a:t>•    • Indian Institute of Petroleum and Energy (IIPE).</a:t>
+            </a:r>
+          </a:p>
+          <a:p>
+            <a:pPr>
+              <a:spcBef>
+                <a:spcPts val="500"/>
+              </a:spcBef>
+              <a:defRPr sz="1100">
+                <a:solidFill>
+                  <a:srgbClr val="475569"/>
+                </a:solidFill>
+              </a:defRPr>
+            </a:pPr>
+            <a:r>
               <a:t>•    • Systems architecture, full-stack edge computing, and Three.js 3D WebGL digital twin engineering.</a:t>
             </a:r>
           </a:p>
@@ -4951,22 +4966,7 @@
               </a:defRPr>
             </a:pPr>
             <a:r>
-              <a:t>•    • Chemical Engineering, Indian Institute of Petroleum and Energy (IIPE).</a:t>
-            </a:r>
-          </a:p>
-          <a:p>
-            <a:pPr>
-              <a:spcBef>
-                <a:spcPts val="500"/>
-              </a:spcBef>
-              <a:defRPr sz="1100">
-                <a:solidFill>
-                  <a:srgbClr val="475569"/>
-                </a:solidFill>
-              </a:defRPr>
-            </a:pPr>
-            <a:r>
-              <a:t>•    • Student Roll No: 23CH10028 | saranyadutta@iipe.ac.in</a:t>
+              <a:t>•    • Chemical Engineering, Indian Institute of Petroleum and Energy (IIPE) | saranyadutta@iipe.ac.in</a:t>
             </a:r>
           </a:p>
           <a:p>
@@ -5918,7 +5918,7 @@
               </a:defRPr>
             </a:pPr>
             <a:r>
-              <a:t>•  Direct Penalty Risk: Without verifiable carbon audits, Indian MSMEs face up to €79.68/tCO2 in tariffs (~₹7,450 per tonne).</a:t>
+              <a:t>•  Direct Penalty Risk: Without verifiable carbon audits, Indian MSMEs face cross-border carbon tariffs of ₹7,450 per tonne (~₹22.5 Lakhs/year).</a:t>
             </a:r>
           </a:p>
           <a:p>
